--- a/03-build/pptx/C6plus_U7_alumno.pptx
+++ b/03-build/pptx/C6plus_U7_alumno.pptx
@@ -4639,7 +4639,6 @@
               <a:srgbClr val="E4E3DE"/>
             </a:solidFill>
           </a:ln>
-          <a:effectLst/>
           <a:effectLst>
             <a:outerShdw blurRad="90000" dist="38000" dir="5400000" rotWithShape="0">
               <a:srgbClr val="20242E">
@@ -4873,7 +4872,6 @@
               <a:srgbClr val="E4E3DE"/>
             </a:solidFill>
           </a:ln>
-          <a:effectLst/>
           <a:effectLst>
             <a:outerShdw blurRad="90000" dist="38000" dir="5400000" rotWithShape="0">
               <a:srgbClr val="20242E">
@@ -5107,7 +5105,6 @@
               <a:srgbClr val="E4E3DE"/>
             </a:solidFill>
           </a:ln>
-          <a:effectLst/>
           <a:effectLst>
             <a:outerShdw blurRad="90000" dist="38000" dir="5400000" rotWithShape="0">
               <a:srgbClr val="20242E">
@@ -5341,7 +5338,6 @@
               <a:srgbClr val="E4E3DE"/>
             </a:solidFill>
           </a:ln>
-          <a:effectLst/>
           <a:effectLst>
             <a:outerShdw blurRad="90000" dist="38000" dir="5400000" rotWithShape="0">
               <a:srgbClr val="20242E">
@@ -13572,7 +13568,6 @@
               <a:srgbClr val="E4E3DE"/>
             </a:solidFill>
           </a:ln>
-          <a:effectLst/>
           <a:effectLst>
             <a:outerShdw blurRad="90000" dist="38000" dir="5400000" rotWithShape="0">
               <a:srgbClr val="20242E">
@@ -14251,7 +14246,6 @@
               <a:srgbClr val="7C56A9"/>
             </a:solidFill>
           </a:ln>
-          <a:effectLst/>
           <a:effectLst>
             <a:outerShdw blurRad="90000" dist="38000" dir="5400000" rotWithShape="0">
               <a:srgbClr val="20242E">
@@ -21169,7 +21163,6 @@
               <a:srgbClr val="7C56A9"/>
             </a:solidFill>
           </a:ln>
-          <a:effectLst/>
           <a:effectLst>
             <a:outerShdw blurRad="90000" dist="38000" dir="5400000" rotWithShape="0">
               <a:srgbClr val="20242E">
@@ -21403,7 +21396,6 @@
               <a:srgbClr val="7C56A9"/>
             </a:solidFill>
           </a:ln>
-          <a:effectLst/>
           <a:effectLst>
             <a:outerShdw blurRad="90000" dist="38000" dir="5400000" rotWithShape="0">
               <a:srgbClr val="20242E">
@@ -21637,7 +21629,6 @@
               <a:srgbClr val="7C56A9"/>
             </a:solidFill>
           </a:ln>
-          <a:effectLst/>
           <a:effectLst>
             <a:outerShdw blurRad="90000" dist="38000" dir="5400000" rotWithShape="0">
               <a:srgbClr val="20242E">
@@ -27015,7 +27006,6 @@
               <a:srgbClr val="7C56A9"/>
             </a:solidFill>
           </a:ln>
-          <a:effectLst/>
           <a:effectLst>
             <a:outerShdw blurRad="90000" dist="38000" dir="5400000" rotWithShape="0">
               <a:srgbClr val="20242E">
@@ -27318,7 +27308,6 @@
               <a:srgbClr val="7C56A9"/>
             </a:solidFill>
           </a:ln>
-          <a:effectLst/>
           <a:effectLst>
             <a:outerShdw blurRad="90000" dist="38000" dir="5400000" rotWithShape="0">
               <a:srgbClr val="20242E">
@@ -27621,7 +27610,6 @@
               <a:srgbClr val="7C56A9"/>
             </a:solidFill>
           </a:ln>
-          <a:effectLst/>
           <a:effectLst>
             <a:outerShdw blurRad="90000" dist="38000" dir="5400000" rotWithShape="0">
               <a:srgbClr val="20242E">
@@ -27924,7 +27912,6 @@
               <a:srgbClr val="7C56A9"/>
             </a:solidFill>
           </a:ln>
-          <a:effectLst/>
           <a:effectLst>
             <a:outerShdw blurRad="90000" dist="38000" dir="5400000" rotWithShape="0">
               <a:srgbClr val="20242E">
@@ -28227,7 +28214,6 @@
               <a:srgbClr val="7C56A9"/>
             </a:solidFill>
           </a:ln>
-          <a:effectLst/>
           <a:effectLst>
             <a:outerShdw blurRad="90000" dist="38000" dir="5400000" rotWithShape="0">
               <a:srgbClr val="20242E">
@@ -28530,7 +28516,6 @@
               <a:srgbClr val="5B3E83"/>
             </a:solidFill>
           </a:ln>
-          <a:effectLst/>
           <a:effectLst>
             <a:outerShdw blurRad="90000" dist="38000" dir="5400000" rotWithShape="0">
               <a:srgbClr val="20242E">
@@ -28833,7 +28818,6 @@
               <a:srgbClr val="5B3E83"/>
             </a:solidFill>
           </a:ln>
-          <a:effectLst/>
           <a:effectLst>
             <a:outerShdw blurRad="90000" dist="38000" dir="5400000" rotWithShape="0">
               <a:srgbClr val="20242E">
@@ -29136,7 +29120,6 @@
               <a:srgbClr val="5B3E83"/>
             </a:solidFill>
           </a:ln>
-          <a:effectLst/>
           <a:effectLst>
             <a:outerShdw blurRad="90000" dist="38000" dir="5400000" rotWithShape="0">
               <a:srgbClr val="20242E">
@@ -29963,7 +29946,6 @@
           <a:ln>
             <a:noFill/>
           </a:ln>
-          <a:effectLst/>
           <a:effectLst>
             <a:outerShdw blurRad="90000" dist="38000" dir="5400000" rotWithShape="0">
               <a:srgbClr val="20242E">
@@ -35525,7 +35507,6 @@
           <a:ln>
             <a:noFill/>
           </a:ln>
-          <a:effectLst/>
           <a:effectLst>
             <a:outerShdw blurRad="90000" dist="38000" dir="5400000" rotWithShape="0">
               <a:srgbClr val="20242E">
@@ -42354,7 +42335,6 @@
           <a:ln>
             <a:noFill/>
           </a:ln>
-          <a:effectLst/>
           <a:effectLst>
             <a:outerShdw blurRad="90000" dist="38000" dir="5400000" rotWithShape="0">
               <a:srgbClr val="20242E">
@@ -46490,7 +46470,6 @@
               <a:srgbClr val="7C56A9"/>
             </a:solidFill>
           </a:ln>
-          <a:effectLst/>
           <a:effectLst>
             <a:outerShdw blurRad="90000" dist="38000" dir="5400000" rotWithShape="0">
               <a:srgbClr val="20242E">

--- a/03-build/pptx/C6plus_U7_alumno.pptx
+++ b/03-build/pptx/C6plus_U7_alumno.pptx
@@ -11,6 +11,9 @@
     <p:sldId id="259" r:id="rId10"/>
     <p:sldId id="260" r:id="rId11"/>
     <p:sldId id="261" r:id="rId12"/>
+    <p:sldId id="276" r:id="rId27"/>
+    <p:sldId id="277" r:id="rId28"/>
+    <p:sldId id="278" r:id="rId29"/>
     <p:sldId id="262" r:id="rId13"/>
     <p:sldId id="263" r:id="rId14"/>
     <p:sldId id="264" r:id="rId15"/>
@@ -124,6 +127,255 @@
     </a:lvl9pPr>
   </p:defaultTextStyle>
 </p:presentation>
+</file>
+
+<file path=ppt/notesSlides/notesSlide1.xml><?xml version="1.0" encoding="utf-8"?>
+<p:notes xmlns:a="http://schemas.openxmlformats.org/drawingml/2006/main" xmlns:p="http://schemas.openxmlformats.org/presentationml/2006/main" xmlns:r="http://schemas.openxmlformats.org/officeDocument/2006/relationships">
+  <p:cSld>
+    <p:spTree>
+      <p:nvGrpSpPr>
+        <p:cNvPr id="1" name=""/>
+        <p:cNvGrpSpPr/>
+        <p:nvPr/>
+      </p:nvGrpSpPr>
+      <p:grpSpPr>
+        <a:xfrm>
+          <a:off x="0" y="0"/>
+          <a:ext cx="0" cy="0"/>
+          <a:chOff x="0" y="0"/>
+          <a:chExt cx="0" cy="0"/>
+        </a:xfrm>
+      </p:grpSpPr>
+      <p:sp>
+        <p:nvSpPr>
+          <p:cNvPr id="2" name="Slide Image Placeholder 1"/>
+          <p:cNvSpPr>
+            <a:spLocks noGrp="1"/>
+          </p:cNvSpPr>
+          <p:nvPr>
+            <p:ph type="sldImg" idx="2"/>
+          </p:nvPr>
+        </p:nvSpPr>
+        <p:spPr/>
+      </p:sp>
+      <p:sp>
+        <p:nvSpPr>
+          <p:cNvPr id="3" name="Notes Placeholder 2"/>
+          <p:cNvSpPr>
+            <a:spLocks noGrp="1"/>
+          </p:cNvSpPr>
+          <p:nvPr>
+            <p:ph type="body" idx="3" sz="quarter"/>
+          </p:nvPr>
+        </p:nvSpPr>
+        <p:spPr/>
+        <p:txBody>
+          <a:bodyPr/>
+          <a:lstStyle/>
+          <a:p>
+            <a:r>
+              <a:t>RETO 2 · La huella de la clase — 🔬 onderzoek &amp; data</a:t>
+            </a:r>
+          </a:p>
+          <a:p>
+            <a:r>
+              <a:t>OPDRACHT: Bereken de voetafdruk van de klas en stel drie maatregelen voor in de imperatief.</a:t>
+            </a:r>
+          </a:p>
+          <a:p>
+            <a:r>
+              <a:t>DE REGEL: Elke maatregel is berekend: je zegt hoeveel ze scheelt, met een getal uit jullie eigen telling. Een maatregel zonder cijfer is een goed voornemen.</a:t>
+            </a:r>
+          </a:p>
+          <a:p>
+            <a:r>
+              <a:t>VERLOOP: Contad: cómo venís al instituto, cuántas botellas al día, cuánta comida se tira. | Calculad con las cifras de referencia. | Elegid las tres medidas con más efecto. | Escribidlas en imperativo, con su cifra. | Volved a contar dentro de un mes.</a:t>
+            </a:r>
+          </a:p>
+          <a:p>
+            <a:r>
+              <a:t>SLEUTEL: De rekenstap is de reto: leerlingen ontdekken bijna altijd dat de auto alle andere posten samen overtreft, en dat het opladen van de gsm — waar ze het meest over horen — verwaarloosbaar is.  ||  Die ontdekking is didactisch waardevoller dan het eindcijfer: intuïtie over grootteorde is precies wat een cijfer je leert.  ||  De imperatief komt vanzelf in de maatregelen («cambia», «trae», «apaga»), en de verplichte cijfers voorkomen loze beloftes.  ||  Cijfers zijn afgeronde ordes van grootte. Zeg dat erbij en laat de klas het ook zeggen — dat hoort bij eerlijk met data omgaan.</a:t>
+            </a:r>
+          </a:p>
+          <a:p>
+            <a:r>
+              <a:t>NOTA: De hertelling over een maand is geen extraatje maar de helft van de opdracht. Zet hem meteen in de agenda.</a:t>
+            </a:r>
+          </a:p>
+        </p:txBody>
+      </p:sp>
+    </p:spTree>
+  </p:cSld>
+  <p:clrMapOvr>
+    <a:masterClrMapping/>
+  </p:clrMapOvr>
+</p:notes>
+</file>
+
+<file path=ppt/notesSlides/notesSlide2.xml><?xml version="1.0" encoding="utf-8"?>
+<p:notes xmlns:a="http://schemas.openxmlformats.org/drawingml/2006/main" xmlns:p="http://schemas.openxmlformats.org/presentationml/2006/main" xmlns:r="http://schemas.openxmlformats.org/officeDocument/2006/relationships">
+  <p:cSld>
+    <p:spTree>
+      <p:nvGrpSpPr>
+        <p:cNvPr id="1" name=""/>
+        <p:cNvGrpSpPr/>
+        <p:nvPr/>
+      </p:nvGrpSpPr>
+      <p:grpSpPr>
+        <a:xfrm>
+          <a:off x="0" y="0"/>
+          <a:ext cx="0" cy="0"/>
+          <a:chOff x="0" y="0"/>
+          <a:chExt cx="0" cy="0"/>
+        </a:xfrm>
+      </p:grpSpPr>
+      <p:sp>
+        <p:nvSpPr>
+          <p:cNvPr id="2" name="Slide Image Placeholder 1"/>
+          <p:cNvSpPr>
+            <a:spLocks noGrp="1"/>
+          </p:cNvSpPr>
+          <p:nvPr>
+            <p:ph type="sldImg" idx="2"/>
+          </p:nvPr>
+        </p:nvSpPr>
+        <p:spPr/>
+      </p:sp>
+      <p:sp>
+        <p:nvSpPr>
+          <p:cNvPr id="3" name="Notes Placeholder 2"/>
+          <p:cNvSpPr>
+            <a:spLocks noGrp="1"/>
+          </p:cNvSpPr>
+          <p:nvPr>
+            <p:ph type="body" idx="3" sz="quarter"/>
+          </p:nvPr>
+        </p:nvSpPr>
+        <p:spPr/>
+        <p:txBody>
+          <a:bodyPr/>
+          <a:lstStyle/>
+          <a:p>
+            <a:r>
+              <a:t>RETO 3 · Debate con roles cruzados — ⚖️ onderhandeling &amp; dilemma</a:t>
+            </a:r>
+          </a:p>
+          <a:p>
+            <a:r>
+              <a:t>OPDRACHT: Debatteer met de rol die je krijgt en zeg op het eind welk argument van de andere kant je het meest overtuigde.</a:t>
+            </a:r>
+          </a:p>
+          <a:p>
+            <a:r>
+              <a:t>DE REGEL: Je krijgt je standpunt toegewezen, niet gekozen — en het is bewust het tegenovergestelde van wat je zelf vindt. Elk argument begint met «creo que» plus indicativo, en op het eind noemt iedereen het sterkste argument van de tegenpartij.</a:t>
+            </a:r>
+          </a:p>
+          <a:p>
+            <a:r>
+              <a:t>VERLOOP: Cada uno dice en secreto qué piensa de verdad. | Se reparten los papeles: al revés. | Preparad cuatro argumentos con creo que. | Debate por turnos, sin interrumpir. | Cada uno nombra el mejor argumento del otro lado.</a:t>
+            </a:r>
+          </a:p>
+          <a:p>
+            <a:r>
+              <a:t>SLEUTEL: «Creo que» plus indicativo is de vorm die het leerplan toelaat voor meningen. De rollenwisseling zorgt dat leerlingen die vorm gebruiken zonder zich bloot te geven — dat maakt het debat veiliger én talig rijker.  ||  De slotstap («het beste argument van de tegenpartij») is het punt van de hele reto. Wie het niet kan benoemen, heeft alleen zijn eigen kant gehoord.  ||  «Me ha hecho dudar que…» is de mooiste zin die dit kan opleveren. Beloon hem expliciet.  ||  Alle vijf de stellingen staan met «hay que» of «tener que» in plaats van met een condicional: de discussie wordt er niet minder scherp van en ze blijft binnen het leerplan.</a:t>
+            </a:r>
+          </a:p>
+          <a:p>
+            <a:r>
+              <a:t>NOTA: Vertel niet wie wat echt vindt. De anonimiteit van de beginstap is wat de rollenwisseling laat werken.</a:t>
+            </a:r>
+          </a:p>
+        </p:txBody>
+      </p:sp>
+    </p:spTree>
+  </p:cSld>
+  <p:clrMapOvr>
+    <a:masterClrMapping/>
+  </p:clrMapOvr>
+</p:notes>
+</file>
+
+<file path=ppt/notesSlides/notesSlide3.xml><?xml version="1.0" encoding="utf-8"?>
+<p:notes xmlns:a="http://schemas.openxmlformats.org/drawingml/2006/main" xmlns:p="http://schemas.openxmlformats.org/presentationml/2006/main" xmlns:r="http://schemas.openxmlformats.org/officeDocument/2006/relationships">
+  <p:cSld>
+    <p:spTree>
+      <p:nvGrpSpPr>
+        <p:cNvPr id="1" name=""/>
+        <p:cNvGrpSpPr/>
+        <p:nvPr/>
+      </p:nvGrpSpPr>
+      <p:grpSpPr>
+        <a:xfrm>
+          <a:off x="0" y="0"/>
+          <a:ext cx="0" cy="0"/>
+          <a:chOff x="0" y="0"/>
+          <a:chExt cx="0" cy="0"/>
+        </a:xfrm>
+      </p:grpSpPr>
+      <p:sp>
+        <p:nvSpPr>
+          <p:cNvPr id="2" name="Slide Image Placeholder 1"/>
+          <p:cNvSpPr>
+            <a:spLocks noGrp="1"/>
+          </p:cNvSpPr>
+          <p:nvPr>
+            <p:ph type="sldImg" idx="2"/>
+          </p:nvPr>
+        </p:nvSpPr>
+        <p:spPr/>
+      </p:sp>
+      <p:sp>
+        <p:nvSpPr>
+          <p:cNvPr id="3" name="Notes Placeholder 2"/>
+          <p:cNvSpPr>
+            <a:spLocks noGrp="1"/>
+          </p:cNvSpPr>
+          <p:nvPr>
+            <p:ph type="body" idx="3" sz="quarter"/>
+          </p:nvPr>
+        </p:nvSpPr>
+        <p:spPr/>
+        <p:txBody>
+          <a:bodyPr/>
+          <a:lstStyle/>
+          <a:p>
+            <a:r>
+              <a:t>RETO 6 · La consulta imposible — 🎭 simulatie met beperking</a:t>
+            </a:r>
+          </a:p>
+          <a:p>
+            <a:r>
+              <a:t>OPDRACHT: Speel het consult. De dokter stelt gerust en adviseert met vastgehechte voornaamwoorden.</a:t>
+            </a:r>
+          </a:p>
+          <a:p>
+            <a:r>
+              <a:t>DE REGEL: De dokter moet minstens vijf adviezen geven met een enclitisch voornaamwoord («tómatelo», «descánsala», «cuídate») — en de patiënt mag geen enkel symptoom herhalen dat al genoemd is.</a:t>
+            </a:r>
+          </a:p>
+          <a:p>
+            <a:r>
+              <a:t>VERLOOP: Repartid: paciente y médico/-a. | El paciente elige tres síntomas y los exagera. | El médico pregunta, tranquiliza y aconseja. | Cinco consejos con pronombre pegado. Contadlos. | Cambiad de papel.</a:t>
+            </a:r>
+          </a:p>
+          <a:p>
+            <a:r>
+              <a:t>SLEUTEL: De enclitische voornaamwoorden zijn de grammaticale kern: bij de bevestigende imperatief plakken ze vast en verschuift de klemtoon, dus komt er een accent («tómatelo»). Die spelling is de meest voorkomende fout en meteen het beste bespreekpunt.  ||  «Me late el corazón cuando corro» is expres geen aandoening: het is wat een hart hoort te doen. Of de dokter dat merkt, is het leukste moment van de reto.  ||  «No te preocupes, pero avísame si…» is didactisch het belangrijkste advies: geruststellen mét een alarmvoorwaarde. Dat is hoe echte artsen praten.  ||  Toets de vijf enclitische vormen en het verbod op herhaalde symptomen. Overdrijven is toegestaan; herhalen niet.</a:t>
+            </a:r>
+          </a:p>
+          <a:p>
+            <a:r>
+              <a:t>NOTA: Houd het bij onschuldige klachten. Wie een echte medische situatie inbrengt, krijgt een andere rol — dit is een taaloefening, geen consult.</a:t>
+            </a:r>
+          </a:p>
+        </p:txBody>
+      </p:sp>
+    </p:spTree>
+  </p:cSld>
+  <p:clrMapOvr>
+    <a:masterClrMapping/>
+  </p:clrMapOvr>
+</p:notes>
 </file>
 
 <file path=ppt/slideLayouts/slideLayout1.xml><?xml version="1.0" encoding="utf-8"?>
@@ -31591,6 +31843,5790 @@
 </p:sld>
 </file>
 
+<file path=ppt/slides/slide21.xml><?xml version="1.0" encoding="utf-8"?>
+<p:sld xmlns:a="http://schemas.openxmlformats.org/drawingml/2006/main" xmlns:p="http://schemas.openxmlformats.org/presentationml/2006/main" xmlns:r="http://schemas.openxmlformats.org/officeDocument/2006/relationships">
+  <p:cSld>
+    <p:spTree>
+      <p:nvGrpSpPr>
+        <p:cNvPr id="1" name=""/>
+        <p:cNvGrpSpPr/>
+        <p:nvPr/>
+      </p:nvGrpSpPr>
+      <p:grpSpPr/>
+      <p:sp>
+        <p:nvSpPr>
+          <p:cNvPr id="2" name="Fondo"/>
+          <p:cNvSpPr/>
+          <p:nvPr/>
+        </p:nvSpPr>
+        <p:spPr>
+          <a:xfrm>
+            <a:off x="0" y="0"/>
+            <a:ext cx="12191695" cy="6858000"/>
+          </a:xfrm>
+          <a:prstGeom prst="rect">
+            <a:avLst/>
+          </a:prstGeom>
+          <a:solidFill>
+            <a:srgbClr val="FCFBF8"/>
+          </a:solidFill>
+          <a:ln>
+            <a:noFill/>
+          </a:ln>
+          <a:effectLst/>
+        </p:spPr>
+        <p:style>
+          <a:lnRef idx="1">
+            <a:schemeClr val="accent1"/>
+          </a:lnRef>
+          <a:fillRef idx="3">
+            <a:schemeClr val="accent1"/>
+          </a:fillRef>
+          <a:effectRef idx="2">
+            <a:schemeClr val="accent1"/>
+          </a:effectRef>
+          <a:fontRef idx="minor">
+            <a:schemeClr val="lt1"/>
+          </a:fontRef>
+        </p:style>
+        <p:txBody>
+          <a:bodyPr rtlCol="0" anchor="ctr"/>
+          <a:lstStyle/>
+          <a:p/>
+        </p:txBody>
+      </p:sp>
+      <p:sp>
+        <p:nvSpPr>
+          <p:cNvPr id="3" name="Cabecera"/>
+          <p:cNvSpPr/>
+          <p:nvPr/>
+        </p:nvSpPr>
+        <p:spPr>
+          <a:xfrm>
+            <a:off x="0" y="0"/>
+            <a:ext cx="12191695" cy="1078992"/>
+          </a:xfrm>
+          <a:prstGeom prst="rect">
+            <a:avLst/>
+          </a:prstGeom>
+          <a:solidFill>
+            <a:srgbClr val="7C56A9"/>
+          </a:solidFill>
+          <a:ln>
+            <a:noFill/>
+          </a:ln>
+          <a:effectLst/>
+        </p:spPr>
+        <p:style>
+          <a:lnRef idx="1">
+            <a:schemeClr val="accent1"/>
+          </a:lnRef>
+          <a:fillRef idx="3">
+            <a:schemeClr val="accent1"/>
+          </a:fillRef>
+          <a:effectRef idx="2">
+            <a:schemeClr val="accent1"/>
+          </a:effectRef>
+          <a:fontRef idx="minor">
+            <a:schemeClr val="lt1"/>
+          </a:fontRef>
+        </p:style>
+        <p:txBody>
+          <a:bodyPr rtlCol="0" anchor="ctr"/>
+          <a:lstStyle/>
+          <a:p/>
+        </p:txBody>
+      </p:sp>
+      <p:sp>
+        <p:nvSpPr>
+          <p:cNvPr id="4" name="Chip"/>
+          <p:cNvSpPr/>
+          <p:nvPr/>
+        </p:nvSpPr>
+        <p:spPr>
+          <a:xfrm>
+            <a:off x="457200" y="182880"/>
+            <a:ext cx="3017520" cy="292608"/>
+          </a:xfrm>
+          <a:prstGeom prst="roundRect">
+            <a:avLst>
+              <a:gd name="adj" fmla="val 50000"/>
+            </a:avLst>
+          </a:prstGeom>
+          <a:solidFill>
+            <a:srgbClr val="FFFFFF"/>
+          </a:solidFill>
+          <a:ln>
+            <a:noFill/>
+          </a:ln>
+          <a:effectLst/>
+        </p:spPr>
+        <p:style>
+          <a:lnRef idx="1">
+            <a:schemeClr val="accent1"/>
+          </a:lnRef>
+          <a:fillRef idx="3">
+            <a:schemeClr val="accent1"/>
+          </a:fillRef>
+          <a:effectRef idx="2">
+            <a:schemeClr val="accent1"/>
+          </a:effectRef>
+          <a:fontRef idx="minor">
+            <a:schemeClr val="lt1"/>
+          </a:fontRef>
+        </p:style>
+        <p:txBody>
+          <a:bodyPr rtlCol="0" anchor="ctr"/>
+          <a:lstStyle/>
+          <a:p/>
+        </p:txBody>
+      </p:sp>
+      <p:sp>
+        <p:nvSpPr>
+          <p:cNvPr id="5" name="ChipTxt"/>
+          <p:cNvSpPr txBox="1"/>
+          <p:nvPr/>
+        </p:nvSpPr>
+        <p:spPr>
+          <a:xfrm>
+            <a:off x="457200" y="173736"/>
+            <a:ext cx="3017520" cy="310896"/>
+          </a:xfrm>
+          <a:prstGeom prst="rect">
+            <a:avLst/>
+          </a:prstGeom>
+          <a:noFill/>
+        </p:spPr>
+        <p:txBody>
+          <a:bodyPr wrap="square" anchor="ctr" lIns="45720" rIns="45720" tIns="27432" bIns="27432">
+            <a:normAutofit/>
+          </a:bodyPr>
+          <a:lstStyle/>
+          <a:p>
+            <a:pPr algn="ctr"/>
+            <a:r>
+              <a:rPr sz="950" b="1">
+                <a:solidFill>
+                  <a:srgbClr val="5B3E83"/>
+                </a:solidFill>
+                <a:latin typeface="Inter"/>
+              </a:rPr>
+              <a:t>RETO 2 · ONDERZOEK &amp; DATA</a:t>
+            </a:r>
+          </a:p>
+        </p:txBody>
+      </p:sp>
+      <p:sp>
+        <p:nvSpPr>
+          <p:cNvPr id="6" name="Titulo"/>
+          <p:cNvSpPr txBox="1"/>
+          <p:nvPr/>
+        </p:nvSpPr>
+        <p:spPr>
+          <a:xfrm>
+            <a:off x="457200" y="502920"/>
+            <a:ext cx="8412480" cy="475488"/>
+          </a:xfrm>
+          <a:prstGeom prst="rect">
+            <a:avLst/>
+          </a:prstGeom>
+          <a:noFill/>
+        </p:spPr>
+        <p:txBody>
+          <a:bodyPr wrap="square" anchor="t" lIns="45720" rIns="45720" tIns="27432" bIns="27432">
+            <a:normAutofit/>
+          </a:bodyPr>
+          <a:lstStyle/>
+          <a:p>
+            <a:pPr algn="l"/>
+            <a:r>
+              <a:rPr sz="2700" b="1">
+                <a:solidFill>
+                  <a:srgbClr val="FFFFFF"/>
+                </a:solidFill>
+                <a:latin typeface="Bricolage Grotesque"/>
+              </a:rPr>
+              <a:t>La huella de la clase</a:t>
+            </a:r>
+          </a:p>
+        </p:txBody>
+      </p:sp>
+      <p:sp>
+        <p:nvSpPr>
+          <p:cNvPr id="7" name="Badges"/>
+          <p:cNvSpPr txBox="1"/>
+          <p:nvPr/>
+        </p:nvSpPr>
+        <p:spPr>
+          <a:xfrm>
+            <a:off x="9052560" y="256032"/>
+            <a:ext cx="2651760" cy="640080"/>
+          </a:xfrm>
+          <a:prstGeom prst="rect">
+            <a:avLst/>
+          </a:prstGeom>
+          <a:noFill/>
+        </p:spPr>
+        <p:txBody>
+          <a:bodyPr wrap="square" anchor="t" lIns="45720" rIns="45720" tIns="27432" bIns="27432">
+            <a:normAutofit/>
+          </a:bodyPr>
+          <a:lstStyle/>
+          <a:p>
+            <a:pPr algn="r"/>
+            <a:r>
+              <a:rPr sz="1000">
+                <a:solidFill>
+                  <a:srgbClr val="EEE8F5"/>
+                </a:solidFill>
+                <a:latin typeface="Inter"/>
+              </a:rPr>
+              <a:t>🏫 Toda la clase</a:t>
+            </a:r>
+          </a:p>
+          <a:p>
+            <a:pPr algn="r"/>
+            <a:r>
+              <a:rPr sz="1000">
+                <a:solidFill>
+                  <a:srgbClr val="EEE8F5"/>
+                </a:solidFill>
+                <a:latin typeface="Inter"/>
+              </a:rPr>
+              <a:t>± 18 min · ★★★</a:t>
+            </a:r>
+          </a:p>
+        </p:txBody>
+      </p:sp>
+      <p:sp>
+        <p:nvSpPr>
+          <p:cNvPr id="8" name="Gancho"/>
+          <p:cNvSpPr txBox="1"/>
+          <p:nvPr/>
+        </p:nvSpPr>
+        <p:spPr>
+          <a:xfrm>
+            <a:off x="457200" y="1225296"/>
+            <a:ext cx="11274552" cy="566928"/>
+          </a:xfrm>
+          <a:prstGeom prst="rect">
+            <a:avLst/>
+          </a:prstGeom>
+          <a:noFill/>
+        </p:spPr>
+        <p:txBody>
+          <a:bodyPr wrap="square" anchor="t" lIns="45720" rIns="45720" tIns="27432" bIns="27432">
+            <a:normAutofit/>
+          </a:bodyPr>
+          <a:lstStyle/>
+          <a:p>
+            <a:pPr algn="l"/>
+            <a:r>
+              <a:rPr sz="1600" b="1">
+                <a:solidFill>
+                  <a:srgbClr val="5B3E83"/>
+                </a:solidFill>
+                <a:latin typeface="Bricolage Grotesque"/>
+              </a:rPr>
+              <a:t>Vuestra clase, en kilos de CO₂. Calculadlo y decidid qué hacéis.</a:t>
+            </a:r>
+          </a:p>
+          <a:p>
+            <a:pPr algn="l"/>
+            <a:r>
+              <a:rPr sz="1100" i="1">
+                <a:solidFill>
+                  <a:srgbClr val="6A6E78"/>
+                </a:solidFill>
+                <a:latin typeface="Inter"/>
+              </a:rPr>
+              <a:t>Jullie klas, in kilo's CO₂. Reken het uit en beslis wat jullie doen.</a:t>
+            </a:r>
+          </a:p>
+        </p:txBody>
+      </p:sp>
+      <p:sp>
+        <p:nvSpPr>
+          <p:cNvPr id="9" name="ReglaCaja"/>
+          <p:cNvSpPr/>
+          <p:nvPr/>
+        </p:nvSpPr>
+        <p:spPr>
+          <a:xfrm>
+            <a:off x="457200" y="1847088"/>
+            <a:ext cx="11274552" cy="658368"/>
+          </a:xfrm>
+          <a:prstGeom prst="roundRect">
+            <a:avLst>
+              <a:gd name="adj" fmla="val 5000"/>
+            </a:avLst>
+          </a:prstGeom>
+          <a:solidFill>
+            <a:srgbClr val="FBF3D6"/>
+          </a:solidFill>
+          <a:ln>
+            <a:noFill/>
+          </a:ln>
+          <a:effectLst/>
+        </p:spPr>
+        <p:style>
+          <a:lnRef idx="1">
+            <a:schemeClr val="accent1"/>
+          </a:lnRef>
+          <a:fillRef idx="3">
+            <a:schemeClr val="accent1"/>
+          </a:fillRef>
+          <a:effectRef idx="2">
+            <a:schemeClr val="accent1"/>
+          </a:effectRef>
+          <a:fontRef idx="minor">
+            <a:schemeClr val="lt1"/>
+          </a:fontRef>
+        </p:style>
+        <p:txBody>
+          <a:bodyPr rtlCol="0" anchor="ctr"/>
+          <a:lstStyle/>
+          <a:p/>
+        </p:txBody>
+      </p:sp>
+      <p:sp>
+        <p:nvSpPr>
+          <p:cNvPr id="10" name="ReglaTxt"/>
+          <p:cNvSpPr txBox="1"/>
+          <p:nvPr/>
+        </p:nvSpPr>
+        <p:spPr>
+          <a:xfrm>
+            <a:off x="603504" y="1883664"/>
+            <a:ext cx="10972800" cy="585216"/>
+          </a:xfrm>
+          <a:prstGeom prst="rect">
+            <a:avLst/>
+          </a:prstGeom>
+          <a:noFill/>
+        </p:spPr>
+        <p:txBody>
+          <a:bodyPr wrap="square" anchor="t" lIns="45720" rIns="45720" tIns="27432" bIns="27432">
+            <a:normAutofit/>
+          </a:bodyPr>
+          <a:lstStyle/>
+          <a:p>
+            <a:pPr algn="l"/>
+            <a:r>
+              <a:rPr sz="850" b="1">
+                <a:solidFill>
+                  <a:srgbClr val="B7860B"/>
+                </a:solidFill>
+                <a:latin typeface="Inter"/>
+              </a:rPr>
+              <a:t>LA REGLA DEL RETO</a:t>
+            </a:r>
+          </a:p>
+          <a:p>
+            <a:pPr algn="l"/>
+            <a:r>
+              <a:rPr sz="1100">
+                <a:solidFill>
+                  <a:srgbClr val="20242E"/>
+                </a:solidFill>
+                <a:latin typeface="Inter"/>
+              </a:rPr>
+              <a:t>Elke maatregel is berekend: je zegt hoeveel ze scheelt, met een getal uit jullie eigen telling. Een maatregel zonder cijfer is een goed voornemen.</a:t>
+            </a:r>
+          </a:p>
+        </p:txBody>
+      </p:sp>
+      <p:sp>
+        <p:nvSpPr>
+          <p:cNvPr id="11" name="Tarjeta 0"/>
+          <p:cNvSpPr/>
+          <p:nvPr/>
+        </p:nvSpPr>
+        <p:spPr>
+          <a:xfrm>
+            <a:off x="457200" y="2670048"/>
+            <a:ext cx="2708910" cy="1170432"/>
+          </a:xfrm>
+          <a:prstGeom prst="roundRect">
+            <a:avLst>
+              <a:gd name="adj" fmla="val 6000"/>
+            </a:avLst>
+          </a:prstGeom>
+          <a:solidFill>
+            <a:srgbClr val="FFFFFF"/>
+          </a:solidFill>
+          <a:ln w="12700">
+            <a:solidFill>
+              <a:srgbClr val="E4E3DE"/>
+            </a:solidFill>
+          </a:ln>
+          <a:effectLst/>
+        </p:spPr>
+        <p:style>
+          <a:lnRef idx="1">
+            <a:schemeClr val="accent1"/>
+          </a:lnRef>
+          <a:fillRef idx="3">
+            <a:schemeClr val="accent1"/>
+          </a:fillRef>
+          <a:effectRef idx="2">
+            <a:schemeClr val="accent1"/>
+          </a:effectRef>
+          <a:fontRef idx="minor">
+            <a:schemeClr val="lt1"/>
+          </a:fontRef>
+        </p:style>
+        <p:txBody>
+          <a:bodyPr rtlCol="0" anchor="ctr"/>
+          <a:lstStyle/>
+          <a:p/>
+        </p:txBody>
+      </p:sp>
+      <p:sp>
+        <p:nvSpPr>
+          <p:cNvPr id="12" name="TarjetaTxt 0"/>
+          <p:cNvSpPr txBox="1"/>
+          <p:nvPr/>
+        </p:nvSpPr>
+        <p:spPr>
+          <a:xfrm>
+            <a:off x="548640" y="2724912"/>
+            <a:ext cx="2526030" cy="1060704"/>
+          </a:xfrm>
+          <a:prstGeom prst="rect">
+            <a:avLst/>
+          </a:prstGeom>
+          <a:noFill/>
+        </p:spPr>
+        <p:txBody>
+          <a:bodyPr wrap="square" anchor="t" lIns="45720" rIns="45720" tIns="27432" bIns="27432">
+            <a:normAutofit/>
+          </a:bodyPr>
+          <a:lstStyle/>
+          <a:p>
+            <a:pPr algn="l"/>
+            <a:r>
+              <a:rPr sz="1100" b="1">
+                <a:solidFill>
+                  <a:srgbClr val="5B3E83"/>
+                </a:solidFill>
+                <a:latin typeface="Bricolage Grotesque"/>
+              </a:rPr>
+              <a:t>Referencias</a:t>
+            </a:r>
+          </a:p>
+          <a:p>
+            <a:pPr algn="l"/>
+            <a:r>
+              <a:rPr sz="1000">
+                <a:solidFill>
+                  <a:srgbClr val="20242E"/>
+                </a:solidFill>
+                <a:latin typeface="Inter"/>
+              </a:rPr>
+              <a:t>un coche, 5 km → unos 800 g de CO₂ · el autobús, 5 km → unos 250 g por persona</a:t>
+            </a:r>
+          </a:p>
+        </p:txBody>
+      </p:sp>
+      <p:sp>
+        <p:nvSpPr>
+          <p:cNvPr id="13" name="Tarjeta 1"/>
+          <p:cNvSpPr/>
+          <p:nvPr/>
+        </p:nvSpPr>
+        <p:spPr>
+          <a:xfrm>
+            <a:off x="3312414" y="2670048"/>
+            <a:ext cx="2708910" cy="1170432"/>
+          </a:xfrm>
+          <a:prstGeom prst="roundRect">
+            <a:avLst>
+              <a:gd name="adj" fmla="val 6000"/>
+            </a:avLst>
+          </a:prstGeom>
+          <a:solidFill>
+            <a:srgbClr val="FFFFFF"/>
+          </a:solidFill>
+          <a:ln w="12700">
+            <a:solidFill>
+              <a:srgbClr val="E4E3DE"/>
+            </a:solidFill>
+          </a:ln>
+          <a:effectLst/>
+        </p:spPr>
+        <p:style>
+          <a:lnRef idx="1">
+            <a:schemeClr val="accent1"/>
+          </a:lnRef>
+          <a:fillRef idx="3">
+            <a:schemeClr val="accent1"/>
+          </a:fillRef>
+          <a:effectRef idx="2">
+            <a:schemeClr val="accent1"/>
+          </a:effectRef>
+          <a:fontRef idx="minor">
+            <a:schemeClr val="lt1"/>
+          </a:fontRef>
+        </p:style>
+        <p:txBody>
+          <a:bodyPr rtlCol="0" anchor="ctr"/>
+          <a:lstStyle/>
+          <a:p/>
+        </p:txBody>
+      </p:sp>
+      <p:sp>
+        <p:nvSpPr>
+          <p:cNvPr id="14" name="TarjetaTxt 1"/>
+          <p:cNvSpPr txBox="1"/>
+          <p:nvPr/>
+        </p:nvSpPr>
+        <p:spPr>
+          <a:xfrm>
+            <a:off x="3403854" y="2724912"/>
+            <a:ext cx="2526030" cy="1060704"/>
+          </a:xfrm>
+          <a:prstGeom prst="rect">
+            <a:avLst/>
+          </a:prstGeom>
+          <a:noFill/>
+        </p:spPr>
+        <p:txBody>
+          <a:bodyPr wrap="square" anchor="t" lIns="45720" rIns="45720" tIns="27432" bIns="27432">
+            <a:normAutofit/>
+          </a:bodyPr>
+          <a:lstStyle/>
+          <a:p>
+            <a:pPr algn="l"/>
+            <a:r>
+              <a:rPr sz="1100" b="1">
+                <a:solidFill>
+                  <a:srgbClr val="5B3E83"/>
+                </a:solidFill>
+                <a:latin typeface="Bricolage Grotesque"/>
+              </a:rPr>
+              <a:t>Referencias</a:t>
+            </a:r>
+          </a:p>
+          <a:p>
+            <a:pPr algn="l"/>
+            <a:r>
+              <a:rPr sz="1000">
+                <a:solidFill>
+                  <a:srgbClr val="20242E"/>
+                </a:solidFill>
+                <a:latin typeface="Inter"/>
+              </a:rPr>
+              <a:t>la bici o andando → 0 g · una botella de plástico → unos 80 g</a:t>
+            </a:r>
+          </a:p>
+        </p:txBody>
+      </p:sp>
+      <p:sp>
+        <p:nvSpPr>
+          <p:cNvPr id="15" name="Tarjeta 2"/>
+          <p:cNvSpPr/>
+          <p:nvPr/>
+        </p:nvSpPr>
+        <p:spPr>
+          <a:xfrm>
+            <a:off x="6167628" y="2670048"/>
+            <a:ext cx="2708910" cy="1170432"/>
+          </a:xfrm>
+          <a:prstGeom prst="roundRect">
+            <a:avLst>
+              <a:gd name="adj" fmla="val 6000"/>
+            </a:avLst>
+          </a:prstGeom>
+          <a:solidFill>
+            <a:srgbClr val="FFFFFF"/>
+          </a:solidFill>
+          <a:ln w="12700">
+            <a:solidFill>
+              <a:srgbClr val="E4E3DE"/>
+            </a:solidFill>
+          </a:ln>
+          <a:effectLst/>
+        </p:spPr>
+        <p:style>
+          <a:lnRef idx="1">
+            <a:schemeClr val="accent1"/>
+          </a:lnRef>
+          <a:fillRef idx="3">
+            <a:schemeClr val="accent1"/>
+          </a:fillRef>
+          <a:effectRef idx="2">
+            <a:schemeClr val="accent1"/>
+          </a:effectRef>
+          <a:fontRef idx="minor">
+            <a:schemeClr val="lt1"/>
+          </a:fontRef>
+        </p:style>
+        <p:txBody>
+          <a:bodyPr rtlCol="0" anchor="ctr"/>
+          <a:lstStyle/>
+          <a:p/>
+        </p:txBody>
+      </p:sp>
+      <p:sp>
+        <p:nvSpPr>
+          <p:cNvPr id="16" name="TarjetaTxt 2"/>
+          <p:cNvSpPr txBox="1"/>
+          <p:nvPr/>
+        </p:nvSpPr>
+        <p:spPr>
+          <a:xfrm>
+            <a:off x="6259068" y="2724912"/>
+            <a:ext cx="2526030" cy="1060704"/>
+          </a:xfrm>
+          <a:prstGeom prst="rect">
+            <a:avLst/>
+          </a:prstGeom>
+          <a:noFill/>
+        </p:spPr>
+        <p:txBody>
+          <a:bodyPr wrap="square" anchor="t" lIns="45720" rIns="45720" tIns="27432" bIns="27432">
+            <a:normAutofit/>
+          </a:bodyPr>
+          <a:lstStyle/>
+          <a:p>
+            <a:pPr algn="l"/>
+            <a:r>
+              <a:rPr sz="1100" b="1">
+                <a:solidFill>
+                  <a:srgbClr val="5B3E83"/>
+                </a:solidFill>
+                <a:latin typeface="Bricolage Grotesque"/>
+              </a:rPr>
+              <a:t>Referencias</a:t>
+            </a:r>
+          </a:p>
+          <a:p>
+            <a:pPr algn="l"/>
+            <a:r>
+              <a:rPr sz="1000">
+                <a:solidFill>
+                  <a:srgbClr val="20242E"/>
+                </a:solidFill>
+                <a:latin typeface="Inter"/>
+              </a:rPr>
+              <a:t>una botella reutilizable, un año → unos 200 g en total · un bocadillo que se tira → unos 300 g</a:t>
+            </a:r>
+          </a:p>
+        </p:txBody>
+      </p:sp>
+      <p:sp>
+        <p:nvSpPr>
+          <p:cNvPr id="17" name="Tarjeta 3"/>
+          <p:cNvSpPr/>
+          <p:nvPr/>
+        </p:nvSpPr>
+        <p:spPr>
+          <a:xfrm>
+            <a:off x="9022842" y="2670048"/>
+            <a:ext cx="2708910" cy="1170432"/>
+          </a:xfrm>
+          <a:prstGeom prst="roundRect">
+            <a:avLst>
+              <a:gd name="adj" fmla="val 6000"/>
+            </a:avLst>
+          </a:prstGeom>
+          <a:solidFill>
+            <a:srgbClr val="FFFFFF"/>
+          </a:solidFill>
+          <a:ln w="12700">
+            <a:solidFill>
+              <a:srgbClr val="E4E3DE"/>
+            </a:solidFill>
+          </a:ln>
+          <a:effectLst/>
+        </p:spPr>
+        <p:style>
+          <a:lnRef idx="1">
+            <a:schemeClr val="accent1"/>
+          </a:lnRef>
+          <a:fillRef idx="3">
+            <a:schemeClr val="accent1"/>
+          </a:fillRef>
+          <a:effectRef idx="2">
+            <a:schemeClr val="accent1"/>
+          </a:effectRef>
+          <a:fontRef idx="minor">
+            <a:schemeClr val="lt1"/>
+          </a:fontRef>
+        </p:style>
+        <p:txBody>
+          <a:bodyPr rtlCol="0" anchor="ctr"/>
+          <a:lstStyle/>
+          <a:p/>
+        </p:txBody>
+      </p:sp>
+      <p:sp>
+        <p:nvSpPr>
+          <p:cNvPr id="18" name="TarjetaTxt 3"/>
+          <p:cNvSpPr txBox="1"/>
+          <p:nvPr/>
+        </p:nvSpPr>
+        <p:spPr>
+          <a:xfrm>
+            <a:off x="9114282" y="2724912"/>
+            <a:ext cx="2526030" cy="1060704"/>
+          </a:xfrm>
+          <a:prstGeom prst="rect">
+            <a:avLst/>
+          </a:prstGeom>
+          <a:noFill/>
+        </p:spPr>
+        <p:txBody>
+          <a:bodyPr wrap="square" anchor="t" lIns="45720" rIns="45720" tIns="27432" bIns="27432">
+            <a:normAutofit/>
+          </a:bodyPr>
+          <a:lstStyle/>
+          <a:p>
+            <a:pPr algn="l"/>
+            <a:r>
+              <a:rPr sz="1100" b="1">
+                <a:solidFill>
+                  <a:srgbClr val="5B3E83"/>
+                </a:solidFill>
+                <a:latin typeface="Bricolage Grotesque"/>
+              </a:rPr>
+              <a:t>Referencias</a:t>
+            </a:r>
+          </a:p>
+          <a:p>
+            <a:pPr algn="l"/>
+            <a:r>
+              <a:rPr sz="1000">
+                <a:solidFill>
+                  <a:srgbClr val="20242E"/>
+                </a:solidFill>
+                <a:latin typeface="Inter"/>
+              </a:rPr>
+              <a:t>un móvil cargado cada noche → unos 3 g</a:t>
+            </a:r>
+          </a:p>
+        </p:txBody>
+      </p:sp>
+      <p:sp>
+        <p:nvSpPr>
+          <p:cNvPr id="19" name="Tarjeta 4"/>
+          <p:cNvSpPr/>
+          <p:nvPr/>
+        </p:nvSpPr>
+        <p:spPr>
+          <a:xfrm>
+            <a:off x="457200" y="3968496"/>
+            <a:ext cx="2708910" cy="1170432"/>
+          </a:xfrm>
+          <a:prstGeom prst="roundRect">
+            <a:avLst>
+              <a:gd name="adj" fmla="val 6000"/>
+            </a:avLst>
+          </a:prstGeom>
+          <a:solidFill>
+            <a:srgbClr val="FFFFFF"/>
+          </a:solidFill>
+          <a:ln w="12700">
+            <a:solidFill>
+              <a:srgbClr val="E4E3DE"/>
+            </a:solidFill>
+          </a:ln>
+          <a:effectLst/>
+        </p:spPr>
+        <p:style>
+          <a:lnRef idx="1">
+            <a:schemeClr val="accent1"/>
+          </a:lnRef>
+          <a:fillRef idx="3">
+            <a:schemeClr val="accent1"/>
+          </a:fillRef>
+          <a:effectRef idx="2">
+            <a:schemeClr val="accent1"/>
+          </a:effectRef>
+          <a:fontRef idx="minor">
+            <a:schemeClr val="lt1"/>
+          </a:fontRef>
+        </p:style>
+        <p:txBody>
+          <a:bodyPr rtlCol="0" anchor="ctr"/>
+          <a:lstStyle/>
+          <a:p/>
+        </p:txBody>
+      </p:sp>
+      <p:sp>
+        <p:nvSpPr>
+          <p:cNvPr id="20" name="TarjetaTxt 4"/>
+          <p:cNvSpPr txBox="1"/>
+          <p:nvPr/>
+        </p:nvSpPr>
+        <p:spPr>
+          <a:xfrm>
+            <a:off x="548640" y="4023360"/>
+            <a:ext cx="2526030" cy="1060704"/>
+          </a:xfrm>
+          <a:prstGeom prst="rect">
+            <a:avLst/>
+          </a:prstGeom>
+          <a:noFill/>
+        </p:spPr>
+        <p:txBody>
+          <a:bodyPr wrap="square" anchor="t" lIns="45720" rIns="45720" tIns="27432" bIns="27432">
+            <a:normAutofit/>
+          </a:bodyPr>
+          <a:lstStyle/>
+          <a:p>
+            <a:pPr algn="l"/>
+            <a:r>
+              <a:rPr sz="1100" b="1">
+                <a:solidFill>
+                  <a:srgbClr val="5B3E83"/>
+                </a:solidFill>
+                <a:latin typeface="Bricolage Grotesque"/>
+              </a:rPr>
+              <a:t>paso 1</a:t>
+            </a:r>
+          </a:p>
+          <a:p>
+            <a:pPr algn="l"/>
+            <a:r>
+              <a:rPr sz="1000">
+                <a:solidFill>
+                  <a:srgbClr val="20242E"/>
+                </a:solidFill>
+                <a:latin typeface="Inter"/>
+              </a:rPr>
+              <a:t>Contad cuántos venís en coche, en bus, en bici.</a:t>
+            </a:r>
+          </a:p>
+        </p:txBody>
+      </p:sp>
+      <p:sp>
+        <p:nvSpPr>
+          <p:cNvPr id="21" name="Tarjeta 5"/>
+          <p:cNvSpPr/>
+          <p:nvPr/>
+        </p:nvSpPr>
+        <p:spPr>
+          <a:xfrm>
+            <a:off x="3312414" y="3968496"/>
+            <a:ext cx="2708910" cy="1170432"/>
+          </a:xfrm>
+          <a:prstGeom prst="roundRect">
+            <a:avLst>
+              <a:gd name="adj" fmla="val 6000"/>
+            </a:avLst>
+          </a:prstGeom>
+          <a:solidFill>
+            <a:srgbClr val="FFFFFF"/>
+          </a:solidFill>
+          <a:ln w="12700">
+            <a:solidFill>
+              <a:srgbClr val="E4E3DE"/>
+            </a:solidFill>
+          </a:ln>
+          <a:effectLst/>
+        </p:spPr>
+        <p:style>
+          <a:lnRef idx="1">
+            <a:schemeClr val="accent1"/>
+          </a:lnRef>
+          <a:fillRef idx="3">
+            <a:schemeClr val="accent1"/>
+          </a:fillRef>
+          <a:effectRef idx="2">
+            <a:schemeClr val="accent1"/>
+          </a:effectRef>
+          <a:fontRef idx="minor">
+            <a:schemeClr val="lt1"/>
+          </a:fontRef>
+        </p:style>
+        <p:txBody>
+          <a:bodyPr rtlCol="0" anchor="ctr"/>
+          <a:lstStyle/>
+          <a:p/>
+        </p:txBody>
+      </p:sp>
+      <p:sp>
+        <p:nvSpPr>
+          <p:cNvPr id="22" name="TarjetaTxt 5"/>
+          <p:cNvSpPr txBox="1"/>
+          <p:nvPr/>
+        </p:nvSpPr>
+        <p:spPr>
+          <a:xfrm>
+            <a:off x="3403854" y="4023360"/>
+            <a:ext cx="2526030" cy="1060704"/>
+          </a:xfrm>
+          <a:prstGeom prst="rect">
+            <a:avLst/>
+          </a:prstGeom>
+          <a:noFill/>
+        </p:spPr>
+        <p:txBody>
+          <a:bodyPr wrap="square" anchor="t" lIns="45720" rIns="45720" tIns="27432" bIns="27432">
+            <a:normAutofit/>
+          </a:bodyPr>
+          <a:lstStyle/>
+          <a:p>
+            <a:pPr algn="l"/>
+            <a:r>
+              <a:rPr sz="1100" b="1">
+                <a:solidFill>
+                  <a:srgbClr val="5B3E83"/>
+                </a:solidFill>
+                <a:latin typeface="Bricolage Grotesque"/>
+              </a:rPr>
+              <a:t>paso 2</a:t>
+            </a:r>
+          </a:p>
+          <a:p>
+            <a:pPr algn="l"/>
+            <a:r>
+              <a:rPr sz="1000">
+                <a:solidFill>
+                  <a:srgbClr val="20242E"/>
+                </a:solidFill>
+                <a:latin typeface="Inter"/>
+              </a:rPr>
+              <a:t>Multiplicad por los gramos y por los días de clase.</a:t>
+            </a:r>
+          </a:p>
+        </p:txBody>
+      </p:sp>
+      <p:sp>
+        <p:nvSpPr>
+          <p:cNvPr id="23" name="Tarjeta 6"/>
+          <p:cNvSpPr/>
+          <p:nvPr/>
+        </p:nvSpPr>
+        <p:spPr>
+          <a:xfrm>
+            <a:off x="6167628" y="3968496"/>
+            <a:ext cx="2708910" cy="1170432"/>
+          </a:xfrm>
+          <a:prstGeom prst="roundRect">
+            <a:avLst>
+              <a:gd name="adj" fmla="val 6000"/>
+            </a:avLst>
+          </a:prstGeom>
+          <a:solidFill>
+            <a:srgbClr val="FFFFFF"/>
+          </a:solidFill>
+          <a:ln w="12700">
+            <a:solidFill>
+              <a:srgbClr val="E4E3DE"/>
+            </a:solidFill>
+          </a:ln>
+          <a:effectLst/>
+        </p:spPr>
+        <p:style>
+          <a:lnRef idx="1">
+            <a:schemeClr val="accent1"/>
+          </a:lnRef>
+          <a:fillRef idx="3">
+            <a:schemeClr val="accent1"/>
+          </a:fillRef>
+          <a:effectRef idx="2">
+            <a:schemeClr val="accent1"/>
+          </a:effectRef>
+          <a:fontRef idx="minor">
+            <a:schemeClr val="lt1"/>
+          </a:fontRef>
+        </p:style>
+        <p:txBody>
+          <a:bodyPr rtlCol="0" anchor="ctr"/>
+          <a:lstStyle/>
+          <a:p/>
+        </p:txBody>
+      </p:sp>
+      <p:sp>
+        <p:nvSpPr>
+          <p:cNvPr id="24" name="TarjetaTxt 6"/>
+          <p:cNvSpPr txBox="1"/>
+          <p:nvPr/>
+        </p:nvSpPr>
+        <p:spPr>
+          <a:xfrm>
+            <a:off x="6259068" y="4023360"/>
+            <a:ext cx="2526030" cy="1060704"/>
+          </a:xfrm>
+          <a:prstGeom prst="rect">
+            <a:avLst/>
+          </a:prstGeom>
+          <a:noFill/>
+        </p:spPr>
+        <p:txBody>
+          <a:bodyPr wrap="square" anchor="t" lIns="45720" rIns="45720" tIns="27432" bIns="27432">
+            <a:normAutofit/>
+          </a:bodyPr>
+          <a:lstStyle/>
+          <a:p>
+            <a:pPr algn="l"/>
+            <a:r>
+              <a:rPr sz="1100" b="1">
+                <a:solidFill>
+                  <a:srgbClr val="5B3E83"/>
+                </a:solidFill>
+                <a:latin typeface="Bricolage Grotesque"/>
+              </a:rPr>
+              <a:t>paso 3</a:t>
+            </a:r>
+          </a:p>
+          <a:p>
+            <a:pPr algn="l"/>
+            <a:r>
+              <a:rPr sz="1000">
+                <a:solidFill>
+                  <a:srgbClr val="20242E"/>
+                </a:solidFill>
+                <a:latin typeface="Inter"/>
+              </a:rPr>
+              <a:t>Sumad las botellas y la comida.</a:t>
+            </a:r>
+          </a:p>
+        </p:txBody>
+      </p:sp>
+      <p:sp>
+        <p:nvSpPr>
+          <p:cNvPr id="25" name="Tarjeta 7"/>
+          <p:cNvSpPr/>
+          <p:nvPr/>
+        </p:nvSpPr>
+        <p:spPr>
+          <a:xfrm>
+            <a:off x="9022842" y="3968496"/>
+            <a:ext cx="2708910" cy="1170432"/>
+          </a:xfrm>
+          <a:prstGeom prst="roundRect">
+            <a:avLst>
+              <a:gd name="adj" fmla="val 6000"/>
+            </a:avLst>
+          </a:prstGeom>
+          <a:solidFill>
+            <a:srgbClr val="FFFFFF"/>
+          </a:solidFill>
+          <a:ln w="12700">
+            <a:solidFill>
+              <a:srgbClr val="E4E3DE"/>
+            </a:solidFill>
+          </a:ln>
+          <a:effectLst/>
+        </p:spPr>
+        <p:style>
+          <a:lnRef idx="1">
+            <a:schemeClr val="accent1"/>
+          </a:lnRef>
+          <a:fillRef idx="3">
+            <a:schemeClr val="accent1"/>
+          </a:fillRef>
+          <a:effectRef idx="2">
+            <a:schemeClr val="accent1"/>
+          </a:effectRef>
+          <a:fontRef idx="minor">
+            <a:schemeClr val="lt1"/>
+          </a:fontRef>
+        </p:style>
+        <p:txBody>
+          <a:bodyPr rtlCol="0" anchor="ctr"/>
+          <a:lstStyle/>
+          <a:p/>
+        </p:txBody>
+      </p:sp>
+      <p:sp>
+        <p:nvSpPr>
+          <p:cNvPr id="26" name="TarjetaTxt 7"/>
+          <p:cNvSpPr txBox="1"/>
+          <p:nvPr/>
+        </p:nvSpPr>
+        <p:spPr>
+          <a:xfrm>
+            <a:off x="9114282" y="4023360"/>
+            <a:ext cx="2526030" cy="1060704"/>
+          </a:xfrm>
+          <a:prstGeom prst="rect">
+            <a:avLst/>
+          </a:prstGeom>
+          <a:noFill/>
+        </p:spPr>
+        <p:txBody>
+          <a:bodyPr wrap="square" anchor="t" lIns="45720" rIns="45720" tIns="27432" bIns="27432">
+            <a:normAutofit/>
+          </a:bodyPr>
+          <a:lstStyle/>
+          <a:p>
+            <a:pPr algn="l"/>
+            <a:r>
+              <a:rPr sz="1100" b="1">
+                <a:solidFill>
+                  <a:srgbClr val="5B3E83"/>
+                </a:solidFill>
+                <a:latin typeface="Bricolage Grotesque"/>
+              </a:rPr>
+              <a:t>paso 4</a:t>
+            </a:r>
+          </a:p>
+          <a:p>
+            <a:pPr algn="l"/>
+            <a:r>
+              <a:rPr sz="1000">
+                <a:solidFill>
+                  <a:srgbClr val="20242E"/>
+                </a:solidFill>
+                <a:latin typeface="Inter"/>
+              </a:rPr>
+              <a:t>Dividid por el número de alumnos: esa es la huella media.</a:t>
+            </a:r>
+          </a:p>
+        </p:txBody>
+      </p:sp>
+      <p:sp>
+        <p:nvSpPr>
+          <p:cNvPr id="27" name="Tarjeta 8"/>
+          <p:cNvSpPr/>
+          <p:nvPr/>
+        </p:nvSpPr>
+        <p:spPr>
+          <a:xfrm>
+            <a:off x="457200" y="5266944"/>
+            <a:ext cx="2708910" cy="1170432"/>
+          </a:xfrm>
+          <a:prstGeom prst="roundRect">
+            <a:avLst>
+              <a:gd name="adj" fmla="val 6000"/>
+            </a:avLst>
+          </a:prstGeom>
+          <a:solidFill>
+            <a:srgbClr val="FFFFFF"/>
+          </a:solidFill>
+          <a:ln w="12700">
+            <a:solidFill>
+              <a:srgbClr val="E4E3DE"/>
+            </a:solidFill>
+          </a:ln>
+          <a:effectLst/>
+        </p:spPr>
+        <p:style>
+          <a:lnRef idx="1">
+            <a:schemeClr val="accent1"/>
+          </a:lnRef>
+          <a:fillRef idx="3">
+            <a:schemeClr val="accent1"/>
+          </a:fillRef>
+          <a:effectRef idx="2">
+            <a:schemeClr val="accent1"/>
+          </a:effectRef>
+          <a:fontRef idx="minor">
+            <a:schemeClr val="lt1"/>
+          </a:fontRef>
+        </p:style>
+        <p:txBody>
+          <a:bodyPr rtlCol="0" anchor="ctr"/>
+          <a:lstStyle/>
+          <a:p/>
+        </p:txBody>
+      </p:sp>
+      <p:sp>
+        <p:nvSpPr>
+          <p:cNvPr id="28" name="TarjetaTxt 8"/>
+          <p:cNvSpPr txBox="1"/>
+          <p:nvPr/>
+        </p:nvSpPr>
+        <p:spPr>
+          <a:xfrm>
+            <a:off x="548640" y="5321808"/>
+            <a:ext cx="2526030" cy="1060704"/>
+          </a:xfrm>
+          <a:prstGeom prst="rect">
+            <a:avLst/>
+          </a:prstGeom>
+          <a:noFill/>
+        </p:spPr>
+        <p:txBody>
+          <a:bodyPr wrap="square" anchor="t" lIns="45720" rIns="45720" tIns="27432" bIns="27432">
+            <a:normAutofit/>
+          </a:bodyPr>
+          <a:lstStyle/>
+          <a:p>
+            <a:pPr algn="l"/>
+            <a:r>
+              <a:rPr sz="1100" b="1">
+                <a:solidFill>
+                  <a:srgbClr val="5B3E83"/>
+                </a:solidFill>
+                <a:latin typeface="Bricolage Grotesque"/>
+              </a:rPr>
+              <a:t>marco</a:t>
+            </a:r>
+          </a:p>
+          <a:p>
+            <a:pPr algn="l"/>
+            <a:r>
+              <a:rPr sz="1000">
+                <a:solidFill>
+                  <a:srgbClr val="20242E"/>
+                </a:solidFill>
+                <a:latin typeface="Inter"/>
+              </a:rPr>
+              <a:t>Nuestra clase produce unos … kilos al mes.</a:t>
+            </a:r>
+          </a:p>
+        </p:txBody>
+      </p:sp>
+      <p:sp>
+        <p:nvSpPr>
+          <p:cNvPr id="29" name="Tarjeta 9"/>
+          <p:cNvSpPr/>
+          <p:nvPr/>
+        </p:nvSpPr>
+        <p:spPr>
+          <a:xfrm>
+            <a:off x="3312414" y="5266944"/>
+            <a:ext cx="2708910" cy="1170432"/>
+          </a:xfrm>
+          <a:prstGeom prst="roundRect">
+            <a:avLst>
+              <a:gd name="adj" fmla="val 6000"/>
+            </a:avLst>
+          </a:prstGeom>
+          <a:solidFill>
+            <a:srgbClr val="FFFFFF"/>
+          </a:solidFill>
+          <a:ln w="12700">
+            <a:solidFill>
+              <a:srgbClr val="E4E3DE"/>
+            </a:solidFill>
+          </a:ln>
+          <a:effectLst/>
+        </p:spPr>
+        <p:style>
+          <a:lnRef idx="1">
+            <a:schemeClr val="accent1"/>
+          </a:lnRef>
+          <a:fillRef idx="3">
+            <a:schemeClr val="accent1"/>
+          </a:fillRef>
+          <a:effectRef idx="2">
+            <a:schemeClr val="accent1"/>
+          </a:effectRef>
+          <a:fontRef idx="minor">
+            <a:schemeClr val="lt1"/>
+          </a:fontRef>
+        </p:style>
+        <p:txBody>
+          <a:bodyPr rtlCol="0" anchor="ctr"/>
+          <a:lstStyle/>
+          <a:p/>
+        </p:txBody>
+      </p:sp>
+      <p:sp>
+        <p:nvSpPr>
+          <p:cNvPr id="30" name="TarjetaTxt 9"/>
+          <p:cNvSpPr txBox="1"/>
+          <p:nvPr/>
+        </p:nvSpPr>
+        <p:spPr>
+          <a:xfrm>
+            <a:off x="3403854" y="5321808"/>
+            <a:ext cx="2526030" cy="1060704"/>
+          </a:xfrm>
+          <a:prstGeom prst="rect">
+            <a:avLst/>
+          </a:prstGeom>
+          <a:noFill/>
+        </p:spPr>
+        <p:txBody>
+          <a:bodyPr wrap="square" anchor="t" lIns="45720" rIns="45720" tIns="27432" bIns="27432">
+            <a:normAutofit/>
+          </a:bodyPr>
+          <a:lstStyle/>
+          <a:p>
+            <a:pPr algn="l"/>
+            <a:r>
+              <a:rPr sz="1100" b="1">
+                <a:solidFill>
+                  <a:srgbClr val="5B3E83"/>
+                </a:solidFill>
+                <a:latin typeface="Bricolage Grotesque"/>
+              </a:rPr>
+              <a:t>marco</a:t>
+            </a:r>
+          </a:p>
+          <a:p>
+            <a:pPr algn="l"/>
+            <a:r>
+              <a:rPr sz="1000">
+                <a:solidFill>
+                  <a:srgbClr val="20242E"/>
+                </a:solidFill>
+                <a:latin typeface="Inter"/>
+              </a:rPr>
+              <a:t>Si … , bajamos … kilos.</a:t>
+            </a:r>
+          </a:p>
+        </p:txBody>
+      </p:sp>
+      <p:sp>
+        <p:nvSpPr>
+          <p:cNvPr id="31" name="Tarjeta 10"/>
+          <p:cNvSpPr/>
+          <p:nvPr/>
+        </p:nvSpPr>
+        <p:spPr>
+          <a:xfrm>
+            <a:off x="6167628" y="5266944"/>
+            <a:ext cx="2708910" cy="1170432"/>
+          </a:xfrm>
+          <a:prstGeom prst="roundRect">
+            <a:avLst>
+              <a:gd name="adj" fmla="val 6000"/>
+            </a:avLst>
+          </a:prstGeom>
+          <a:solidFill>
+            <a:srgbClr val="FFFFFF"/>
+          </a:solidFill>
+          <a:ln w="12700">
+            <a:solidFill>
+              <a:srgbClr val="E4E3DE"/>
+            </a:solidFill>
+          </a:ln>
+          <a:effectLst/>
+        </p:spPr>
+        <p:style>
+          <a:lnRef idx="1">
+            <a:schemeClr val="accent1"/>
+          </a:lnRef>
+          <a:fillRef idx="3">
+            <a:schemeClr val="accent1"/>
+          </a:fillRef>
+          <a:effectRef idx="2">
+            <a:schemeClr val="accent1"/>
+          </a:effectRef>
+          <a:fontRef idx="minor">
+            <a:schemeClr val="lt1"/>
+          </a:fontRef>
+        </p:style>
+        <p:txBody>
+          <a:bodyPr rtlCol="0" anchor="ctr"/>
+          <a:lstStyle/>
+          <a:p/>
+        </p:txBody>
+      </p:sp>
+      <p:sp>
+        <p:nvSpPr>
+          <p:cNvPr id="32" name="TarjetaTxt 10"/>
+          <p:cNvSpPr txBox="1"/>
+          <p:nvPr/>
+        </p:nvSpPr>
+        <p:spPr>
+          <a:xfrm>
+            <a:off x="6259068" y="5321808"/>
+            <a:ext cx="2526030" cy="1060704"/>
+          </a:xfrm>
+          <a:prstGeom prst="rect">
+            <a:avLst/>
+          </a:prstGeom>
+          <a:noFill/>
+        </p:spPr>
+        <p:txBody>
+          <a:bodyPr wrap="square" anchor="t" lIns="45720" rIns="45720" tIns="27432" bIns="27432">
+            <a:normAutofit/>
+          </a:bodyPr>
+          <a:lstStyle/>
+          <a:p>
+            <a:pPr algn="l"/>
+            <a:r>
+              <a:rPr sz="1100" b="1">
+                <a:solidFill>
+                  <a:srgbClr val="5B3E83"/>
+                </a:solidFill>
+                <a:latin typeface="Bricolage Grotesque"/>
+              </a:rPr>
+              <a:t>marco</a:t>
+            </a:r>
+          </a:p>
+          <a:p>
+            <a:pPr algn="l"/>
+            <a:r>
+              <a:rPr sz="1000">
+                <a:solidFill>
+                  <a:srgbClr val="20242E"/>
+                </a:solidFill>
+                <a:latin typeface="Inter"/>
+              </a:rPr>
+              <a:t>Cambia … por … : son … gramos menos al día.</a:t>
+            </a:r>
+          </a:p>
+        </p:txBody>
+      </p:sp>
+      <p:sp>
+        <p:nvSpPr>
+          <p:cNvPr id="33" name="Tarjeta 11"/>
+          <p:cNvSpPr/>
+          <p:nvPr/>
+        </p:nvSpPr>
+        <p:spPr>
+          <a:xfrm>
+            <a:off x="9022842" y="5266944"/>
+            <a:ext cx="2708910" cy="1170432"/>
+          </a:xfrm>
+          <a:prstGeom prst="roundRect">
+            <a:avLst>
+              <a:gd name="adj" fmla="val 6000"/>
+            </a:avLst>
+          </a:prstGeom>
+          <a:solidFill>
+            <a:srgbClr val="FFFFFF"/>
+          </a:solidFill>
+          <a:ln w="12700">
+            <a:solidFill>
+              <a:srgbClr val="E4E3DE"/>
+            </a:solidFill>
+          </a:ln>
+          <a:effectLst/>
+        </p:spPr>
+        <p:style>
+          <a:lnRef idx="1">
+            <a:schemeClr val="accent1"/>
+          </a:lnRef>
+          <a:fillRef idx="3">
+            <a:schemeClr val="accent1"/>
+          </a:fillRef>
+          <a:effectRef idx="2">
+            <a:schemeClr val="accent1"/>
+          </a:effectRef>
+          <a:fontRef idx="minor">
+            <a:schemeClr val="lt1"/>
+          </a:fontRef>
+        </p:style>
+        <p:txBody>
+          <a:bodyPr rtlCol="0" anchor="ctr"/>
+          <a:lstStyle/>
+          <a:p/>
+        </p:txBody>
+      </p:sp>
+      <p:sp>
+        <p:nvSpPr>
+          <p:cNvPr id="34" name="TarjetaTxt 11"/>
+          <p:cNvSpPr txBox="1"/>
+          <p:nvPr/>
+        </p:nvSpPr>
+        <p:spPr>
+          <a:xfrm>
+            <a:off x="9114282" y="5321808"/>
+            <a:ext cx="2526030" cy="1060704"/>
+          </a:xfrm>
+          <a:prstGeom prst="rect">
+            <a:avLst/>
+          </a:prstGeom>
+          <a:noFill/>
+        </p:spPr>
+        <p:txBody>
+          <a:bodyPr wrap="square" anchor="t" lIns="45720" rIns="45720" tIns="27432" bIns="27432">
+            <a:normAutofit/>
+          </a:bodyPr>
+          <a:lstStyle/>
+          <a:p>
+            <a:pPr algn="l"/>
+            <a:r>
+              <a:rPr sz="1100" b="1">
+                <a:solidFill>
+                  <a:srgbClr val="5B3E83"/>
+                </a:solidFill>
+                <a:latin typeface="Bricolage Grotesque"/>
+              </a:rPr>
+              <a:t>marco</a:t>
+            </a:r>
+          </a:p>
+          <a:p>
+            <a:pPr algn="l"/>
+            <a:r>
+              <a:rPr sz="1000">
+                <a:solidFill>
+                  <a:srgbClr val="20242E"/>
+                </a:solidFill>
+                <a:latin typeface="Inter"/>
+              </a:rPr>
+              <a:t>Empieza por lo más fácil: …</a:t>
+            </a:r>
+          </a:p>
+        </p:txBody>
+      </p:sp>
+    </p:spTree>
+  </p:cSld>
+  <p:clrMapOvr>
+    <a:masterClrMapping/>
+  </p:clrMapOvr>
+</p:sld>
+</file>
+
+<file path=ppt/slides/slide22.xml><?xml version="1.0" encoding="utf-8"?>
+<p:sld xmlns:a="http://schemas.openxmlformats.org/drawingml/2006/main" xmlns:p="http://schemas.openxmlformats.org/presentationml/2006/main" xmlns:r="http://schemas.openxmlformats.org/officeDocument/2006/relationships">
+  <p:cSld>
+    <p:spTree>
+      <p:nvGrpSpPr>
+        <p:cNvPr id="1" name=""/>
+        <p:cNvGrpSpPr/>
+        <p:nvPr/>
+      </p:nvGrpSpPr>
+      <p:grpSpPr/>
+      <p:sp>
+        <p:nvSpPr>
+          <p:cNvPr id="2" name="Fondo"/>
+          <p:cNvSpPr/>
+          <p:nvPr/>
+        </p:nvSpPr>
+        <p:spPr>
+          <a:xfrm>
+            <a:off x="0" y="0"/>
+            <a:ext cx="12191695" cy="6858000"/>
+          </a:xfrm>
+          <a:prstGeom prst="rect">
+            <a:avLst/>
+          </a:prstGeom>
+          <a:solidFill>
+            <a:srgbClr val="FCFBF8"/>
+          </a:solidFill>
+          <a:ln>
+            <a:noFill/>
+          </a:ln>
+          <a:effectLst/>
+        </p:spPr>
+        <p:style>
+          <a:lnRef idx="1">
+            <a:schemeClr val="accent1"/>
+          </a:lnRef>
+          <a:fillRef idx="3">
+            <a:schemeClr val="accent1"/>
+          </a:fillRef>
+          <a:effectRef idx="2">
+            <a:schemeClr val="accent1"/>
+          </a:effectRef>
+          <a:fontRef idx="minor">
+            <a:schemeClr val="lt1"/>
+          </a:fontRef>
+        </p:style>
+        <p:txBody>
+          <a:bodyPr rtlCol="0" anchor="ctr"/>
+          <a:lstStyle/>
+          <a:p/>
+        </p:txBody>
+      </p:sp>
+      <p:sp>
+        <p:nvSpPr>
+          <p:cNvPr id="3" name="Cabecera"/>
+          <p:cNvSpPr/>
+          <p:nvPr/>
+        </p:nvSpPr>
+        <p:spPr>
+          <a:xfrm>
+            <a:off x="0" y="0"/>
+            <a:ext cx="12191695" cy="1078992"/>
+          </a:xfrm>
+          <a:prstGeom prst="rect">
+            <a:avLst/>
+          </a:prstGeom>
+          <a:solidFill>
+            <a:srgbClr val="7C56A9"/>
+          </a:solidFill>
+          <a:ln>
+            <a:noFill/>
+          </a:ln>
+          <a:effectLst/>
+        </p:spPr>
+        <p:style>
+          <a:lnRef idx="1">
+            <a:schemeClr val="accent1"/>
+          </a:lnRef>
+          <a:fillRef idx="3">
+            <a:schemeClr val="accent1"/>
+          </a:fillRef>
+          <a:effectRef idx="2">
+            <a:schemeClr val="accent1"/>
+          </a:effectRef>
+          <a:fontRef idx="minor">
+            <a:schemeClr val="lt1"/>
+          </a:fontRef>
+        </p:style>
+        <p:txBody>
+          <a:bodyPr rtlCol="0" anchor="ctr"/>
+          <a:lstStyle/>
+          <a:p/>
+        </p:txBody>
+      </p:sp>
+      <p:sp>
+        <p:nvSpPr>
+          <p:cNvPr id="4" name="Chip"/>
+          <p:cNvSpPr/>
+          <p:nvPr/>
+        </p:nvSpPr>
+        <p:spPr>
+          <a:xfrm>
+            <a:off x="457200" y="182880"/>
+            <a:ext cx="3017520" cy="292608"/>
+          </a:xfrm>
+          <a:prstGeom prst="roundRect">
+            <a:avLst>
+              <a:gd name="adj" fmla="val 50000"/>
+            </a:avLst>
+          </a:prstGeom>
+          <a:solidFill>
+            <a:srgbClr val="FFFFFF"/>
+          </a:solidFill>
+          <a:ln>
+            <a:noFill/>
+          </a:ln>
+          <a:effectLst/>
+        </p:spPr>
+        <p:style>
+          <a:lnRef idx="1">
+            <a:schemeClr val="accent1"/>
+          </a:lnRef>
+          <a:fillRef idx="3">
+            <a:schemeClr val="accent1"/>
+          </a:fillRef>
+          <a:effectRef idx="2">
+            <a:schemeClr val="accent1"/>
+          </a:effectRef>
+          <a:fontRef idx="minor">
+            <a:schemeClr val="lt1"/>
+          </a:fontRef>
+        </p:style>
+        <p:txBody>
+          <a:bodyPr rtlCol="0" anchor="ctr"/>
+          <a:lstStyle/>
+          <a:p/>
+        </p:txBody>
+      </p:sp>
+      <p:sp>
+        <p:nvSpPr>
+          <p:cNvPr id="5" name="ChipTxt"/>
+          <p:cNvSpPr txBox="1"/>
+          <p:nvPr/>
+        </p:nvSpPr>
+        <p:spPr>
+          <a:xfrm>
+            <a:off x="457200" y="173736"/>
+            <a:ext cx="3017520" cy="310896"/>
+          </a:xfrm>
+          <a:prstGeom prst="rect">
+            <a:avLst/>
+          </a:prstGeom>
+          <a:noFill/>
+        </p:spPr>
+        <p:txBody>
+          <a:bodyPr wrap="square" anchor="ctr" lIns="45720" rIns="45720" tIns="27432" bIns="27432">
+            <a:normAutofit/>
+          </a:bodyPr>
+          <a:lstStyle/>
+          <a:p>
+            <a:pPr algn="ctr"/>
+            <a:r>
+              <a:rPr sz="950" b="1">
+                <a:solidFill>
+                  <a:srgbClr val="5B3E83"/>
+                </a:solidFill>
+                <a:latin typeface="Inter"/>
+              </a:rPr>
+              <a:t>RETO 3 · ONDERHANDELING &amp; DILEMMA</a:t>
+            </a:r>
+          </a:p>
+        </p:txBody>
+      </p:sp>
+      <p:sp>
+        <p:nvSpPr>
+          <p:cNvPr id="6" name="Titulo"/>
+          <p:cNvSpPr txBox="1"/>
+          <p:nvPr/>
+        </p:nvSpPr>
+        <p:spPr>
+          <a:xfrm>
+            <a:off x="457200" y="502920"/>
+            <a:ext cx="8412480" cy="475488"/>
+          </a:xfrm>
+          <a:prstGeom prst="rect">
+            <a:avLst/>
+          </a:prstGeom>
+          <a:noFill/>
+        </p:spPr>
+        <p:txBody>
+          <a:bodyPr wrap="square" anchor="t" lIns="45720" rIns="45720" tIns="27432" bIns="27432">
+            <a:normAutofit/>
+          </a:bodyPr>
+          <a:lstStyle/>
+          <a:p>
+            <a:pPr algn="l"/>
+            <a:r>
+              <a:rPr sz="2700" b="1">
+                <a:solidFill>
+                  <a:srgbClr val="FFFFFF"/>
+                </a:solidFill>
+                <a:latin typeface="Bricolage Grotesque"/>
+              </a:rPr>
+              <a:t>Debate con roles cruzados</a:t>
+            </a:r>
+          </a:p>
+        </p:txBody>
+      </p:sp>
+      <p:sp>
+        <p:nvSpPr>
+          <p:cNvPr id="7" name="Badges"/>
+          <p:cNvSpPr txBox="1"/>
+          <p:nvPr/>
+        </p:nvSpPr>
+        <p:spPr>
+          <a:xfrm>
+            <a:off x="9052560" y="256032"/>
+            <a:ext cx="2651760" cy="640080"/>
+          </a:xfrm>
+          <a:prstGeom prst="rect">
+            <a:avLst/>
+          </a:prstGeom>
+          <a:noFill/>
+        </p:spPr>
+        <p:txBody>
+          <a:bodyPr wrap="square" anchor="t" lIns="45720" rIns="45720" tIns="27432" bIns="27432">
+            <a:normAutofit/>
+          </a:bodyPr>
+          <a:lstStyle/>
+          <a:p>
+            <a:pPr algn="r"/>
+            <a:r>
+              <a:rPr sz="1000">
+                <a:solidFill>
+                  <a:srgbClr val="EEE8F5"/>
+                </a:solidFill>
+                <a:latin typeface="Inter"/>
+              </a:rPr>
+              <a:t>👨‍👩‍👧 En grupos</a:t>
+            </a:r>
+          </a:p>
+          <a:p>
+            <a:pPr algn="r"/>
+            <a:r>
+              <a:rPr sz="1000">
+                <a:solidFill>
+                  <a:srgbClr val="EEE8F5"/>
+                </a:solidFill>
+                <a:latin typeface="Inter"/>
+              </a:rPr>
+              <a:t>± 18 min · ★★★</a:t>
+            </a:r>
+          </a:p>
+        </p:txBody>
+      </p:sp>
+      <p:sp>
+        <p:nvSpPr>
+          <p:cNvPr id="8" name="Gancho"/>
+          <p:cNvSpPr txBox="1"/>
+          <p:nvPr/>
+        </p:nvSpPr>
+        <p:spPr>
+          <a:xfrm>
+            <a:off x="457200" y="1225296"/>
+            <a:ext cx="11274552" cy="566928"/>
+          </a:xfrm>
+          <a:prstGeom prst="rect">
+            <a:avLst/>
+          </a:prstGeom>
+          <a:noFill/>
+        </p:spPr>
+        <p:txBody>
+          <a:bodyPr wrap="square" anchor="t" lIns="45720" rIns="45720" tIns="27432" bIns="27432">
+            <a:normAutofit/>
+          </a:bodyPr>
+          <a:lstStyle/>
+          <a:p>
+            <a:pPr algn="l"/>
+            <a:r>
+              <a:rPr sz="1600" b="1">
+                <a:solidFill>
+                  <a:srgbClr val="5B3E83"/>
+                </a:solidFill>
+                <a:latin typeface="Bricolage Grotesque"/>
+              </a:rPr>
+              <a:t>Defiendes justo lo que no piensas. Y tienes que hacerlo bien.</a:t>
+            </a:r>
+          </a:p>
+          <a:p>
+            <a:pPr algn="l"/>
+            <a:r>
+              <a:rPr sz="1100" i="1">
+                <a:solidFill>
+                  <a:srgbClr val="6A6E78"/>
+                </a:solidFill>
+                <a:latin typeface="Inter"/>
+              </a:rPr>
+              <a:t>Je verdedigt precies wat je niet vindt. En je moet het goed doen.</a:t>
+            </a:r>
+          </a:p>
+        </p:txBody>
+      </p:sp>
+      <p:sp>
+        <p:nvSpPr>
+          <p:cNvPr id="9" name="ReglaCaja"/>
+          <p:cNvSpPr/>
+          <p:nvPr/>
+        </p:nvSpPr>
+        <p:spPr>
+          <a:xfrm>
+            <a:off x="457200" y="1847088"/>
+            <a:ext cx="11274552" cy="658368"/>
+          </a:xfrm>
+          <a:prstGeom prst="roundRect">
+            <a:avLst>
+              <a:gd name="adj" fmla="val 5000"/>
+            </a:avLst>
+          </a:prstGeom>
+          <a:solidFill>
+            <a:srgbClr val="FBF3D6"/>
+          </a:solidFill>
+          <a:ln>
+            <a:noFill/>
+          </a:ln>
+          <a:effectLst/>
+        </p:spPr>
+        <p:style>
+          <a:lnRef idx="1">
+            <a:schemeClr val="accent1"/>
+          </a:lnRef>
+          <a:fillRef idx="3">
+            <a:schemeClr val="accent1"/>
+          </a:fillRef>
+          <a:effectRef idx="2">
+            <a:schemeClr val="accent1"/>
+          </a:effectRef>
+          <a:fontRef idx="minor">
+            <a:schemeClr val="lt1"/>
+          </a:fontRef>
+        </p:style>
+        <p:txBody>
+          <a:bodyPr rtlCol="0" anchor="ctr"/>
+          <a:lstStyle/>
+          <a:p/>
+        </p:txBody>
+      </p:sp>
+      <p:sp>
+        <p:nvSpPr>
+          <p:cNvPr id="10" name="ReglaTxt"/>
+          <p:cNvSpPr txBox="1"/>
+          <p:nvPr/>
+        </p:nvSpPr>
+        <p:spPr>
+          <a:xfrm>
+            <a:off x="603504" y="1883664"/>
+            <a:ext cx="10972800" cy="585216"/>
+          </a:xfrm>
+          <a:prstGeom prst="rect">
+            <a:avLst/>
+          </a:prstGeom>
+          <a:noFill/>
+        </p:spPr>
+        <p:txBody>
+          <a:bodyPr wrap="square" anchor="t" lIns="45720" rIns="45720" tIns="27432" bIns="27432">
+            <a:normAutofit/>
+          </a:bodyPr>
+          <a:lstStyle/>
+          <a:p>
+            <a:pPr algn="l"/>
+            <a:r>
+              <a:rPr sz="850" b="1">
+                <a:solidFill>
+                  <a:srgbClr val="B7860B"/>
+                </a:solidFill>
+                <a:latin typeface="Inter"/>
+              </a:rPr>
+              <a:t>LA REGLA DEL RETO</a:t>
+            </a:r>
+          </a:p>
+          <a:p>
+            <a:pPr algn="l"/>
+            <a:r>
+              <a:rPr sz="1100">
+                <a:solidFill>
+                  <a:srgbClr val="20242E"/>
+                </a:solidFill>
+                <a:latin typeface="Inter"/>
+              </a:rPr>
+              <a:t>Je krijgt je standpunt toegewezen, niet gekozen — en het is bewust het tegenovergestelde van wat je zelf vindt. Elk argument begint met «creo que» plus indicativo, en op het eind noemt iedereen het sterkste argument van de tegenpartij.</a:t>
+            </a:r>
+          </a:p>
+        </p:txBody>
+      </p:sp>
+      <p:sp>
+        <p:nvSpPr>
+          <p:cNvPr id="11" name="Tarjeta 0"/>
+          <p:cNvSpPr/>
+          <p:nvPr/>
+        </p:nvSpPr>
+        <p:spPr>
+          <a:xfrm>
+            <a:off x="457200" y="2670048"/>
+            <a:ext cx="2708910" cy="1170432"/>
+          </a:xfrm>
+          <a:prstGeom prst="roundRect">
+            <a:avLst>
+              <a:gd name="adj" fmla="val 6000"/>
+            </a:avLst>
+          </a:prstGeom>
+          <a:solidFill>
+            <a:srgbClr val="FFFFFF"/>
+          </a:solidFill>
+          <a:ln w="12700">
+            <a:solidFill>
+              <a:srgbClr val="E4E3DE"/>
+            </a:solidFill>
+          </a:ln>
+          <a:effectLst/>
+        </p:spPr>
+        <p:style>
+          <a:lnRef idx="1">
+            <a:schemeClr val="accent1"/>
+          </a:lnRef>
+          <a:fillRef idx="3">
+            <a:schemeClr val="accent1"/>
+          </a:fillRef>
+          <a:effectRef idx="2">
+            <a:schemeClr val="accent1"/>
+          </a:effectRef>
+          <a:fontRef idx="minor">
+            <a:schemeClr val="lt1"/>
+          </a:fontRef>
+        </p:style>
+        <p:txBody>
+          <a:bodyPr rtlCol="0" anchor="ctr"/>
+          <a:lstStyle/>
+          <a:p/>
+        </p:txBody>
+      </p:sp>
+      <p:sp>
+        <p:nvSpPr>
+          <p:cNvPr id="12" name="TarjetaTxt 0"/>
+          <p:cNvSpPr txBox="1"/>
+          <p:nvPr/>
+        </p:nvSpPr>
+        <p:spPr>
+          <a:xfrm>
+            <a:off x="548640" y="2724912"/>
+            <a:ext cx="2526030" cy="1060704"/>
+          </a:xfrm>
+          <a:prstGeom prst="rect">
+            <a:avLst/>
+          </a:prstGeom>
+          <a:noFill/>
+        </p:spPr>
+        <p:txBody>
+          <a:bodyPr wrap="square" anchor="t" lIns="45720" rIns="45720" tIns="27432" bIns="27432">
+            <a:normAutofit/>
+          </a:bodyPr>
+          <a:lstStyle/>
+          <a:p>
+            <a:pPr algn="l"/>
+            <a:r>
+              <a:rPr sz="1100" b="1">
+                <a:solidFill>
+                  <a:srgbClr val="5B3E83"/>
+                </a:solidFill>
+                <a:latin typeface="Bricolage Grotesque"/>
+              </a:rPr>
+              <a:t>tema</a:t>
+            </a:r>
+          </a:p>
+          <a:p>
+            <a:pPr algn="l"/>
+            <a:r>
+              <a:rPr sz="1000">
+                <a:solidFill>
+                  <a:srgbClr val="20242E"/>
+                </a:solidFill>
+                <a:latin typeface="Inter"/>
+              </a:rPr>
+              <a:t>¿Debe ser obligatorio el deporte en el instituto?</a:t>
+            </a:r>
+          </a:p>
+        </p:txBody>
+      </p:sp>
+      <p:sp>
+        <p:nvSpPr>
+          <p:cNvPr id="13" name="Tarjeta 1"/>
+          <p:cNvSpPr/>
+          <p:nvPr/>
+        </p:nvSpPr>
+        <p:spPr>
+          <a:xfrm>
+            <a:off x="3312414" y="2670048"/>
+            <a:ext cx="2708910" cy="1170432"/>
+          </a:xfrm>
+          <a:prstGeom prst="roundRect">
+            <a:avLst>
+              <a:gd name="adj" fmla="val 6000"/>
+            </a:avLst>
+          </a:prstGeom>
+          <a:solidFill>
+            <a:srgbClr val="FFFFFF"/>
+          </a:solidFill>
+          <a:ln w="12700">
+            <a:solidFill>
+              <a:srgbClr val="E4E3DE"/>
+            </a:solidFill>
+          </a:ln>
+          <a:effectLst/>
+        </p:spPr>
+        <p:style>
+          <a:lnRef idx="1">
+            <a:schemeClr val="accent1"/>
+          </a:lnRef>
+          <a:fillRef idx="3">
+            <a:schemeClr val="accent1"/>
+          </a:fillRef>
+          <a:effectRef idx="2">
+            <a:schemeClr val="accent1"/>
+          </a:effectRef>
+          <a:fontRef idx="minor">
+            <a:schemeClr val="lt1"/>
+          </a:fontRef>
+        </p:style>
+        <p:txBody>
+          <a:bodyPr rtlCol="0" anchor="ctr"/>
+          <a:lstStyle/>
+          <a:p/>
+        </p:txBody>
+      </p:sp>
+      <p:sp>
+        <p:nvSpPr>
+          <p:cNvPr id="14" name="TarjetaTxt 1"/>
+          <p:cNvSpPr txBox="1"/>
+          <p:nvPr/>
+        </p:nvSpPr>
+        <p:spPr>
+          <a:xfrm>
+            <a:off x="3403854" y="2724912"/>
+            <a:ext cx="2526030" cy="1060704"/>
+          </a:xfrm>
+          <a:prstGeom prst="rect">
+            <a:avLst/>
+          </a:prstGeom>
+          <a:noFill/>
+        </p:spPr>
+        <p:txBody>
+          <a:bodyPr wrap="square" anchor="t" lIns="45720" rIns="45720" tIns="27432" bIns="27432">
+            <a:normAutofit/>
+          </a:bodyPr>
+          <a:lstStyle/>
+          <a:p>
+            <a:pPr algn="l"/>
+            <a:r>
+              <a:rPr sz="1100" b="1">
+                <a:solidFill>
+                  <a:srgbClr val="5B3E83"/>
+                </a:solidFill>
+                <a:latin typeface="Bricolage Grotesque"/>
+              </a:rPr>
+              <a:t>tema</a:t>
+            </a:r>
+          </a:p>
+          <a:p>
+            <a:pPr algn="l"/>
+            <a:r>
+              <a:rPr sz="1000">
+                <a:solidFill>
+                  <a:srgbClr val="20242E"/>
+                </a:solidFill>
+                <a:latin typeface="Inter"/>
+              </a:rPr>
+              <a:t>¿Hay que prohibir la comida de plástico en la cantina?</a:t>
+            </a:r>
+          </a:p>
+        </p:txBody>
+      </p:sp>
+      <p:sp>
+        <p:nvSpPr>
+          <p:cNvPr id="15" name="Tarjeta 2"/>
+          <p:cNvSpPr/>
+          <p:nvPr/>
+        </p:nvSpPr>
+        <p:spPr>
+          <a:xfrm>
+            <a:off x="6167628" y="2670048"/>
+            <a:ext cx="2708910" cy="1170432"/>
+          </a:xfrm>
+          <a:prstGeom prst="roundRect">
+            <a:avLst>
+              <a:gd name="adj" fmla="val 6000"/>
+            </a:avLst>
+          </a:prstGeom>
+          <a:solidFill>
+            <a:srgbClr val="FFFFFF"/>
+          </a:solidFill>
+          <a:ln w="12700">
+            <a:solidFill>
+              <a:srgbClr val="E4E3DE"/>
+            </a:solidFill>
+          </a:ln>
+          <a:effectLst/>
+        </p:spPr>
+        <p:style>
+          <a:lnRef idx="1">
+            <a:schemeClr val="accent1"/>
+          </a:lnRef>
+          <a:fillRef idx="3">
+            <a:schemeClr val="accent1"/>
+          </a:fillRef>
+          <a:effectRef idx="2">
+            <a:schemeClr val="accent1"/>
+          </a:effectRef>
+          <a:fontRef idx="minor">
+            <a:schemeClr val="lt1"/>
+          </a:fontRef>
+        </p:style>
+        <p:txBody>
+          <a:bodyPr rtlCol="0" anchor="ctr"/>
+          <a:lstStyle/>
+          <a:p/>
+        </p:txBody>
+      </p:sp>
+      <p:sp>
+        <p:nvSpPr>
+          <p:cNvPr id="16" name="TarjetaTxt 2"/>
+          <p:cNvSpPr txBox="1"/>
+          <p:nvPr/>
+        </p:nvSpPr>
+        <p:spPr>
+          <a:xfrm>
+            <a:off x="6259068" y="2724912"/>
+            <a:ext cx="2526030" cy="1060704"/>
+          </a:xfrm>
+          <a:prstGeom prst="rect">
+            <a:avLst/>
+          </a:prstGeom>
+          <a:noFill/>
+        </p:spPr>
+        <p:txBody>
+          <a:bodyPr wrap="square" anchor="t" lIns="45720" rIns="45720" tIns="27432" bIns="27432">
+            <a:normAutofit/>
+          </a:bodyPr>
+          <a:lstStyle/>
+          <a:p>
+            <a:pPr algn="l"/>
+            <a:r>
+              <a:rPr sz="1100" b="1">
+                <a:solidFill>
+                  <a:srgbClr val="5B3E83"/>
+                </a:solidFill>
+                <a:latin typeface="Bricolage Grotesque"/>
+              </a:rPr>
+              <a:t>tema</a:t>
+            </a:r>
+          </a:p>
+          <a:p>
+            <a:pPr algn="l"/>
+            <a:r>
+              <a:rPr sz="1000">
+                <a:solidFill>
+                  <a:srgbClr val="20242E"/>
+                </a:solidFill>
+                <a:latin typeface="Inter"/>
+              </a:rPr>
+              <a:t>¿Tienen que empezar más tarde los institutos?</a:t>
+            </a:r>
+          </a:p>
+        </p:txBody>
+      </p:sp>
+      <p:sp>
+        <p:nvSpPr>
+          <p:cNvPr id="17" name="Tarjeta 3"/>
+          <p:cNvSpPr/>
+          <p:nvPr/>
+        </p:nvSpPr>
+        <p:spPr>
+          <a:xfrm>
+            <a:off x="9022842" y="2670048"/>
+            <a:ext cx="2708910" cy="1170432"/>
+          </a:xfrm>
+          <a:prstGeom prst="roundRect">
+            <a:avLst>
+              <a:gd name="adj" fmla="val 6000"/>
+            </a:avLst>
+          </a:prstGeom>
+          <a:solidFill>
+            <a:srgbClr val="FFFFFF"/>
+          </a:solidFill>
+          <a:ln w="12700">
+            <a:solidFill>
+              <a:srgbClr val="E4E3DE"/>
+            </a:solidFill>
+          </a:ln>
+          <a:effectLst/>
+        </p:spPr>
+        <p:style>
+          <a:lnRef idx="1">
+            <a:schemeClr val="accent1"/>
+          </a:lnRef>
+          <a:fillRef idx="3">
+            <a:schemeClr val="accent1"/>
+          </a:fillRef>
+          <a:effectRef idx="2">
+            <a:schemeClr val="accent1"/>
+          </a:effectRef>
+          <a:fontRef idx="minor">
+            <a:schemeClr val="lt1"/>
+          </a:fontRef>
+        </p:style>
+        <p:txBody>
+          <a:bodyPr rtlCol="0" anchor="ctr"/>
+          <a:lstStyle/>
+          <a:p/>
+        </p:txBody>
+      </p:sp>
+      <p:sp>
+        <p:nvSpPr>
+          <p:cNvPr id="18" name="TarjetaTxt 3"/>
+          <p:cNvSpPr txBox="1"/>
+          <p:nvPr/>
+        </p:nvSpPr>
+        <p:spPr>
+          <a:xfrm>
+            <a:off x="9114282" y="2724912"/>
+            <a:ext cx="2526030" cy="1060704"/>
+          </a:xfrm>
+          <a:prstGeom prst="rect">
+            <a:avLst/>
+          </a:prstGeom>
+          <a:noFill/>
+        </p:spPr>
+        <p:txBody>
+          <a:bodyPr wrap="square" anchor="t" lIns="45720" rIns="45720" tIns="27432" bIns="27432">
+            <a:normAutofit/>
+          </a:bodyPr>
+          <a:lstStyle/>
+          <a:p>
+            <a:pPr algn="l"/>
+            <a:r>
+              <a:rPr sz="1100" b="1">
+                <a:solidFill>
+                  <a:srgbClr val="5B3E83"/>
+                </a:solidFill>
+                <a:latin typeface="Bricolage Grotesque"/>
+              </a:rPr>
+              <a:t>tema</a:t>
+            </a:r>
+          </a:p>
+          <a:p>
+            <a:pPr algn="l"/>
+            <a:r>
+              <a:rPr sz="1000">
+                <a:solidFill>
+                  <a:srgbClr val="20242E"/>
+                </a:solidFill>
+                <a:latin typeface="Inter"/>
+              </a:rPr>
+              <a:t>¿Es responsabilidad de cada uno o de las empresas?</a:t>
+            </a:r>
+          </a:p>
+        </p:txBody>
+      </p:sp>
+      <p:sp>
+        <p:nvSpPr>
+          <p:cNvPr id="19" name="Tarjeta 4"/>
+          <p:cNvSpPr/>
+          <p:nvPr/>
+        </p:nvSpPr>
+        <p:spPr>
+          <a:xfrm>
+            <a:off x="457200" y="3968496"/>
+            <a:ext cx="2708910" cy="1170432"/>
+          </a:xfrm>
+          <a:prstGeom prst="roundRect">
+            <a:avLst>
+              <a:gd name="adj" fmla="val 6000"/>
+            </a:avLst>
+          </a:prstGeom>
+          <a:solidFill>
+            <a:srgbClr val="FFFFFF"/>
+          </a:solidFill>
+          <a:ln w="12700">
+            <a:solidFill>
+              <a:srgbClr val="E4E3DE"/>
+            </a:solidFill>
+          </a:ln>
+          <a:effectLst/>
+        </p:spPr>
+        <p:style>
+          <a:lnRef idx="1">
+            <a:schemeClr val="accent1"/>
+          </a:lnRef>
+          <a:fillRef idx="3">
+            <a:schemeClr val="accent1"/>
+          </a:fillRef>
+          <a:effectRef idx="2">
+            <a:schemeClr val="accent1"/>
+          </a:effectRef>
+          <a:fontRef idx="minor">
+            <a:schemeClr val="lt1"/>
+          </a:fontRef>
+        </p:style>
+        <p:txBody>
+          <a:bodyPr rtlCol="0" anchor="ctr"/>
+          <a:lstStyle/>
+          <a:p/>
+        </p:txBody>
+      </p:sp>
+      <p:sp>
+        <p:nvSpPr>
+          <p:cNvPr id="20" name="TarjetaTxt 4"/>
+          <p:cNvSpPr txBox="1"/>
+          <p:nvPr/>
+        </p:nvSpPr>
+        <p:spPr>
+          <a:xfrm>
+            <a:off x="548640" y="4023360"/>
+            <a:ext cx="2526030" cy="1060704"/>
+          </a:xfrm>
+          <a:prstGeom prst="rect">
+            <a:avLst/>
+          </a:prstGeom>
+          <a:noFill/>
+        </p:spPr>
+        <p:txBody>
+          <a:bodyPr wrap="square" anchor="t" lIns="45720" rIns="45720" tIns="27432" bIns="27432">
+            <a:normAutofit/>
+          </a:bodyPr>
+          <a:lstStyle/>
+          <a:p>
+            <a:pPr algn="l"/>
+            <a:r>
+              <a:rPr sz="1100" b="1">
+                <a:solidFill>
+                  <a:srgbClr val="5B3E83"/>
+                </a:solidFill>
+                <a:latin typeface="Bricolage Grotesque"/>
+              </a:rPr>
+              <a:t>tema</a:t>
+            </a:r>
+          </a:p>
+          <a:p>
+            <a:pPr algn="l"/>
+            <a:r>
+              <a:rPr sz="1000">
+                <a:solidFill>
+                  <a:srgbClr val="20242E"/>
+                </a:solidFill>
+                <a:latin typeface="Inter"/>
+              </a:rPr>
+              <a:t>¿Se puede opinar de salud sin ser médico?</a:t>
+            </a:r>
+          </a:p>
+        </p:txBody>
+      </p:sp>
+      <p:sp>
+        <p:nvSpPr>
+          <p:cNvPr id="21" name="Tarjeta 5"/>
+          <p:cNvSpPr/>
+          <p:nvPr/>
+        </p:nvSpPr>
+        <p:spPr>
+          <a:xfrm>
+            <a:off x="3312414" y="3968496"/>
+            <a:ext cx="2708910" cy="1170432"/>
+          </a:xfrm>
+          <a:prstGeom prst="roundRect">
+            <a:avLst>
+              <a:gd name="adj" fmla="val 6000"/>
+            </a:avLst>
+          </a:prstGeom>
+          <a:solidFill>
+            <a:srgbClr val="FFFFFF"/>
+          </a:solidFill>
+          <a:ln w="12700">
+            <a:solidFill>
+              <a:srgbClr val="E4E3DE"/>
+            </a:solidFill>
+          </a:ln>
+          <a:effectLst/>
+        </p:spPr>
+        <p:style>
+          <a:lnRef idx="1">
+            <a:schemeClr val="accent1"/>
+          </a:lnRef>
+          <a:fillRef idx="3">
+            <a:schemeClr val="accent1"/>
+          </a:fillRef>
+          <a:effectRef idx="2">
+            <a:schemeClr val="accent1"/>
+          </a:effectRef>
+          <a:fontRef idx="minor">
+            <a:schemeClr val="lt1"/>
+          </a:fontRef>
+        </p:style>
+        <p:txBody>
+          <a:bodyPr rtlCol="0" anchor="ctr"/>
+          <a:lstStyle/>
+          <a:p/>
+        </p:txBody>
+      </p:sp>
+      <p:sp>
+        <p:nvSpPr>
+          <p:cNvPr id="22" name="TarjetaTxt 5"/>
+          <p:cNvSpPr txBox="1"/>
+          <p:nvPr/>
+        </p:nvSpPr>
+        <p:spPr>
+          <a:xfrm>
+            <a:off x="3403854" y="4023360"/>
+            <a:ext cx="2526030" cy="1060704"/>
+          </a:xfrm>
+          <a:prstGeom prst="rect">
+            <a:avLst/>
+          </a:prstGeom>
+          <a:noFill/>
+        </p:spPr>
+        <p:txBody>
+          <a:bodyPr wrap="square" anchor="t" lIns="45720" rIns="45720" tIns="27432" bIns="27432">
+            <a:normAutofit/>
+          </a:bodyPr>
+          <a:lstStyle/>
+          <a:p>
+            <a:pPr algn="l"/>
+            <a:r>
+              <a:rPr sz="1100" b="1">
+                <a:solidFill>
+                  <a:srgbClr val="5B3E83"/>
+                </a:solidFill>
+                <a:latin typeface="Bricolage Grotesque"/>
+              </a:rPr>
+              <a:t>marco</a:t>
+            </a:r>
+          </a:p>
+          <a:p>
+            <a:pPr algn="l"/>
+            <a:r>
+              <a:rPr sz="1000">
+                <a:solidFill>
+                  <a:srgbClr val="20242E"/>
+                </a:solidFill>
+                <a:latin typeface="Inter"/>
+              </a:rPr>
+              <a:t>Creo que … porque …</a:t>
+            </a:r>
+          </a:p>
+        </p:txBody>
+      </p:sp>
+      <p:sp>
+        <p:nvSpPr>
+          <p:cNvPr id="23" name="Tarjeta 6"/>
+          <p:cNvSpPr/>
+          <p:nvPr/>
+        </p:nvSpPr>
+        <p:spPr>
+          <a:xfrm>
+            <a:off x="6167628" y="3968496"/>
+            <a:ext cx="2708910" cy="1170432"/>
+          </a:xfrm>
+          <a:prstGeom prst="roundRect">
+            <a:avLst>
+              <a:gd name="adj" fmla="val 6000"/>
+            </a:avLst>
+          </a:prstGeom>
+          <a:solidFill>
+            <a:srgbClr val="FFFFFF"/>
+          </a:solidFill>
+          <a:ln w="12700">
+            <a:solidFill>
+              <a:srgbClr val="E4E3DE"/>
+            </a:solidFill>
+          </a:ln>
+          <a:effectLst/>
+        </p:spPr>
+        <p:style>
+          <a:lnRef idx="1">
+            <a:schemeClr val="accent1"/>
+          </a:lnRef>
+          <a:fillRef idx="3">
+            <a:schemeClr val="accent1"/>
+          </a:fillRef>
+          <a:effectRef idx="2">
+            <a:schemeClr val="accent1"/>
+          </a:effectRef>
+          <a:fontRef idx="minor">
+            <a:schemeClr val="lt1"/>
+          </a:fontRef>
+        </p:style>
+        <p:txBody>
+          <a:bodyPr rtlCol="0" anchor="ctr"/>
+          <a:lstStyle/>
+          <a:p/>
+        </p:txBody>
+      </p:sp>
+      <p:sp>
+        <p:nvSpPr>
+          <p:cNvPr id="24" name="TarjetaTxt 6"/>
+          <p:cNvSpPr txBox="1"/>
+          <p:nvPr/>
+        </p:nvSpPr>
+        <p:spPr>
+          <a:xfrm>
+            <a:off x="6259068" y="4023360"/>
+            <a:ext cx="2526030" cy="1060704"/>
+          </a:xfrm>
+          <a:prstGeom prst="rect">
+            <a:avLst/>
+          </a:prstGeom>
+          <a:noFill/>
+        </p:spPr>
+        <p:txBody>
+          <a:bodyPr wrap="square" anchor="t" lIns="45720" rIns="45720" tIns="27432" bIns="27432">
+            <a:normAutofit/>
+          </a:bodyPr>
+          <a:lstStyle/>
+          <a:p>
+            <a:pPr algn="l"/>
+            <a:r>
+              <a:rPr sz="1100" b="1">
+                <a:solidFill>
+                  <a:srgbClr val="5B3E83"/>
+                </a:solidFill>
+                <a:latin typeface="Bricolage Grotesque"/>
+              </a:rPr>
+              <a:t>marco</a:t>
+            </a:r>
+          </a:p>
+          <a:p>
+            <a:pPr algn="l"/>
+            <a:r>
+              <a:rPr sz="1000">
+                <a:solidFill>
+                  <a:srgbClr val="20242E"/>
+                </a:solidFill>
+                <a:latin typeface="Inter"/>
+              </a:rPr>
+              <a:t>Aunque entiendo que … , creo que …</a:t>
+            </a:r>
+          </a:p>
+        </p:txBody>
+      </p:sp>
+      <p:sp>
+        <p:nvSpPr>
+          <p:cNvPr id="25" name="Tarjeta 7"/>
+          <p:cNvSpPr/>
+          <p:nvPr/>
+        </p:nvSpPr>
+        <p:spPr>
+          <a:xfrm>
+            <a:off x="9022842" y="3968496"/>
+            <a:ext cx="2708910" cy="1170432"/>
+          </a:xfrm>
+          <a:prstGeom prst="roundRect">
+            <a:avLst>
+              <a:gd name="adj" fmla="val 6000"/>
+            </a:avLst>
+          </a:prstGeom>
+          <a:solidFill>
+            <a:srgbClr val="FFFFFF"/>
+          </a:solidFill>
+          <a:ln w="12700">
+            <a:solidFill>
+              <a:srgbClr val="E4E3DE"/>
+            </a:solidFill>
+          </a:ln>
+          <a:effectLst/>
+        </p:spPr>
+        <p:style>
+          <a:lnRef idx="1">
+            <a:schemeClr val="accent1"/>
+          </a:lnRef>
+          <a:fillRef idx="3">
+            <a:schemeClr val="accent1"/>
+          </a:fillRef>
+          <a:effectRef idx="2">
+            <a:schemeClr val="accent1"/>
+          </a:effectRef>
+          <a:fontRef idx="minor">
+            <a:schemeClr val="lt1"/>
+          </a:fontRef>
+        </p:style>
+        <p:txBody>
+          <a:bodyPr rtlCol="0" anchor="ctr"/>
+          <a:lstStyle/>
+          <a:p/>
+        </p:txBody>
+      </p:sp>
+      <p:sp>
+        <p:nvSpPr>
+          <p:cNvPr id="26" name="TarjetaTxt 7"/>
+          <p:cNvSpPr txBox="1"/>
+          <p:nvPr/>
+        </p:nvSpPr>
+        <p:spPr>
+          <a:xfrm>
+            <a:off x="9114282" y="4023360"/>
+            <a:ext cx="2526030" cy="1060704"/>
+          </a:xfrm>
+          <a:prstGeom prst="rect">
+            <a:avLst/>
+          </a:prstGeom>
+          <a:noFill/>
+        </p:spPr>
+        <p:txBody>
+          <a:bodyPr wrap="square" anchor="t" lIns="45720" rIns="45720" tIns="27432" bIns="27432">
+            <a:normAutofit/>
+          </a:bodyPr>
+          <a:lstStyle/>
+          <a:p>
+            <a:pPr algn="l"/>
+            <a:r>
+              <a:rPr sz="1100" b="1">
+                <a:solidFill>
+                  <a:srgbClr val="5B3E83"/>
+                </a:solidFill>
+                <a:latin typeface="Bricolage Grotesque"/>
+              </a:rPr>
+              <a:t>marco</a:t>
+            </a:r>
+          </a:p>
+          <a:p>
+            <a:pPr algn="l"/>
+            <a:r>
+              <a:rPr sz="1000">
+                <a:solidFill>
+                  <a:srgbClr val="20242E"/>
+                </a:solidFill>
+                <a:latin typeface="Inter"/>
+              </a:rPr>
+              <a:t>Los datos dicen que … , así que …</a:t>
+            </a:r>
+          </a:p>
+        </p:txBody>
+      </p:sp>
+      <p:sp>
+        <p:nvSpPr>
+          <p:cNvPr id="27" name="Tarjeta 8"/>
+          <p:cNvSpPr/>
+          <p:nvPr/>
+        </p:nvSpPr>
+        <p:spPr>
+          <a:xfrm>
+            <a:off x="457200" y="5266944"/>
+            <a:ext cx="2708910" cy="1170432"/>
+          </a:xfrm>
+          <a:prstGeom prst="roundRect">
+            <a:avLst>
+              <a:gd name="adj" fmla="val 6000"/>
+            </a:avLst>
+          </a:prstGeom>
+          <a:solidFill>
+            <a:srgbClr val="FFFFFF"/>
+          </a:solidFill>
+          <a:ln w="12700">
+            <a:solidFill>
+              <a:srgbClr val="E4E3DE"/>
+            </a:solidFill>
+          </a:ln>
+          <a:effectLst/>
+        </p:spPr>
+        <p:style>
+          <a:lnRef idx="1">
+            <a:schemeClr val="accent1"/>
+          </a:lnRef>
+          <a:fillRef idx="3">
+            <a:schemeClr val="accent1"/>
+          </a:fillRef>
+          <a:effectRef idx="2">
+            <a:schemeClr val="accent1"/>
+          </a:effectRef>
+          <a:fontRef idx="minor">
+            <a:schemeClr val="lt1"/>
+          </a:fontRef>
+        </p:style>
+        <p:txBody>
+          <a:bodyPr rtlCol="0" anchor="ctr"/>
+          <a:lstStyle/>
+          <a:p/>
+        </p:txBody>
+      </p:sp>
+      <p:sp>
+        <p:nvSpPr>
+          <p:cNvPr id="28" name="TarjetaTxt 8"/>
+          <p:cNvSpPr txBox="1"/>
+          <p:nvPr/>
+        </p:nvSpPr>
+        <p:spPr>
+          <a:xfrm>
+            <a:off x="548640" y="5321808"/>
+            <a:ext cx="2526030" cy="1060704"/>
+          </a:xfrm>
+          <a:prstGeom prst="rect">
+            <a:avLst/>
+          </a:prstGeom>
+          <a:noFill/>
+        </p:spPr>
+        <p:txBody>
+          <a:bodyPr wrap="square" anchor="t" lIns="45720" rIns="45720" tIns="27432" bIns="27432">
+            <a:normAutofit/>
+          </a:bodyPr>
+          <a:lstStyle/>
+          <a:p>
+            <a:pPr algn="l"/>
+            <a:r>
+              <a:rPr sz="1100" b="1">
+                <a:solidFill>
+                  <a:srgbClr val="5B3E83"/>
+                </a:solidFill>
+                <a:latin typeface="Bricolage Grotesque"/>
+              </a:rPr>
+              <a:t>marco</a:t>
+            </a:r>
+          </a:p>
+          <a:p>
+            <a:pPr algn="l"/>
+            <a:r>
+              <a:rPr sz="1000">
+                <a:solidFill>
+                  <a:srgbClr val="20242E"/>
+                </a:solidFill>
+                <a:latin typeface="Inter"/>
+              </a:rPr>
+              <a:t>El mejor argumento del otro lado es … , porque …</a:t>
+            </a:r>
+          </a:p>
+        </p:txBody>
+      </p:sp>
+      <p:sp>
+        <p:nvSpPr>
+          <p:cNvPr id="29" name="Tarjeta 9"/>
+          <p:cNvSpPr/>
+          <p:nvPr/>
+        </p:nvSpPr>
+        <p:spPr>
+          <a:xfrm>
+            <a:off x="3312414" y="5266944"/>
+            <a:ext cx="2708910" cy="1170432"/>
+          </a:xfrm>
+          <a:prstGeom prst="roundRect">
+            <a:avLst>
+              <a:gd name="adj" fmla="val 6000"/>
+            </a:avLst>
+          </a:prstGeom>
+          <a:solidFill>
+            <a:srgbClr val="FFFFFF"/>
+          </a:solidFill>
+          <a:ln w="12700">
+            <a:solidFill>
+              <a:srgbClr val="E4E3DE"/>
+            </a:solidFill>
+          </a:ln>
+          <a:effectLst/>
+        </p:spPr>
+        <p:style>
+          <a:lnRef idx="1">
+            <a:schemeClr val="accent1"/>
+          </a:lnRef>
+          <a:fillRef idx="3">
+            <a:schemeClr val="accent1"/>
+          </a:fillRef>
+          <a:effectRef idx="2">
+            <a:schemeClr val="accent1"/>
+          </a:effectRef>
+          <a:fontRef idx="minor">
+            <a:schemeClr val="lt1"/>
+          </a:fontRef>
+        </p:style>
+        <p:txBody>
+          <a:bodyPr rtlCol="0" anchor="ctr"/>
+          <a:lstStyle/>
+          <a:p/>
+        </p:txBody>
+      </p:sp>
+      <p:sp>
+        <p:nvSpPr>
+          <p:cNvPr id="30" name="TarjetaTxt 9"/>
+          <p:cNvSpPr txBox="1"/>
+          <p:nvPr/>
+        </p:nvSpPr>
+        <p:spPr>
+          <a:xfrm>
+            <a:off x="3403854" y="5321808"/>
+            <a:ext cx="2526030" cy="1060704"/>
+          </a:xfrm>
+          <a:prstGeom prst="rect">
+            <a:avLst/>
+          </a:prstGeom>
+          <a:noFill/>
+        </p:spPr>
+        <p:txBody>
+          <a:bodyPr wrap="square" anchor="t" lIns="45720" rIns="45720" tIns="27432" bIns="27432">
+            <a:normAutofit/>
+          </a:bodyPr>
+          <a:lstStyle/>
+          <a:p>
+            <a:pPr algn="l"/>
+            <a:r>
+              <a:rPr sz="1100" b="1">
+                <a:solidFill>
+                  <a:srgbClr val="5B3E83"/>
+                </a:solidFill>
+                <a:latin typeface="Bricolage Grotesque"/>
+              </a:rPr>
+              <a:t>marco</a:t>
+            </a:r>
+          </a:p>
+          <a:p>
+            <a:pPr algn="l"/>
+            <a:r>
+              <a:rPr sz="1000">
+                <a:solidFill>
+                  <a:srgbClr val="20242E"/>
+                </a:solidFill>
+                <a:latin typeface="Inter"/>
+              </a:rPr>
+              <a:t>Me ha hecho dudar que …</a:t>
+            </a:r>
+          </a:p>
+        </p:txBody>
+      </p:sp>
+      <p:sp>
+        <p:nvSpPr>
+          <p:cNvPr id="31" name="Tarjeta 10"/>
+          <p:cNvSpPr/>
+          <p:nvPr/>
+        </p:nvSpPr>
+        <p:spPr>
+          <a:xfrm>
+            <a:off x="6167628" y="5266944"/>
+            <a:ext cx="2708910" cy="1170432"/>
+          </a:xfrm>
+          <a:prstGeom prst="roundRect">
+            <a:avLst>
+              <a:gd name="adj" fmla="val 6000"/>
+            </a:avLst>
+          </a:prstGeom>
+          <a:solidFill>
+            <a:srgbClr val="FFFFFF"/>
+          </a:solidFill>
+          <a:ln w="12700">
+            <a:solidFill>
+              <a:srgbClr val="E4E3DE"/>
+            </a:solidFill>
+          </a:ln>
+          <a:effectLst/>
+        </p:spPr>
+        <p:style>
+          <a:lnRef idx="1">
+            <a:schemeClr val="accent1"/>
+          </a:lnRef>
+          <a:fillRef idx="3">
+            <a:schemeClr val="accent1"/>
+          </a:fillRef>
+          <a:effectRef idx="2">
+            <a:schemeClr val="accent1"/>
+          </a:effectRef>
+          <a:fontRef idx="minor">
+            <a:schemeClr val="lt1"/>
+          </a:fontRef>
+        </p:style>
+        <p:txBody>
+          <a:bodyPr rtlCol="0" anchor="ctr"/>
+          <a:lstStyle/>
+          <a:p/>
+        </p:txBody>
+      </p:sp>
+      <p:sp>
+        <p:nvSpPr>
+          <p:cNvPr id="32" name="TarjetaTxt 10"/>
+          <p:cNvSpPr txBox="1"/>
+          <p:nvPr/>
+        </p:nvSpPr>
+        <p:spPr>
+          <a:xfrm>
+            <a:off x="6259068" y="5321808"/>
+            <a:ext cx="2526030" cy="1060704"/>
+          </a:xfrm>
+          <a:prstGeom prst="rect">
+            <a:avLst/>
+          </a:prstGeom>
+          <a:noFill/>
+        </p:spPr>
+        <p:txBody>
+          <a:bodyPr wrap="square" anchor="t" lIns="45720" rIns="45720" tIns="27432" bIns="27432">
+            <a:normAutofit/>
+          </a:bodyPr>
+          <a:lstStyle/>
+          <a:p>
+            <a:pPr algn="l"/>
+            <a:r>
+              <a:rPr sz="1100" b="1">
+                <a:solidFill>
+                  <a:srgbClr val="5B3E83"/>
+                </a:solidFill>
+                <a:latin typeface="Bricolage Grotesque"/>
+              </a:rPr>
+              <a:t>Aviso</a:t>
+            </a:r>
+          </a:p>
+          <a:p>
+            <a:pPr algn="l"/>
+            <a:r>
+              <a:rPr sz="1000">
+                <a:solidFill>
+                  <a:srgbClr val="20242E"/>
+                </a:solidFill>
+                <a:latin typeface="Inter"/>
+              </a:rPr>
+              <a:t>Nadie tiene que decir en el debate lo que piensa de verdad. Se dice al final, si se quiere.</a:t>
+            </a:r>
+          </a:p>
+        </p:txBody>
+      </p:sp>
+    </p:spTree>
+  </p:cSld>
+  <p:clrMapOvr>
+    <a:masterClrMapping/>
+  </p:clrMapOvr>
+</p:sld>
+</file>
+
+<file path=ppt/slides/slide23.xml><?xml version="1.0" encoding="utf-8"?>
+<p:sld xmlns:a="http://schemas.openxmlformats.org/drawingml/2006/main" xmlns:p="http://schemas.openxmlformats.org/presentationml/2006/main" xmlns:r="http://schemas.openxmlformats.org/officeDocument/2006/relationships">
+  <p:cSld>
+    <p:spTree>
+      <p:nvGrpSpPr>
+        <p:cNvPr id="1" name=""/>
+        <p:cNvGrpSpPr/>
+        <p:nvPr/>
+      </p:nvGrpSpPr>
+      <p:grpSpPr/>
+      <p:sp>
+        <p:nvSpPr>
+          <p:cNvPr id="2" name="Fondo"/>
+          <p:cNvSpPr/>
+          <p:nvPr/>
+        </p:nvSpPr>
+        <p:spPr>
+          <a:xfrm>
+            <a:off x="0" y="0"/>
+            <a:ext cx="12191695" cy="6858000"/>
+          </a:xfrm>
+          <a:prstGeom prst="rect">
+            <a:avLst/>
+          </a:prstGeom>
+          <a:solidFill>
+            <a:srgbClr val="FCFBF8"/>
+          </a:solidFill>
+          <a:ln>
+            <a:noFill/>
+          </a:ln>
+          <a:effectLst/>
+        </p:spPr>
+        <p:style>
+          <a:lnRef idx="1">
+            <a:schemeClr val="accent1"/>
+          </a:lnRef>
+          <a:fillRef idx="3">
+            <a:schemeClr val="accent1"/>
+          </a:fillRef>
+          <a:effectRef idx="2">
+            <a:schemeClr val="accent1"/>
+          </a:effectRef>
+          <a:fontRef idx="minor">
+            <a:schemeClr val="lt1"/>
+          </a:fontRef>
+        </p:style>
+        <p:txBody>
+          <a:bodyPr rtlCol="0" anchor="ctr"/>
+          <a:lstStyle/>
+          <a:p/>
+        </p:txBody>
+      </p:sp>
+      <p:sp>
+        <p:nvSpPr>
+          <p:cNvPr id="3" name="Cabecera"/>
+          <p:cNvSpPr/>
+          <p:nvPr/>
+        </p:nvSpPr>
+        <p:spPr>
+          <a:xfrm>
+            <a:off x="0" y="0"/>
+            <a:ext cx="12191695" cy="1078992"/>
+          </a:xfrm>
+          <a:prstGeom prst="rect">
+            <a:avLst/>
+          </a:prstGeom>
+          <a:solidFill>
+            <a:srgbClr val="7C56A9"/>
+          </a:solidFill>
+          <a:ln>
+            <a:noFill/>
+          </a:ln>
+          <a:effectLst/>
+        </p:spPr>
+        <p:style>
+          <a:lnRef idx="1">
+            <a:schemeClr val="accent1"/>
+          </a:lnRef>
+          <a:fillRef idx="3">
+            <a:schemeClr val="accent1"/>
+          </a:fillRef>
+          <a:effectRef idx="2">
+            <a:schemeClr val="accent1"/>
+          </a:effectRef>
+          <a:fontRef idx="minor">
+            <a:schemeClr val="lt1"/>
+          </a:fontRef>
+        </p:style>
+        <p:txBody>
+          <a:bodyPr rtlCol="0" anchor="ctr"/>
+          <a:lstStyle/>
+          <a:p/>
+        </p:txBody>
+      </p:sp>
+      <p:sp>
+        <p:nvSpPr>
+          <p:cNvPr id="4" name="Chip"/>
+          <p:cNvSpPr/>
+          <p:nvPr/>
+        </p:nvSpPr>
+        <p:spPr>
+          <a:xfrm>
+            <a:off x="457200" y="182880"/>
+            <a:ext cx="3017520" cy="292608"/>
+          </a:xfrm>
+          <a:prstGeom prst="roundRect">
+            <a:avLst>
+              <a:gd name="adj" fmla="val 50000"/>
+            </a:avLst>
+          </a:prstGeom>
+          <a:solidFill>
+            <a:srgbClr val="FFFFFF"/>
+          </a:solidFill>
+          <a:ln>
+            <a:noFill/>
+          </a:ln>
+          <a:effectLst/>
+        </p:spPr>
+        <p:style>
+          <a:lnRef idx="1">
+            <a:schemeClr val="accent1"/>
+          </a:lnRef>
+          <a:fillRef idx="3">
+            <a:schemeClr val="accent1"/>
+          </a:fillRef>
+          <a:effectRef idx="2">
+            <a:schemeClr val="accent1"/>
+          </a:effectRef>
+          <a:fontRef idx="minor">
+            <a:schemeClr val="lt1"/>
+          </a:fontRef>
+        </p:style>
+        <p:txBody>
+          <a:bodyPr rtlCol="0" anchor="ctr"/>
+          <a:lstStyle/>
+          <a:p/>
+        </p:txBody>
+      </p:sp>
+      <p:sp>
+        <p:nvSpPr>
+          <p:cNvPr id="5" name="ChipTxt"/>
+          <p:cNvSpPr txBox="1"/>
+          <p:nvPr/>
+        </p:nvSpPr>
+        <p:spPr>
+          <a:xfrm>
+            <a:off x="457200" y="173736"/>
+            <a:ext cx="3017520" cy="310896"/>
+          </a:xfrm>
+          <a:prstGeom prst="rect">
+            <a:avLst/>
+          </a:prstGeom>
+          <a:noFill/>
+        </p:spPr>
+        <p:txBody>
+          <a:bodyPr wrap="square" anchor="ctr" lIns="45720" rIns="45720" tIns="27432" bIns="27432">
+            <a:normAutofit/>
+          </a:bodyPr>
+          <a:lstStyle/>
+          <a:p>
+            <a:pPr algn="ctr"/>
+            <a:r>
+              <a:rPr sz="950" b="1">
+                <a:solidFill>
+                  <a:srgbClr val="5B3E83"/>
+                </a:solidFill>
+                <a:latin typeface="Inter"/>
+              </a:rPr>
+              <a:t>RETO 6 · SIMULATIE MET BEPERKING</a:t>
+            </a:r>
+          </a:p>
+        </p:txBody>
+      </p:sp>
+      <p:sp>
+        <p:nvSpPr>
+          <p:cNvPr id="6" name="Titulo"/>
+          <p:cNvSpPr txBox="1"/>
+          <p:nvPr/>
+        </p:nvSpPr>
+        <p:spPr>
+          <a:xfrm>
+            <a:off x="457200" y="502920"/>
+            <a:ext cx="8412480" cy="475488"/>
+          </a:xfrm>
+          <a:prstGeom prst="rect">
+            <a:avLst/>
+          </a:prstGeom>
+          <a:noFill/>
+        </p:spPr>
+        <p:txBody>
+          <a:bodyPr wrap="square" anchor="t" lIns="45720" rIns="45720" tIns="27432" bIns="27432">
+            <a:normAutofit/>
+          </a:bodyPr>
+          <a:lstStyle/>
+          <a:p>
+            <a:pPr algn="l"/>
+            <a:r>
+              <a:rPr sz="2700" b="1">
+                <a:solidFill>
+                  <a:srgbClr val="FFFFFF"/>
+                </a:solidFill>
+                <a:latin typeface="Bricolage Grotesque"/>
+              </a:rPr>
+              <a:t>La consulta imposible</a:t>
+            </a:r>
+          </a:p>
+        </p:txBody>
+      </p:sp>
+      <p:sp>
+        <p:nvSpPr>
+          <p:cNvPr id="7" name="Badges"/>
+          <p:cNvSpPr txBox="1"/>
+          <p:nvPr/>
+        </p:nvSpPr>
+        <p:spPr>
+          <a:xfrm>
+            <a:off x="9052560" y="256032"/>
+            <a:ext cx="2651760" cy="640080"/>
+          </a:xfrm>
+          <a:prstGeom prst="rect">
+            <a:avLst/>
+          </a:prstGeom>
+          <a:noFill/>
+        </p:spPr>
+        <p:txBody>
+          <a:bodyPr wrap="square" anchor="t" lIns="45720" rIns="45720" tIns="27432" bIns="27432">
+            <a:normAutofit/>
+          </a:bodyPr>
+          <a:lstStyle/>
+          <a:p>
+            <a:pPr algn="r"/>
+            <a:r>
+              <a:rPr sz="1000">
+                <a:solidFill>
+                  <a:srgbClr val="EEE8F5"/>
+                </a:solidFill>
+                <a:latin typeface="Inter"/>
+              </a:rPr>
+              <a:t>👥 En parejas</a:t>
+            </a:r>
+          </a:p>
+          <a:p>
+            <a:pPr algn="r"/>
+            <a:r>
+              <a:rPr sz="1000">
+                <a:solidFill>
+                  <a:srgbClr val="EEE8F5"/>
+                </a:solidFill>
+                <a:latin typeface="Inter"/>
+              </a:rPr>
+              <a:t>± 15 min · ★★★</a:t>
+            </a:r>
+          </a:p>
+        </p:txBody>
+      </p:sp>
+      <p:sp>
+        <p:nvSpPr>
+          <p:cNvPr id="8" name="Gancho"/>
+          <p:cNvSpPr txBox="1"/>
+          <p:nvPr/>
+        </p:nvSpPr>
+        <p:spPr>
+          <a:xfrm>
+            <a:off x="457200" y="1225296"/>
+            <a:ext cx="11274552" cy="566928"/>
+          </a:xfrm>
+          <a:prstGeom prst="rect">
+            <a:avLst/>
+          </a:prstGeom>
+          <a:noFill/>
+        </p:spPr>
+        <p:txBody>
+          <a:bodyPr wrap="square" anchor="t" lIns="45720" rIns="45720" tIns="27432" bIns="27432">
+            <a:normAutofit/>
+          </a:bodyPr>
+          <a:lstStyle/>
+          <a:p>
+            <a:pPr algn="l"/>
+            <a:r>
+              <a:rPr sz="1600" b="1">
+                <a:solidFill>
+                  <a:srgbClr val="5B3E83"/>
+                </a:solidFill>
+                <a:latin typeface="Bricolage Grotesque"/>
+              </a:rPr>
+              <a:t>El paciente exagera todo. El médico tiene siete minutos y no puede reírse.</a:t>
+            </a:r>
+          </a:p>
+          <a:p>
+            <a:pPr algn="l"/>
+            <a:r>
+              <a:rPr sz="1100" i="1">
+                <a:solidFill>
+                  <a:srgbClr val="6A6E78"/>
+                </a:solidFill>
+                <a:latin typeface="Inter"/>
+              </a:rPr>
+              <a:t>De patiënt overdrijft alles. De dokter heeft zeven minuten en mag niet lachen.</a:t>
+            </a:r>
+          </a:p>
+        </p:txBody>
+      </p:sp>
+      <p:sp>
+        <p:nvSpPr>
+          <p:cNvPr id="9" name="ReglaCaja"/>
+          <p:cNvSpPr/>
+          <p:nvPr/>
+        </p:nvSpPr>
+        <p:spPr>
+          <a:xfrm>
+            <a:off x="457200" y="1847088"/>
+            <a:ext cx="11274552" cy="658368"/>
+          </a:xfrm>
+          <a:prstGeom prst="roundRect">
+            <a:avLst>
+              <a:gd name="adj" fmla="val 5000"/>
+            </a:avLst>
+          </a:prstGeom>
+          <a:solidFill>
+            <a:srgbClr val="FBF3D6"/>
+          </a:solidFill>
+          <a:ln>
+            <a:noFill/>
+          </a:ln>
+          <a:effectLst/>
+        </p:spPr>
+        <p:style>
+          <a:lnRef idx="1">
+            <a:schemeClr val="accent1"/>
+          </a:lnRef>
+          <a:fillRef idx="3">
+            <a:schemeClr val="accent1"/>
+          </a:fillRef>
+          <a:effectRef idx="2">
+            <a:schemeClr val="accent1"/>
+          </a:effectRef>
+          <a:fontRef idx="minor">
+            <a:schemeClr val="lt1"/>
+          </a:fontRef>
+        </p:style>
+        <p:txBody>
+          <a:bodyPr rtlCol="0" anchor="ctr"/>
+          <a:lstStyle/>
+          <a:p/>
+        </p:txBody>
+      </p:sp>
+      <p:sp>
+        <p:nvSpPr>
+          <p:cNvPr id="10" name="ReglaTxt"/>
+          <p:cNvSpPr txBox="1"/>
+          <p:nvPr/>
+        </p:nvSpPr>
+        <p:spPr>
+          <a:xfrm>
+            <a:off x="603504" y="1883664"/>
+            <a:ext cx="10972800" cy="585216"/>
+          </a:xfrm>
+          <a:prstGeom prst="rect">
+            <a:avLst/>
+          </a:prstGeom>
+          <a:noFill/>
+        </p:spPr>
+        <p:txBody>
+          <a:bodyPr wrap="square" anchor="t" lIns="45720" rIns="45720" tIns="27432" bIns="27432">
+            <a:normAutofit/>
+          </a:bodyPr>
+          <a:lstStyle/>
+          <a:p>
+            <a:pPr algn="l"/>
+            <a:r>
+              <a:rPr sz="850" b="1">
+                <a:solidFill>
+                  <a:srgbClr val="B7860B"/>
+                </a:solidFill>
+                <a:latin typeface="Inter"/>
+              </a:rPr>
+              <a:t>LA REGLA DEL RETO</a:t>
+            </a:r>
+          </a:p>
+          <a:p>
+            <a:pPr algn="l"/>
+            <a:r>
+              <a:rPr sz="1100">
+                <a:solidFill>
+                  <a:srgbClr val="20242E"/>
+                </a:solidFill>
+                <a:latin typeface="Inter"/>
+              </a:rPr>
+              <a:t>De dokter moet minstens vijf adviezen geven met een enclitisch voornaamwoord («tómatelo», «descánsala», «cuídate») — en de patiënt mag geen enkel symptoom herhalen dat al genoemd is.</a:t>
+            </a:r>
+          </a:p>
+        </p:txBody>
+      </p:sp>
+      <p:sp>
+        <p:nvSpPr>
+          <p:cNvPr id="11" name="Tarjeta 0"/>
+          <p:cNvSpPr/>
+          <p:nvPr/>
+        </p:nvSpPr>
+        <p:spPr>
+          <a:xfrm>
+            <a:off x="457200" y="2670048"/>
+            <a:ext cx="2708910" cy="898398"/>
+          </a:xfrm>
+          <a:prstGeom prst="roundRect">
+            <a:avLst>
+              <a:gd name="adj" fmla="val 6000"/>
+            </a:avLst>
+          </a:prstGeom>
+          <a:solidFill>
+            <a:srgbClr val="FFFFFF"/>
+          </a:solidFill>
+          <a:ln w="12700">
+            <a:solidFill>
+              <a:srgbClr val="E4E3DE"/>
+            </a:solidFill>
+          </a:ln>
+          <a:effectLst/>
+        </p:spPr>
+        <p:style>
+          <a:lnRef idx="1">
+            <a:schemeClr val="accent1"/>
+          </a:lnRef>
+          <a:fillRef idx="3">
+            <a:schemeClr val="accent1"/>
+          </a:fillRef>
+          <a:effectRef idx="2">
+            <a:schemeClr val="accent1"/>
+          </a:effectRef>
+          <a:fontRef idx="minor">
+            <a:schemeClr val="lt1"/>
+          </a:fontRef>
+        </p:style>
+        <p:txBody>
+          <a:bodyPr rtlCol="0" anchor="ctr"/>
+          <a:lstStyle/>
+          <a:p/>
+        </p:txBody>
+      </p:sp>
+      <p:sp>
+        <p:nvSpPr>
+          <p:cNvPr id="12" name="TarjetaTxt 0"/>
+          <p:cNvSpPr txBox="1"/>
+          <p:nvPr/>
+        </p:nvSpPr>
+        <p:spPr>
+          <a:xfrm>
+            <a:off x="548640" y="2724912"/>
+            <a:ext cx="2526030" cy="788670"/>
+          </a:xfrm>
+          <a:prstGeom prst="rect">
+            <a:avLst/>
+          </a:prstGeom>
+          <a:noFill/>
+        </p:spPr>
+        <p:txBody>
+          <a:bodyPr wrap="square" anchor="t" lIns="45720" rIns="45720" tIns="27432" bIns="27432">
+            <a:normAutofit/>
+          </a:bodyPr>
+          <a:lstStyle/>
+          <a:p>
+            <a:pPr algn="l"/>
+            <a:r>
+              <a:rPr sz="1100" b="1">
+                <a:solidFill>
+                  <a:srgbClr val="5B3E83"/>
+                </a:solidFill>
+                <a:latin typeface="Bricolage Grotesque"/>
+              </a:rPr>
+              <a:t>Síntomas</a:t>
+            </a:r>
+          </a:p>
+          <a:p>
+            <a:pPr algn="l"/>
+            <a:r>
+              <a:rPr sz="1000">
+                <a:solidFill>
+                  <a:srgbClr val="20242E"/>
+                </a:solidFill>
+                <a:latin typeface="Inter"/>
+              </a:rPr>
+              <a:t>me duele todo, pero sobre todo el codo izquierdo · no puedo dormir desde hace tres noches</a:t>
+            </a:r>
+          </a:p>
+        </p:txBody>
+      </p:sp>
+      <p:sp>
+        <p:nvSpPr>
+          <p:cNvPr id="13" name="Tarjeta 1"/>
+          <p:cNvSpPr/>
+          <p:nvPr/>
+        </p:nvSpPr>
+        <p:spPr>
+          <a:xfrm>
+            <a:off x="3312414" y="2670048"/>
+            <a:ext cx="2708910" cy="898398"/>
+          </a:xfrm>
+          <a:prstGeom prst="roundRect">
+            <a:avLst>
+              <a:gd name="adj" fmla="val 6000"/>
+            </a:avLst>
+          </a:prstGeom>
+          <a:solidFill>
+            <a:srgbClr val="FFFFFF"/>
+          </a:solidFill>
+          <a:ln w="12700">
+            <a:solidFill>
+              <a:srgbClr val="E4E3DE"/>
+            </a:solidFill>
+          </a:ln>
+          <a:effectLst/>
+        </p:spPr>
+        <p:style>
+          <a:lnRef idx="1">
+            <a:schemeClr val="accent1"/>
+          </a:lnRef>
+          <a:fillRef idx="3">
+            <a:schemeClr val="accent1"/>
+          </a:fillRef>
+          <a:effectRef idx="2">
+            <a:schemeClr val="accent1"/>
+          </a:effectRef>
+          <a:fontRef idx="minor">
+            <a:schemeClr val="lt1"/>
+          </a:fontRef>
+        </p:style>
+        <p:txBody>
+          <a:bodyPr rtlCol="0" anchor="ctr"/>
+          <a:lstStyle/>
+          <a:p/>
+        </p:txBody>
+      </p:sp>
+      <p:sp>
+        <p:nvSpPr>
+          <p:cNvPr id="14" name="TarjetaTxt 1"/>
+          <p:cNvSpPr txBox="1"/>
+          <p:nvPr/>
+        </p:nvSpPr>
+        <p:spPr>
+          <a:xfrm>
+            <a:off x="3403854" y="2724912"/>
+            <a:ext cx="2526030" cy="788670"/>
+          </a:xfrm>
+          <a:prstGeom prst="rect">
+            <a:avLst/>
+          </a:prstGeom>
+          <a:noFill/>
+        </p:spPr>
+        <p:txBody>
+          <a:bodyPr wrap="square" anchor="t" lIns="45720" rIns="45720" tIns="27432" bIns="27432">
+            <a:normAutofit/>
+          </a:bodyPr>
+          <a:lstStyle/>
+          <a:p>
+            <a:pPr algn="l"/>
+            <a:r>
+              <a:rPr sz="1100" b="1">
+                <a:solidFill>
+                  <a:srgbClr val="5B3E83"/>
+                </a:solidFill>
+                <a:latin typeface="Bricolage Grotesque"/>
+              </a:rPr>
+              <a:t>Síntomas</a:t>
+            </a:r>
+          </a:p>
+          <a:p>
+            <a:pPr algn="l"/>
+            <a:r>
+              <a:rPr sz="1000">
+                <a:solidFill>
+                  <a:srgbClr val="20242E"/>
+                </a:solidFill>
+                <a:latin typeface="Inter"/>
+              </a:rPr>
+              <a:t>me canso al subir dos escalones · creo que soy alérgico a los lunes</a:t>
+            </a:r>
+          </a:p>
+        </p:txBody>
+      </p:sp>
+      <p:sp>
+        <p:nvSpPr>
+          <p:cNvPr id="15" name="Tarjeta 2"/>
+          <p:cNvSpPr/>
+          <p:nvPr/>
+        </p:nvSpPr>
+        <p:spPr>
+          <a:xfrm>
+            <a:off x="6167628" y="2670048"/>
+            <a:ext cx="2708910" cy="898398"/>
+          </a:xfrm>
+          <a:prstGeom prst="roundRect">
+            <a:avLst>
+              <a:gd name="adj" fmla="val 6000"/>
+            </a:avLst>
+          </a:prstGeom>
+          <a:solidFill>
+            <a:srgbClr val="FFFFFF"/>
+          </a:solidFill>
+          <a:ln w="12700">
+            <a:solidFill>
+              <a:srgbClr val="E4E3DE"/>
+            </a:solidFill>
+          </a:ln>
+          <a:effectLst/>
+        </p:spPr>
+        <p:style>
+          <a:lnRef idx="1">
+            <a:schemeClr val="accent1"/>
+          </a:lnRef>
+          <a:fillRef idx="3">
+            <a:schemeClr val="accent1"/>
+          </a:fillRef>
+          <a:effectRef idx="2">
+            <a:schemeClr val="accent1"/>
+          </a:effectRef>
+          <a:fontRef idx="minor">
+            <a:schemeClr val="lt1"/>
+          </a:fontRef>
+        </p:style>
+        <p:txBody>
+          <a:bodyPr rtlCol="0" anchor="ctr"/>
+          <a:lstStyle/>
+          <a:p/>
+        </p:txBody>
+      </p:sp>
+      <p:sp>
+        <p:nvSpPr>
+          <p:cNvPr id="16" name="TarjetaTxt 2"/>
+          <p:cNvSpPr txBox="1"/>
+          <p:nvPr/>
+        </p:nvSpPr>
+        <p:spPr>
+          <a:xfrm>
+            <a:off x="6259068" y="2724912"/>
+            <a:ext cx="2526030" cy="788670"/>
+          </a:xfrm>
+          <a:prstGeom prst="rect">
+            <a:avLst/>
+          </a:prstGeom>
+          <a:noFill/>
+        </p:spPr>
+        <p:txBody>
+          <a:bodyPr wrap="square" anchor="t" lIns="45720" rIns="45720" tIns="27432" bIns="27432">
+            <a:normAutofit/>
+          </a:bodyPr>
+          <a:lstStyle/>
+          <a:p>
+            <a:pPr algn="l"/>
+            <a:r>
+              <a:rPr sz="1100" b="1">
+                <a:solidFill>
+                  <a:srgbClr val="5B3E83"/>
+                </a:solidFill>
+                <a:latin typeface="Bricolage Grotesque"/>
+              </a:rPr>
+              <a:t>Síntomas</a:t>
+            </a:r>
+          </a:p>
+          <a:p>
+            <a:pPr algn="l"/>
+            <a:r>
+              <a:rPr sz="1000">
+                <a:solidFill>
+                  <a:srgbClr val="20242E"/>
+                </a:solidFill>
+                <a:latin typeface="Inter"/>
+              </a:rPr>
+              <a:t>me late el corazón cuando corro · tengo la garganta rara desde que hablo español</a:t>
+            </a:r>
+          </a:p>
+        </p:txBody>
+      </p:sp>
+      <p:sp>
+        <p:nvSpPr>
+          <p:cNvPr id="17" name="Tarjeta 3"/>
+          <p:cNvSpPr/>
+          <p:nvPr/>
+        </p:nvSpPr>
+        <p:spPr>
+          <a:xfrm>
+            <a:off x="9022842" y="2670048"/>
+            <a:ext cx="2708910" cy="898398"/>
+          </a:xfrm>
+          <a:prstGeom prst="roundRect">
+            <a:avLst>
+              <a:gd name="adj" fmla="val 6000"/>
+            </a:avLst>
+          </a:prstGeom>
+          <a:solidFill>
+            <a:srgbClr val="FFFFFF"/>
+          </a:solidFill>
+          <a:ln w="12700">
+            <a:solidFill>
+              <a:srgbClr val="E4E3DE"/>
+            </a:solidFill>
+          </a:ln>
+          <a:effectLst/>
+        </p:spPr>
+        <p:style>
+          <a:lnRef idx="1">
+            <a:schemeClr val="accent1"/>
+          </a:lnRef>
+          <a:fillRef idx="3">
+            <a:schemeClr val="accent1"/>
+          </a:fillRef>
+          <a:effectRef idx="2">
+            <a:schemeClr val="accent1"/>
+          </a:effectRef>
+          <a:fontRef idx="minor">
+            <a:schemeClr val="lt1"/>
+          </a:fontRef>
+        </p:style>
+        <p:txBody>
+          <a:bodyPr rtlCol="0" anchor="ctr"/>
+          <a:lstStyle/>
+          <a:p/>
+        </p:txBody>
+      </p:sp>
+      <p:sp>
+        <p:nvSpPr>
+          <p:cNvPr id="18" name="TarjetaTxt 3"/>
+          <p:cNvSpPr txBox="1"/>
+          <p:nvPr/>
+        </p:nvSpPr>
+        <p:spPr>
+          <a:xfrm>
+            <a:off x="9114282" y="2724912"/>
+            <a:ext cx="2526030" cy="587502"/>
+          </a:xfrm>
+          <a:prstGeom prst="rect">
+            <a:avLst/>
+          </a:prstGeom>
+          <a:noFill/>
+        </p:spPr>
+        <p:txBody>
+          <a:bodyPr wrap="square" anchor="t" lIns="45720" rIns="45720" tIns="27432" bIns="27432">
+            <a:normAutofit/>
+          </a:bodyPr>
+          <a:lstStyle/>
+          <a:p>
+            <a:pPr algn="l"/>
+            <a:r>
+              <a:rPr sz="1100" b="1">
+                <a:solidFill>
+                  <a:srgbClr val="5B3E83"/>
+                </a:solidFill>
+                <a:latin typeface="Bricolage Grotesque"/>
+              </a:rPr>
+              <a:t>consejo</a:t>
+            </a:r>
+          </a:p>
+          <a:p>
+            <a:pPr algn="l"/>
+            <a:r>
+              <a:rPr sz="1000">
+                <a:solidFill>
+                  <a:srgbClr val="20242E"/>
+                </a:solidFill>
+                <a:latin typeface="Inter"/>
+              </a:rPr>
+              <a:t>tómatelo con calma</a:t>
+            </a:r>
+          </a:p>
+        </p:txBody>
+      </p:sp>
+      <p:sp>
+        <p:nvSpPr>
+          <p:cNvPr id="19" name="Onthul 3"/>
+          <p:cNvSpPr/>
+          <p:nvPr/>
+        </p:nvSpPr>
+        <p:spPr>
+          <a:xfrm>
+            <a:off x="9114282" y="3275838"/>
+            <a:ext cx="2526030" cy="237744"/>
+          </a:xfrm>
+          <a:prstGeom prst="roundRect">
+            <a:avLst>
+              <a:gd name="adj" fmla="val 20000"/>
+            </a:avLst>
+          </a:prstGeom>
+          <a:solidFill>
+            <a:srgbClr val="EEE8F5"/>
+          </a:solidFill>
+          <a:ln>
+            <a:noFill/>
+          </a:ln>
+          <a:effectLst/>
+        </p:spPr>
+        <p:style>
+          <a:lnRef idx="1">
+            <a:schemeClr val="accent1"/>
+          </a:lnRef>
+          <a:fillRef idx="3">
+            <a:schemeClr val="accent1"/>
+          </a:fillRef>
+          <a:effectRef idx="2">
+            <a:schemeClr val="accent1"/>
+          </a:effectRef>
+          <a:fontRef idx="minor">
+            <a:schemeClr val="lt1"/>
+          </a:fontRef>
+        </p:style>
+        <p:txBody>
+          <a:bodyPr rtlCol="0" anchor="ctr"/>
+          <a:lstStyle/>
+          <a:p/>
+        </p:txBody>
+      </p:sp>
+      <p:sp>
+        <p:nvSpPr>
+          <p:cNvPr id="20" name="OnthulTxt 3"/>
+          <p:cNvSpPr txBox="1"/>
+          <p:nvPr/>
+        </p:nvSpPr>
+        <p:spPr>
+          <a:xfrm>
+            <a:off x="9132570" y="3275838"/>
+            <a:ext cx="2489454" cy="237744"/>
+          </a:xfrm>
+          <a:prstGeom prst="rect">
+            <a:avLst/>
+          </a:prstGeom>
+          <a:noFill/>
+        </p:spPr>
+        <p:txBody>
+          <a:bodyPr wrap="square" anchor="ctr" lIns="45720" rIns="45720" tIns="27432" bIns="27432">
+            <a:normAutofit/>
+          </a:bodyPr>
+          <a:lstStyle/>
+          <a:p>
+            <a:pPr algn="l"/>
+            <a:r>
+              <a:rPr sz="850" b="1">
+                <a:solidFill>
+                  <a:srgbClr val="5B3E83"/>
+                </a:solidFill>
+                <a:latin typeface="Inter"/>
+              </a:rPr>
+              <a:t>tranquilizar</a:t>
+            </a:r>
+          </a:p>
+        </p:txBody>
+      </p:sp>
+      <p:sp>
+        <p:nvSpPr>
+          <p:cNvPr id="21" name="Tarjeta 4"/>
+          <p:cNvSpPr/>
+          <p:nvPr/>
+        </p:nvSpPr>
+        <p:spPr>
+          <a:xfrm>
+            <a:off x="457200" y="3696462"/>
+            <a:ext cx="2708910" cy="898398"/>
+          </a:xfrm>
+          <a:prstGeom prst="roundRect">
+            <a:avLst>
+              <a:gd name="adj" fmla="val 6000"/>
+            </a:avLst>
+          </a:prstGeom>
+          <a:solidFill>
+            <a:srgbClr val="FFFFFF"/>
+          </a:solidFill>
+          <a:ln w="12700">
+            <a:solidFill>
+              <a:srgbClr val="E4E3DE"/>
+            </a:solidFill>
+          </a:ln>
+          <a:effectLst/>
+        </p:spPr>
+        <p:style>
+          <a:lnRef idx="1">
+            <a:schemeClr val="accent1"/>
+          </a:lnRef>
+          <a:fillRef idx="3">
+            <a:schemeClr val="accent1"/>
+          </a:fillRef>
+          <a:effectRef idx="2">
+            <a:schemeClr val="accent1"/>
+          </a:effectRef>
+          <a:fontRef idx="minor">
+            <a:schemeClr val="lt1"/>
+          </a:fontRef>
+        </p:style>
+        <p:txBody>
+          <a:bodyPr rtlCol="0" anchor="ctr"/>
+          <a:lstStyle/>
+          <a:p/>
+        </p:txBody>
+      </p:sp>
+      <p:sp>
+        <p:nvSpPr>
+          <p:cNvPr id="22" name="TarjetaTxt 4"/>
+          <p:cNvSpPr txBox="1"/>
+          <p:nvPr/>
+        </p:nvSpPr>
+        <p:spPr>
+          <a:xfrm>
+            <a:off x="548640" y="3751326"/>
+            <a:ext cx="2526030" cy="587502"/>
+          </a:xfrm>
+          <a:prstGeom prst="rect">
+            <a:avLst/>
+          </a:prstGeom>
+          <a:noFill/>
+        </p:spPr>
+        <p:txBody>
+          <a:bodyPr wrap="square" anchor="t" lIns="45720" rIns="45720" tIns="27432" bIns="27432">
+            <a:normAutofit/>
+          </a:bodyPr>
+          <a:lstStyle/>
+          <a:p>
+            <a:pPr algn="l"/>
+            <a:r>
+              <a:rPr sz="1100" b="1">
+                <a:solidFill>
+                  <a:srgbClr val="5B3E83"/>
+                </a:solidFill>
+                <a:latin typeface="Bricolage Grotesque"/>
+              </a:rPr>
+              <a:t>consejo</a:t>
+            </a:r>
+          </a:p>
+          <a:p>
+            <a:pPr algn="l"/>
+            <a:r>
+              <a:rPr sz="1000">
+                <a:solidFill>
+                  <a:srgbClr val="20242E"/>
+                </a:solidFill>
+                <a:latin typeface="Inter"/>
+              </a:rPr>
+              <a:t>descánsalo dos días</a:t>
+            </a:r>
+          </a:p>
+        </p:txBody>
+      </p:sp>
+      <p:sp>
+        <p:nvSpPr>
+          <p:cNvPr id="23" name="Onthul 4"/>
+          <p:cNvSpPr/>
+          <p:nvPr/>
+        </p:nvSpPr>
+        <p:spPr>
+          <a:xfrm>
+            <a:off x="548640" y="4302252"/>
+            <a:ext cx="2526030" cy="237744"/>
+          </a:xfrm>
+          <a:prstGeom prst="roundRect">
+            <a:avLst>
+              <a:gd name="adj" fmla="val 20000"/>
+            </a:avLst>
+          </a:prstGeom>
+          <a:solidFill>
+            <a:srgbClr val="EEE8F5"/>
+          </a:solidFill>
+          <a:ln>
+            <a:noFill/>
+          </a:ln>
+          <a:effectLst/>
+        </p:spPr>
+        <p:style>
+          <a:lnRef idx="1">
+            <a:schemeClr val="accent1"/>
+          </a:lnRef>
+          <a:fillRef idx="3">
+            <a:schemeClr val="accent1"/>
+          </a:fillRef>
+          <a:effectRef idx="2">
+            <a:schemeClr val="accent1"/>
+          </a:effectRef>
+          <a:fontRef idx="minor">
+            <a:schemeClr val="lt1"/>
+          </a:fontRef>
+        </p:style>
+        <p:txBody>
+          <a:bodyPr rtlCol="0" anchor="ctr"/>
+          <a:lstStyle/>
+          <a:p/>
+        </p:txBody>
+      </p:sp>
+      <p:sp>
+        <p:nvSpPr>
+          <p:cNvPr id="24" name="OnthulTxt 4"/>
+          <p:cNvSpPr txBox="1"/>
+          <p:nvPr/>
+        </p:nvSpPr>
+        <p:spPr>
+          <a:xfrm>
+            <a:off x="566928" y="4302252"/>
+            <a:ext cx="2489454" cy="237744"/>
+          </a:xfrm>
+          <a:prstGeom prst="rect">
+            <a:avLst/>
+          </a:prstGeom>
+          <a:noFill/>
+        </p:spPr>
+        <p:txBody>
+          <a:bodyPr wrap="square" anchor="ctr" lIns="45720" rIns="45720" tIns="27432" bIns="27432">
+            <a:normAutofit/>
+          </a:bodyPr>
+          <a:lstStyle/>
+          <a:p>
+            <a:pPr algn="l"/>
+            <a:r>
+              <a:rPr sz="850" b="1">
+                <a:solidFill>
+                  <a:srgbClr val="5B3E83"/>
+                </a:solidFill>
+                <a:latin typeface="Inter"/>
+              </a:rPr>
+              <a:t>un consejo concreto</a:t>
+            </a:r>
+          </a:p>
+        </p:txBody>
+      </p:sp>
+      <p:sp>
+        <p:nvSpPr>
+          <p:cNvPr id="25" name="Tarjeta 5"/>
+          <p:cNvSpPr/>
+          <p:nvPr/>
+        </p:nvSpPr>
+        <p:spPr>
+          <a:xfrm>
+            <a:off x="3312414" y="3696462"/>
+            <a:ext cx="2708910" cy="898398"/>
+          </a:xfrm>
+          <a:prstGeom prst="roundRect">
+            <a:avLst>
+              <a:gd name="adj" fmla="val 6000"/>
+            </a:avLst>
+          </a:prstGeom>
+          <a:solidFill>
+            <a:srgbClr val="FFFFFF"/>
+          </a:solidFill>
+          <a:ln w="12700">
+            <a:solidFill>
+              <a:srgbClr val="E4E3DE"/>
+            </a:solidFill>
+          </a:ln>
+          <a:effectLst/>
+        </p:spPr>
+        <p:style>
+          <a:lnRef idx="1">
+            <a:schemeClr val="accent1"/>
+          </a:lnRef>
+          <a:fillRef idx="3">
+            <a:schemeClr val="accent1"/>
+          </a:fillRef>
+          <a:effectRef idx="2">
+            <a:schemeClr val="accent1"/>
+          </a:effectRef>
+          <a:fontRef idx="minor">
+            <a:schemeClr val="lt1"/>
+          </a:fontRef>
+        </p:style>
+        <p:txBody>
+          <a:bodyPr rtlCol="0" anchor="ctr"/>
+          <a:lstStyle/>
+          <a:p/>
+        </p:txBody>
+      </p:sp>
+      <p:sp>
+        <p:nvSpPr>
+          <p:cNvPr id="26" name="TarjetaTxt 5"/>
+          <p:cNvSpPr txBox="1"/>
+          <p:nvPr/>
+        </p:nvSpPr>
+        <p:spPr>
+          <a:xfrm>
+            <a:off x="3403854" y="3751326"/>
+            <a:ext cx="2526030" cy="587502"/>
+          </a:xfrm>
+          <a:prstGeom prst="rect">
+            <a:avLst/>
+          </a:prstGeom>
+          <a:noFill/>
+        </p:spPr>
+        <p:txBody>
+          <a:bodyPr wrap="square" anchor="t" lIns="45720" rIns="45720" tIns="27432" bIns="27432">
+            <a:normAutofit/>
+          </a:bodyPr>
+          <a:lstStyle/>
+          <a:p>
+            <a:pPr algn="l"/>
+            <a:r>
+              <a:rPr sz="1100" b="1">
+                <a:solidFill>
+                  <a:srgbClr val="5B3E83"/>
+                </a:solidFill>
+                <a:latin typeface="Bricolage Grotesque"/>
+              </a:rPr>
+              <a:t>consejo</a:t>
+            </a:r>
+          </a:p>
+          <a:p>
+            <a:pPr algn="l"/>
+            <a:r>
+              <a:rPr sz="1000">
+                <a:solidFill>
+                  <a:srgbClr val="20242E"/>
+                </a:solidFill>
+                <a:latin typeface="Inter"/>
+              </a:rPr>
+              <a:t>bébetelo despacio</a:t>
+            </a:r>
+          </a:p>
+        </p:txBody>
+      </p:sp>
+      <p:sp>
+        <p:nvSpPr>
+          <p:cNvPr id="27" name="Onthul 5"/>
+          <p:cNvSpPr/>
+          <p:nvPr/>
+        </p:nvSpPr>
+        <p:spPr>
+          <a:xfrm>
+            <a:off x="3403854" y="4302252"/>
+            <a:ext cx="2526030" cy="237744"/>
+          </a:xfrm>
+          <a:prstGeom prst="roundRect">
+            <a:avLst>
+              <a:gd name="adj" fmla="val 20000"/>
+            </a:avLst>
+          </a:prstGeom>
+          <a:solidFill>
+            <a:srgbClr val="EEE8F5"/>
+          </a:solidFill>
+          <a:ln>
+            <a:noFill/>
+          </a:ln>
+          <a:effectLst/>
+        </p:spPr>
+        <p:style>
+          <a:lnRef idx="1">
+            <a:schemeClr val="accent1"/>
+          </a:lnRef>
+          <a:fillRef idx="3">
+            <a:schemeClr val="accent1"/>
+          </a:fillRef>
+          <a:effectRef idx="2">
+            <a:schemeClr val="accent1"/>
+          </a:effectRef>
+          <a:fontRef idx="minor">
+            <a:schemeClr val="lt1"/>
+          </a:fontRef>
+        </p:style>
+        <p:txBody>
+          <a:bodyPr rtlCol="0" anchor="ctr"/>
+          <a:lstStyle/>
+          <a:p/>
+        </p:txBody>
+      </p:sp>
+      <p:sp>
+        <p:nvSpPr>
+          <p:cNvPr id="28" name="OnthulTxt 5"/>
+          <p:cNvSpPr txBox="1"/>
+          <p:nvPr/>
+        </p:nvSpPr>
+        <p:spPr>
+          <a:xfrm>
+            <a:off x="3422142" y="4302252"/>
+            <a:ext cx="2489454" cy="237744"/>
+          </a:xfrm>
+          <a:prstGeom prst="rect">
+            <a:avLst/>
+          </a:prstGeom>
+          <a:noFill/>
+        </p:spPr>
+        <p:txBody>
+          <a:bodyPr wrap="square" anchor="ctr" lIns="45720" rIns="45720" tIns="27432" bIns="27432">
+            <a:normAutofit/>
+          </a:bodyPr>
+          <a:lstStyle/>
+          <a:p>
+            <a:pPr algn="l"/>
+            <a:r>
+              <a:rPr sz="850" b="1">
+                <a:solidFill>
+                  <a:srgbClr val="5B3E83"/>
+                </a:solidFill>
+                <a:latin typeface="Inter"/>
+              </a:rPr>
+              <a:t>cómo, no solo qué</a:t>
+            </a:r>
+          </a:p>
+        </p:txBody>
+      </p:sp>
+      <p:sp>
+        <p:nvSpPr>
+          <p:cNvPr id="29" name="Tarjeta 6"/>
+          <p:cNvSpPr/>
+          <p:nvPr/>
+        </p:nvSpPr>
+        <p:spPr>
+          <a:xfrm>
+            <a:off x="6167628" y="3696462"/>
+            <a:ext cx="2708910" cy="898398"/>
+          </a:xfrm>
+          <a:prstGeom prst="roundRect">
+            <a:avLst>
+              <a:gd name="adj" fmla="val 6000"/>
+            </a:avLst>
+          </a:prstGeom>
+          <a:solidFill>
+            <a:srgbClr val="FFFFFF"/>
+          </a:solidFill>
+          <a:ln w="12700">
+            <a:solidFill>
+              <a:srgbClr val="E4E3DE"/>
+            </a:solidFill>
+          </a:ln>
+          <a:effectLst/>
+        </p:spPr>
+        <p:style>
+          <a:lnRef idx="1">
+            <a:schemeClr val="accent1"/>
+          </a:lnRef>
+          <a:fillRef idx="3">
+            <a:schemeClr val="accent1"/>
+          </a:fillRef>
+          <a:effectRef idx="2">
+            <a:schemeClr val="accent1"/>
+          </a:effectRef>
+          <a:fontRef idx="minor">
+            <a:schemeClr val="lt1"/>
+          </a:fontRef>
+        </p:style>
+        <p:txBody>
+          <a:bodyPr rtlCol="0" anchor="ctr"/>
+          <a:lstStyle/>
+          <a:p/>
+        </p:txBody>
+      </p:sp>
+      <p:sp>
+        <p:nvSpPr>
+          <p:cNvPr id="30" name="TarjetaTxt 6"/>
+          <p:cNvSpPr txBox="1"/>
+          <p:nvPr/>
+        </p:nvSpPr>
+        <p:spPr>
+          <a:xfrm>
+            <a:off x="6259068" y="3751326"/>
+            <a:ext cx="2526030" cy="587502"/>
+          </a:xfrm>
+          <a:prstGeom prst="rect">
+            <a:avLst/>
+          </a:prstGeom>
+          <a:noFill/>
+        </p:spPr>
+        <p:txBody>
+          <a:bodyPr wrap="square" anchor="t" lIns="45720" rIns="45720" tIns="27432" bIns="27432">
+            <a:normAutofit/>
+          </a:bodyPr>
+          <a:lstStyle/>
+          <a:p>
+            <a:pPr algn="l"/>
+            <a:r>
+              <a:rPr sz="1100" b="1">
+                <a:solidFill>
+                  <a:srgbClr val="5B3E83"/>
+                </a:solidFill>
+                <a:latin typeface="Bricolage Grotesque"/>
+              </a:rPr>
+              <a:t>consejo</a:t>
+            </a:r>
+          </a:p>
+          <a:p>
+            <a:pPr algn="l"/>
+            <a:r>
+              <a:rPr sz="1000">
+                <a:solidFill>
+                  <a:srgbClr val="20242E"/>
+                </a:solidFill>
+                <a:latin typeface="Inter"/>
+              </a:rPr>
+              <a:t>cuídate esta semana</a:t>
+            </a:r>
+          </a:p>
+        </p:txBody>
+      </p:sp>
+      <p:sp>
+        <p:nvSpPr>
+          <p:cNvPr id="31" name="Onthul 6"/>
+          <p:cNvSpPr/>
+          <p:nvPr/>
+        </p:nvSpPr>
+        <p:spPr>
+          <a:xfrm>
+            <a:off x="6259068" y="4302252"/>
+            <a:ext cx="2526030" cy="237744"/>
+          </a:xfrm>
+          <a:prstGeom prst="roundRect">
+            <a:avLst>
+              <a:gd name="adj" fmla="val 20000"/>
+            </a:avLst>
+          </a:prstGeom>
+          <a:solidFill>
+            <a:srgbClr val="EEE8F5"/>
+          </a:solidFill>
+          <a:ln>
+            <a:noFill/>
+          </a:ln>
+          <a:effectLst/>
+        </p:spPr>
+        <p:style>
+          <a:lnRef idx="1">
+            <a:schemeClr val="accent1"/>
+          </a:lnRef>
+          <a:fillRef idx="3">
+            <a:schemeClr val="accent1"/>
+          </a:fillRef>
+          <a:effectRef idx="2">
+            <a:schemeClr val="accent1"/>
+          </a:effectRef>
+          <a:fontRef idx="minor">
+            <a:schemeClr val="lt1"/>
+          </a:fontRef>
+        </p:style>
+        <p:txBody>
+          <a:bodyPr rtlCol="0" anchor="ctr"/>
+          <a:lstStyle/>
+          <a:p/>
+        </p:txBody>
+      </p:sp>
+      <p:sp>
+        <p:nvSpPr>
+          <p:cNvPr id="32" name="OnthulTxt 6"/>
+          <p:cNvSpPr txBox="1"/>
+          <p:nvPr/>
+        </p:nvSpPr>
+        <p:spPr>
+          <a:xfrm>
+            <a:off x="6277356" y="4302252"/>
+            <a:ext cx="2489454" cy="237744"/>
+          </a:xfrm>
+          <a:prstGeom prst="rect">
+            <a:avLst/>
+          </a:prstGeom>
+          <a:noFill/>
+        </p:spPr>
+        <p:txBody>
+          <a:bodyPr wrap="square" anchor="ctr" lIns="45720" rIns="45720" tIns="27432" bIns="27432">
+            <a:normAutofit/>
+          </a:bodyPr>
+          <a:lstStyle/>
+          <a:p>
+            <a:pPr algn="l"/>
+            <a:r>
+              <a:rPr sz="850" b="1">
+                <a:solidFill>
+                  <a:srgbClr val="5B3E83"/>
+                </a:solidFill>
+                <a:latin typeface="Inter"/>
+              </a:rPr>
+              <a:t>cierre</a:t>
+            </a:r>
+          </a:p>
+        </p:txBody>
+      </p:sp>
+      <p:sp>
+        <p:nvSpPr>
+          <p:cNvPr id="33" name="Tarjeta 7"/>
+          <p:cNvSpPr/>
+          <p:nvPr/>
+        </p:nvSpPr>
+        <p:spPr>
+          <a:xfrm>
+            <a:off x="9022842" y="3696462"/>
+            <a:ext cx="2708910" cy="898398"/>
+          </a:xfrm>
+          <a:prstGeom prst="roundRect">
+            <a:avLst>
+              <a:gd name="adj" fmla="val 6000"/>
+            </a:avLst>
+          </a:prstGeom>
+          <a:solidFill>
+            <a:srgbClr val="FFFFFF"/>
+          </a:solidFill>
+          <a:ln w="12700">
+            <a:solidFill>
+              <a:srgbClr val="E4E3DE"/>
+            </a:solidFill>
+          </a:ln>
+          <a:effectLst/>
+        </p:spPr>
+        <p:style>
+          <a:lnRef idx="1">
+            <a:schemeClr val="accent1"/>
+          </a:lnRef>
+          <a:fillRef idx="3">
+            <a:schemeClr val="accent1"/>
+          </a:fillRef>
+          <a:effectRef idx="2">
+            <a:schemeClr val="accent1"/>
+          </a:effectRef>
+          <a:fontRef idx="minor">
+            <a:schemeClr val="lt1"/>
+          </a:fontRef>
+        </p:style>
+        <p:txBody>
+          <a:bodyPr rtlCol="0" anchor="ctr"/>
+          <a:lstStyle/>
+          <a:p/>
+        </p:txBody>
+      </p:sp>
+      <p:sp>
+        <p:nvSpPr>
+          <p:cNvPr id="34" name="TarjetaTxt 7"/>
+          <p:cNvSpPr txBox="1"/>
+          <p:nvPr/>
+        </p:nvSpPr>
+        <p:spPr>
+          <a:xfrm>
+            <a:off x="9114282" y="3751326"/>
+            <a:ext cx="2526030" cy="587502"/>
+          </a:xfrm>
+          <a:prstGeom prst="rect">
+            <a:avLst/>
+          </a:prstGeom>
+          <a:noFill/>
+        </p:spPr>
+        <p:txBody>
+          <a:bodyPr wrap="square" anchor="t" lIns="45720" rIns="45720" tIns="27432" bIns="27432">
+            <a:normAutofit/>
+          </a:bodyPr>
+          <a:lstStyle/>
+          <a:p>
+            <a:pPr algn="l"/>
+            <a:r>
+              <a:rPr sz="1100" b="1">
+                <a:solidFill>
+                  <a:srgbClr val="5B3E83"/>
+                </a:solidFill>
+                <a:latin typeface="Bricolage Grotesque"/>
+              </a:rPr>
+              <a:t>consejo</a:t>
+            </a:r>
+          </a:p>
+          <a:p>
+            <a:pPr algn="l"/>
+            <a:r>
+              <a:rPr sz="1000">
+                <a:solidFill>
+                  <a:srgbClr val="20242E"/>
+                </a:solidFill>
+                <a:latin typeface="Inter"/>
+              </a:rPr>
+              <a:t>míralo mañana otra vez</a:t>
+            </a:r>
+          </a:p>
+        </p:txBody>
+      </p:sp>
+      <p:sp>
+        <p:nvSpPr>
+          <p:cNvPr id="35" name="Onthul 7"/>
+          <p:cNvSpPr/>
+          <p:nvPr/>
+        </p:nvSpPr>
+        <p:spPr>
+          <a:xfrm>
+            <a:off x="9114282" y="4302252"/>
+            <a:ext cx="2526030" cy="237744"/>
+          </a:xfrm>
+          <a:prstGeom prst="roundRect">
+            <a:avLst>
+              <a:gd name="adj" fmla="val 20000"/>
+            </a:avLst>
+          </a:prstGeom>
+          <a:solidFill>
+            <a:srgbClr val="EEE8F5"/>
+          </a:solidFill>
+          <a:ln>
+            <a:noFill/>
+          </a:ln>
+          <a:effectLst/>
+        </p:spPr>
+        <p:style>
+          <a:lnRef idx="1">
+            <a:schemeClr val="accent1"/>
+          </a:lnRef>
+          <a:fillRef idx="3">
+            <a:schemeClr val="accent1"/>
+          </a:fillRef>
+          <a:effectRef idx="2">
+            <a:schemeClr val="accent1"/>
+          </a:effectRef>
+          <a:fontRef idx="minor">
+            <a:schemeClr val="lt1"/>
+          </a:fontRef>
+        </p:style>
+        <p:txBody>
+          <a:bodyPr rtlCol="0" anchor="ctr"/>
+          <a:lstStyle/>
+          <a:p/>
+        </p:txBody>
+      </p:sp>
+      <p:sp>
+        <p:nvSpPr>
+          <p:cNvPr id="36" name="OnthulTxt 7"/>
+          <p:cNvSpPr txBox="1"/>
+          <p:nvPr/>
+        </p:nvSpPr>
+        <p:spPr>
+          <a:xfrm>
+            <a:off x="9132570" y="4302252"/>
+            <a:ext cx="2489454" cy="237744"/>
+          </a:xfrm>
+          <a:prstGeom prst="rect">
+            <a:avLst/>
+          </a:prstGeom>
+          <a:noFill/>
+        </p:spPr>
+        <p:txBody>
+          <a:bodyPr wrap="square" anchor="ctr" lIns="45720" rIns="45720" tIns="27432" bIns="27432">
+            <a:normAutofit/>
+          </a:bodyPr>
+          <a:lstStyle/>
+          <a:p>
+            <a:pPr algn="l"/>
+            <a:r>
+              <a:rPr sz="850" b="1">
+                <a:solidFill>
+                  <a:srgbClr val="5B3E83"/>
+                </a:solidFill>
+                <a:latin typeface="Inter"/>
+              </a:rPr>
+              <a:t>seguimiento</a:t>
+            </a:r>
+          </a:p>
+        </p:txBody>
+      </p:sp>
+      <p:sp>
+        <p:nvSpPr>
+          <p:cNvPr id="37" name="Tarjeta 8"/>
+          <p:cNvSpPr/>
+          <p:nvPr/>
+        </p:nvSpPr>
+        <p:spPr>
+          <a:xfrm>
+            <a:off x="457200" y="4722876"/>
+            <a:ext cx="2708910" cy="898398"/>
+          </a:xfrm>
+          <a:prstGeom prst="roundRect">
+            <a:avLst>
+              <a:gd name="adj" fmla="val 6000"/>
+            </a:avLst>
+          </a:prstGeom>
+          <a:solidFill>
+            <a:srgbClr val="FFFFFF"/>
+          </a:solidFill>
+          <a:ln w="12700">
+            <a:solidFill>
+              <a:srgbClr val="E4E3DE"/>
+            </a:solidFill>
+          </a:ln>
+          <a:effectLst/>
+        </p:spPr>
+        <p:style>
+          <a:lnRef idx="1">
+            <a:schemeClr val="accent1"/>
+          </a:lnRef>
+          <a:fillRef idx="3">
+            <a:schemeClr val="accent1"/>
+          </a:fillRef>
+          <a:effectRef idx="2">
+            <a:schemeClr val="accent1"/>
+          </a:effectRef>
+          <a:fontRef idx="minor">
+            <a:schemeClr val="lt1"/>
+          </a:fontRef>
+        </p:style>
+        <p:txBody>
+          <a:bodyPr rtlCol="0" anchor="ctr"/>
+          <a:lstStyle/>
+          <a:p/>
+        </p:txBody>
+      </p:sp>
+      <p:sp>
+        <p:nvSpPr>
+          <p:cNvPr id="38" name="TarjetaTxt 8"/>
+          <p:cNvSpPr txBox="1"/>
+          <p:nvPr/>
+        </p:nvSpPr>
+        <p:spPr>
+          <a:xfrm>
+            <a:off x="548640" y="4777740"/>
+            <a:ext cx="2526030" cy="587502"/>
+          </a:xfrm>
+          <a:prstGeom prst="rect">
+            <a:avLst/>
+          </a:prstGeom>
+          <a:noFill/>
+        </p:spPr>
+        <p:txBody>
+          <a:bodyPr wrap="square" anchor="t" lIns="45720" rIns="45720" tIns="27432" bIns="27432">
+            <a:normAutofit/>
+          </a:bodyPr>
+          <a:lstStyle/>
+          <a:p>
+            <a:pPr algn="l"/>
+            <a:r>
+              <a:rPr sz="1100" b="1">
+                <a:solidFill>
+                  <a:srgbClr val="5B3E83"/>
+                </a:solidFill>
+                <a:latin typeface="Bricolage Grotesque"/>
+              </a:rPr>
+              <a:t>consejo</a:t>
+            </a:r>
+          </a:p>
+          <a:p>
+            <a:pPr algn="l"/>
+            <a:r>
+              <a:rPr sz="1000">
+                <a:solidFill>
+                  <a:srgbClr val="20242E"/>
+                </a:solidFill>
+                <a:latin typeface="Inter"/>
+              </a:rPr>
+              <a:t>no te preocupes, pero avísame si …</a:t>
+            </a:r>
+          </a:p>
+        </p:txBody>
+      </p:sp>
+      <p:sp>
+        <p:nvSpPr>
+          <p:cNvPr id="39" name="Onthul 8"/>
+          <p:cNvSpPr/>
+          <p:nvPr/>
+        </p:nvSpPr>
+        <p:spPr>
+          <a:xfrm>
+            <a:off x="548640" y="5328666"/>
+            <a:ext cx="2526030" cy="237744"/>
+          </a:xfrm>
+          <a:prstGeom prst="roundRect">
+            <a:avLst>
+              <a:gd name="adj" fmla="val 20000"/>
+            </a:avLst>
+          </a:prstGeom>
+          <a:solidFill>
+            <a:srgbClr val="EEE8F5"/>
+          </a:solidFill>
+          <a:ln>
+            <a:noFill/>
+          </a:ln>
+          <a:effectLst/>
+        </p:spPr>
+        <p:style>
+          <a:lnRef idx="1">
+            <a:schemeClr val="accent1"/>
+          </a:lnRef>
+          <a:fillRef idx="3">
+            <a:schemeClr val="accent1"/>
+          </a:fillRef>
+          <a:effectRef idx="2">
+            <a:schemeClr val="accent1"/>
+          </a:effectRef>
+          <a:fontRef idx="minor">
+            <a:schemeClr val="lt1"/>
+          </a:fontRef>
+        </p:style>
+        <p:txBody>
+          <a:bodyPr rtlCol="0" anchor="ctr"/>
+          <a:lstStyle/>
+          <a:p/>
+        </p:txBody>
+      </p:sp>
+      <p:sp>
+        <p:nvSpPr>
+          <p:cNvPr id="40" name="OnthulTxt 8"/>
+          <p:cNvSpPr txBox="1"/>
+          <p:nvPr/>
+        </p:nvSpPr>
+        <p:spPr>
+          <a:xfrm>
+            <a:off x="566928" y="5328666"/>
+            <a:ext cx="2489454" cy="237744"/>
+          </a:xfrm>
+          <a:prstGeom prst="rect">
+            <a:avLst/>
+          </a:prstGeom>
+          <a:noFill/>
+        </p:spPr>
+        <p:txBody>
+          <a:bodyPr wrap="square" anchor="ctr" lIns="45720" rIns="45720" tIns="27432" bIns="27432">
+            <a:normAutofit/>
+          </a:bodyPr>
+          <a:lstStyle/>
+          <a:p>
+            <a:pPr algn="l"/>
+            <a:r>
+              <a:rPr sz="850" b="1">
+                <a:solidFill>
+                  <a:srgbClr val="5B3E83"/>
+                </a:solidFill>
+                <a:latin typeface="Inter"/>
+              </a:rPr>
+              <a:t>condición de alarma</a:t>
+            </a:r>
+          </a:p>
+        </p:txBody>
+      </p:sp>
+      <p:sp>
+        <p:nvSpPr>
+          <p:cNvPr id="41" name="Tarjeta 9"/>
+          <p:cNvSpPr/>
+          <p:nvPr/>
+        </p:nvSpPr>
+        <p:spPr>
+          <a:xfrm>
+            <a:off x="3312414" y="4722876"/>
+            <a:ext cx="2708910" cy="898398"/>
+          </a:xfrm>
+          <a:prstGeom prst="roundRect">
+            <a:avLst>
+              <a:gd name="adj" fmla="val 6000"/>
+            </a:avLst>
+          </a:prstGeom>
+          <a:solidFill>
+            <a:srgbClr val="FFFFFF"/>
+          </a:solidFill>
+          <a:ln w="12700">
+            <a:solidFill>
+              <a:srgbClr val="E4E3DE"/>
+            </a:solidFill>
+          </a:ln>
+          <a:effectLst/>
+        </p:spPr>
+        <p:style>
+          <a:lnRef idx="1">
+            <a:schemeClr val="accent1"/>
+          </a:lnRef>
+          <a:fillRef idx="3">
+            <a:schemeClr val="accent1"/>
+          </a:fillRef>
+          <a:effectRef idx="2">
+            <a:schemeClr val="accent1"/>
+          </a:effectRef>
+          <a:fontRef idx="minor">
+            <a:schemeClr val="lt1"/>
+          </a:fontRef>
+        </p:style>
+        <p:txBody>
+          <a:bodyPr rtlCol="0" anchor="ctr"/>
+          <a:lstStyle/>
+          <a:p/>
+        </p:txBody>
+      </p:sp>
+      <p:sp>
+        <p:nvSpPr>
+          <p:cNvPr id="42" name="TarjetaTxt 9"/>
+          <p:cNvSpPr txBox="1"/>
+          <p:nvPr/>
+        </p:nvSpPr>
+        <p:spPr>
+          <a:xfrm>
+            <a:off x="3403854" y="4777740"/>
+            <a:ext cx="2526030" cy="788670"/>
+          </a:xfrm>
+          <a:prstGeom prst="rect">
+            <a:avLst/>
+          </a:prstGeom>
+          <a:noFill/>
+        </p:spPr>
+        <p:txBody>
+          <a:bodyPr wrap="square" anchor="t" lIns="45720" rIns="45720" tIns="27432" bIns="27432">
+            <a:normAutofit/>
+          </a:bodyPr>
+          <a:lstStyle/>
+          <a:p>
+            <a:pPr algn="l"/>
+            <a:r>
+              <a:rPr sz="1100" b="1">
+                <a:solidFill>
+                  <a:srgbClr val="5B3E83"/>
+                </a:solidFill>
+                <a:latin typeface="Bricolage Grotesque"/>
+              </a:rPr>
+              <a:t>marco · médico/-a</a:t>
+            </a:r>
+          </a:p>
+          <a:p>
+            <a:pPr algn="l"/>
+            <a:r>
+              <a:rPr sz="1000">
+                <a:solidFill>
+                  <a:srgbClr val="20242E"/>
+                </a:solidFill>
+                <a:latin typeface="Inter"/>
+              </a:rPr>
+              <a:t>A ver, cuénteme…</a:t>
+            </a:r>
+          </a:p>
+        </p:txBody>
+      </p:sp>
+      <p:sp>
+        <p:nvSpPr>
+          <p:cNvPr id="43" name="Tarjeta 10"/>
+          <p:cNvSpPr/>
+          <p:nvPr/>
+        </p:nvSpPr>
+        <p:spPr>
+          <a:xfrm>
+            <a:off x="6167628" y="4722876"/>
+            <a:ext cx="2708910" cy="898398"/>
+          </a:xfrm>
+          <a:prstGeom prst="roundRect">
+            <a:avLst>
+              <a:gd name="adj" fmla="val 6000"/>
+            </a:avLst>
+          </a:prstGeom>
+          <a:solidFill>
+            <a:srgbClr val="FFFFFF"/>
+          </a:solidFill>
+          <a:ln w="12700">
+            <a:solidFill>
+              <a:srgbClr val="E4E3DE"/>
+            </a:solidFill>
+          </a:ln>
+          <a:effectLst/>
+        </p:spPr>
+        <p:style>
+          <a:lnRef idx="1">
+            <a:schemeClr val="accent1"/>
+          </a:lnRef>
+          <a:fillRef idx="3">
+            <a:schemeClr val="accent1"/>
+          </a:fillRef>
+          <a:effectRef idx="2">
+            <a:schemeClr val="accent1"/>
+          </a:effectRef>
+          <a:fontRef idx="minor">
+            <a:schemeClr val="lt1"/>
+          </a:fontRef>
+        </p:style>
+        <p:txBody>
+          <a:bodyPr rtlCol="0" anchor="ctr"/>
+          <a:lstStyle/>
+          <a:p/>
+        </p:txBody>
+      </p:sp>
+      <p:sp>
+        <p:nvSpPr>
+          <p:cNvPr id="44" name="TarjetaTxt 10"/>
+          <p:cNvSpPr txBox="1"/>
+          <p:nvPr/>
+        </p:nvSpPr>
+        <p:spPr>
+          <a:xfrm>
+            <a:off x="6259068" y="4777740"/>
+            <a:ext cx="2526030" cy="788670"/>
+          </a:xfrm>
+          <a:prstGeom prst="rect">
+            <a:avLst/>
+          </a:prstGeom>
+          <a:noFill/>
+        </p:spPr>
+        <p:txBody>
+          <a:bodyPr wrap="square" anchor="t" lIns="45720" rIns="45720" tIns="27432" bIns="27432">
+            <a:normAutofit/>
+          </a:bodyPr>
+          <a:lstStyle/>
+          <a:p>
+            <a:pPr algn="l"/>
+            <a:r>
+              <a:rPr sz="1100" b="1">
+                <a:solidFill>
+                  <a:srgbClr val="5B3E83"/>
+                </a:solidFill>
+                <a:latin typeface="Bricolage Grotesque"/>
+              </a:rPr>
+              <a:t>marco · médico/-a</a:t>
+            </a:r>
+          </a:p>
+          <a:p>
+            <a:pPr algn="l"/>
+            <a:r>
+              <a:rPr sz="1000">
+                <a:solidFill>
+                  <a:srgbClr val="20242E"/>
+                </a:solidFill>
+                <a:latin typeface="Inter"/>
+              </a:rPr>
+              <a:t>¿Desde cuándo le pasa?</a:t>
+            </a:r>
+          </a:p>
+        </p:txBody>
+      </p:sp>
+      <p:sp>
+        <p:nvSpPr>
+          <p:cNvPr id="45" name="Tarjeta 11"/>
+          <p:cNvSpPr/>
+          <p:nvPr/>
+        </p:nvSpPr>
+        <p:spPr>
+          <a:xfrm>
+            <a:off x="9022842" y="4722876"/>
+            <a:ext cx="2708910" cy="898398"/>
+          </a:xfrm>
+          <a:prstGeom prst="roundRect">
+            <a:avLst>
+              <a:gd name="adj" fmla="val 6000"/>
+            </a:avLst>
+          </a:prstGeom>
+          <a:solidFill>
+            <a:srgbClr val="FFFFFF"/>
+          </a:solidFill>
+          <a:ln w="12700">
+            <a:solidFill>
+              <a:srgbClr val="E4E3DE"/>
+            </a:solidFill>
+          </a:ln>
+          <a:effectLst/>
+        </p:spPr>
+        <p:style>
+          <a:lnRef idx="1">
+            <a:schemeClr val="accent1"/>
+          </a:lnRef>
+          <a:fillRef idx="3">
+            <a:schemeClr val="accent1"/>
+          </a:fillRef>
+          <a:effectRef idx="2">
+            <a:schemeClr val="accent1"/>
+          </a:effectRef>
+          <a:fontRef idx="minor">
+            <a:schemeClr val="lt1"/>
+          </a:fontRef>
+        </p:style>
+        <p:txBody>
+          <a:bodyPr rtlCol="0" anchor="ctr"/>
+          <a:lstStyle/>
+          <a:p/>
+        </p:txBody>
+      </p:sp>
+      <p:sp>
+        <p:nvSpPr>
+          <p:cNvPr id="46" name="TarjetaTxt 11"/>
+          <p:cNvSpPr txBox="1"/>
+          <p:nvPr/>
+        </p:nvSpPr>
+        <p:spPr>
+          <a:xfrm>
+            <a:off x="9114282" y="4777740"/>
+            <a:ext cx="2526030" cy="788670"/>
+          </a:xfrm>
+          <a:prstGeom prst="rect">
+            <a:avLst/>
+          </a:prstGeom>
+          <a:noFill/>
+        </p:spPr>
+        <p:txBody>
+          <a:bodyPr wrap="square" anchor="t" lIns="45720" rIns="45720" tIns="27432" bIns="27432">
+            <a:normAutofit/>
+          </a:bodyPr>
+          <a:lstStyle/>
+          <a:p>
+            <a:pPr algn="l"/>
+            <a:r>
+              <a:rPr sz="1100" b="1">
+                <a:solidFill>
+                  <a:srgbClr val="5B3E83"/>
+                </a:solidFill>
+                <a:latin typeface="Bricolage Grotesque"/>
+              </a:rPr>
+              <a:t>marco · médico/-a</a:t>
+            </a:r>
+          </a:p>
+          <a:p>
+            <a:pPr algn="l"/>
+            <a:r>
+              <a:rPr sz="1000">
+                <a:solidFill>
+                  <a:srgbClr val="20242E"/>
+                </a:solidFill>
+                <a:latin typeface="Inter"/>
+              </a:rPr>
+              <a:t>No es grave, pero …</a:t>
+            </a:r>
+          </a:p>
+        </p:txBody>
+      </p:sp>
+      <p:sp>
+        <p:nvSpPr>
+          <p:cNvPr id="47" name="Tarjeta 12"/>
+          <p:cNvSpPr/>
+          <p:nvPr/>
+        </p:nvSpPr>
+        <p:spPr>
+          <a:xfrm>
+            <a:off x="457200" y="5749290"/>
+            <a:ext cx="2708910" cy="898398"/>
+          </a:xfrm>
+          <a:prstGeom prst="roundRect">
+            <a:avLst>
+              <a:gd name="adj" fmla="val 6000"/>
+            </a:avLst>
+          </a:prstGeom>
+          <a:solidFill>
+            <a:srgbClr val="FFFFFF"/>
+          </a:solidFill>
+          <a:ln w="12700">
+            <a:solidFill>
+              <a:srgbClr val="E4E3DE"/>
+            </a:solidFill>
+          </a:ln>
+          <a:effectLst/>
+        </p:spPr>
+        <p:style>
+          <a:lnRef idx="1">
+            <a:schemeClr val="accent1"/>
+          </a:lnRef>
+          <a:fillRef idx="3">
+            <a:schemeClr val="accent1"/>
+          </a:fillRef>
+          <a:effectRef idx="2">
+            <a:schemeClr val="accent1"/>
+          </a:effectRef>
+          <a:fontRef idx="minor">
+            <a:schemeClr val="lt1"/>
+          </a:fontRef>
+        </p:style>
+        <p:txBody>
+          <a:bodyPr rtlCol="0" anchor="ctr"/>
+          <a:lstStyle/>
+          <a:p/>
+        </p:txBody>
+      </p:sp>
+      <p:sp>
+        <p:nvSpPr>
+          <p:cNvPr id="48" name="TarjetaTxt 12"/>
+          <p:cNvSpPr txBox="1"/>
+          <p:nvPr/>
+        </p:nvSpPr>
+        <p:spPr>
+          <a:xfrm>
+            <a:off x="548640" y="5804154"/>
+            <a:ext cx="2526030" cy="788670"/>
+          </a:xfrm>
+          <a:prstGeom prst="rect">
+            <a:avLst/>
+          </a:prstGeom>
+          <a:noFill/>
+        </p:spPr>
+        <p:txBody>
+          <a:bodyPr wrap="square" anchor="t" lIns="45720" rIns="45720" tIns="27432" bIns="27432">
+            <a:normAutofit/>
+          </a:bodyPr>
+          <a:lstStyle/>
+          <a:p>
+            <a:pPr algn="l"/>
+            <a:r>
+              <a:rPr sz="1100" b="1">
+                <a:solidFill>
+                  <a:srgbClr val="5B3E83"/>
+                </a:solidFill>
+                <a:latin typeface="Bricolage Grotesque"/>
+              </a:rPr>
+              <a:t>marco · médico/-a</a:t>
+            </a:r>
+          </a:p>
+          <a:p>
+            <a:pPr algn="l"/>
+            <a:r>
+              <a:rPr sz="1000">
+                <a:solidFill>
+                  <a:srgbClr val="20242E"/>
+                </a:solidFill>
+                <a:latin typeface="Inter"/>
+              </a:rPr>
+              <a:t>Le voy a decir tres cosas: … , … y … .</a:t>
+            </a:r>
+          </a:p>
+        </p:txBody>
+      </p:sp>
+      <p:sp>
+        <p:nvSpPr>
+          <p:cNvPr id="49" name="Tarjeta 13"/>
+          <p:cNvSpPr/>
+          <p:nvPr/>
+        </p:nvSpPr>
+        <p:spPr>
+          <a:xfrm>
+            <a:off x="3312414" y="5749290"/>
+            <a:ext cx="2708910" cy="898398"/>
+          </a:xfrm>
+          <a:prstGeom prst="roundRect">
+            <a:avLst>
+              <a:gd name="adj" fmla="val 6000"/>
+            </a:avLst>
+          </a:prstGeom>
+          <a:solidFill>
+            <a:srgbClr val="FFFFFF"/>
+          </a:solidFill>
+          <a:ln w="12700">
+            <a:solidFill>
+              <a:srgbClr val="E4E3DE"/>
+            </a:solidFill>
+          </a:ln>
+          <a:effectLst/>
+        </p:spPr>
+        <p:style>
+          <a:lnRef idx="1">
+            <a:schemeClr val="accent1"/>
+          </a:lnRef>
+          <a:fillRef idx="3">
+            <a:schemeClr val="accent1"/>
+          </a:fillRef>
+          <a:effectRef idx="2">
+            <a:schemeClr val="accent1"/>
+          </a:effectRef>
+          <a:fontRef idx="minor">
+            <a:schemeClr val="lt1"/>
+          </a:fontRef>
+        </p:style>
+        <p:txBody>
+          <a:bodyPr rtlCol="0" anchor="ctr"/>
+          <a:lstStyle/>
+          <a:p/>
+        </p:txBody>
+      </p:sp>
+      <p:sp>
+        <p:nvSpPr>
+          <p:cNvPr id="50" name="TarjetaTxt 13"/>
+          <p:cNvSpPr txBox="1"/>
+          <p:nvPr/>
+        </p:nvSpPr>
+        <p:spPr>
+          <a:xfrm>
+            <a:off x="3403854" y="5804154"/>
+            <a:ext cx="2526030" cy="788670"/>
+          </a:xfrm>
+          <a:prstGeom prst="rect">
+            <a:avLst/>
+          </a:prstGeom>
+          <a:noFill/>
+        </p:spPr>
+        <p:txBody>
+          <a:bodyPr wrap="square" anchor="t" lIns="45720" rIns="45720" tIns="27432" bIns="27432">
+            <a:normAutofit/>
+          </a:bodyPr>
+          <a:lstStyle/>
+          <a:p>
+            <a:pPr algn="l"/>
+            <a:r>
+              <a:rPr sz="1100" b="1">
+                <a:solidFill>
+                  <a:srgbClr val="5B3E83"/>
+                </a:solidFill>
+                <a:latin typeface="Bricolage Grotesque"/>
+              </a:rPr>
+              <a:t>marco · médico/-a</a:t>
+            </a:r>
+          </a:p>
+          <a:p>
+            <a:pPr algn="l"/>
+            <a:r>
+              <a:rPr sz="1000">
+                <a:solidFill>
+                  <a:srgbClr val="20242E"/>
+                </a:solidFill>
+                <a:latin typeface="Inter"/>
+              </a:rPr>
+              <a:t>Y sobre todo, …</a:t>
+            </a:r>
+          </a:p>
+        </p:txBody>
+      </p:sp>
+    </p:spTree>
+  </p:cSld>
+  <p:clrMapOvr>
+    <a:masterClrMapping/>
+  </p:clrMapOvr>
+  <p:timing>
+    <p:tnLst>
+      <p:par>
+        <p:cTn id="1" dur="indefinite" restart="never" nodeType="tmRoot">
+          <p:childTnLst>
+            <p:seq concurrent="1" nextAc="seek">
+              <p:cTn id="2" dur="indefinite" nodeType="mainSeq">
+                <p:childTnLst>
+                  <p:par>
+                    <p:cTn id="5" fill="hold">
+                      <p:stCondLst>
+                        <p:cond delay="indefinite"/>
+                      </p:stCondLst>
+                      <p:childTnLst>
+                        <p:par>
+                          <p:cTn id="6" fill="hold">
+                            <p:stCondLst>
+                              <p:cond delay="0"/>
+                            </p:stCondLst>
+                            <p:childTnLst>
+                              <p:par>
+                                <p:cTn id="7" presetID="10" presetClass="entr" presetSubtype="0" fill="hold" grpId="0" nodeType="clickEffect">
+                                  <p:stCondLst>
+                                    <p:cond delay="0"/>
+                                  </p:stCondLst>
+                                  <p:childTnLst>
+                                    <p:set>
+                                      <p:cBhvr>
+                                        <p:cTn id="8" dur="1" fill="hold">
+                                          <p:stCondLst>
+                                            <p:cond delay="0"/>
+                                          </p:stCondLst>
+                                        </p:cTn>
+                                        <p:tgtEl>
+                                          <p:spTgt spid="19"/>
+                                        </p:tgtEl>
+                                        <p:attrNameLst>
+                                          <p:attrName>style.visibility</p:attrName>
+                                        </p:attrNameLst>
+                                      </p:cBhvr>
+                                      <p:to>
+                                        <p:strVal val="visible"/>
+                                      </p:to>
+                                    </p:set>
+                                    <p:animEffect transition="in" filter="fade">
+                                      <p:cBhvr>
+                                        <p:cTn id="9" dur="500"/>
+                                        <p:tgtEl>
+                                          <p:spTgt spid="19"/>
+                                        </p:tgtEl>
+                                      </p:cBhvr>
+                                    </p:animEffect>
+                                  </p:childTnLst>
+                                </p:cTn>
+                              </p:par>
+                            </p:childTnLst>
+                          </p:cTn>
+                        </p:par>
+                      </p:childTnLst>
+                    </p:cTn>
+                  </p:par>
+                  <p:par>
+                    <p:cTn id="10" fill="hold">
+                      <p:stCondLst>
+                        <p:cond delay="indefinite"/>
+                      </p:stCondLst>
+                      <p:childTnLst>
+                        <p:par>
+                          <p:cTn id="11" fill="hold">
+                            <p:stCondLst>
+                              <p:cond delay="0"/>
+                            </p:stCondLst>
+                            <p:childTnLst>
+                              <p:par>
+                                <p:cTn id="12" presetID="10" presetClass="entr" presetSubtype="0" fill="hold" grpId="0" nodeType="clickEffect">
+                                  <p:stCondLst>
+                                    <p:cond delay="0"/>
+                                  </p:stCondLst>
+                                  <p:childTnLst>
+                                    <p:set>
+                                      <p:cBhvr>
+                                        <p:cTn id="13" dur="1" fill="hold">
+                                          <p:stCondLst>
+                                            <p:cond delay="0"/>
+                                          </p:stCondLst>
+                                        </p:cTn>
+                                        <p:tgtEl>
+                                          <p:spTgt spid="20"/>
+                                        </p:tgtEl>
+                                        <p:attrNameLst>
+                                          <p:attrName>style.visibility</p:attrName>
+                                        </p:attrNameLst>
+                                      </p:cBhvr>
+                                      <p:to>
+                                        <p:strVal val="visible"/>
+                                      </p:to>
+                                    </p:set>
+                                    <p:animEffect transition="in" filter="fade">
+                                      <p:cBhvr>
+                                        <p:cTn id="14" dur="500"/>
+                                        <p:tgtEl>
+                                          <p:spTgt spid="20"/>
+                                        </p:tgtEl>
+                                      </p:cBhvr>
+                                    </p:animEffect>
+                                  </p:childTnLst>
+                                </p:cTn>
+                              </p:par>
+                            </p:childTnLst>
+                          </p:cTn>
+                        </p:par>
+                      </p:childTnLst>
+                    </p:cTn>
+                  </p:par>
+                  <p:par>
+                    <p:cTn id="15" fill="hold">
+                      <p:stCondLst>
+                        <p:cond delay="indefinite"/>
+                      </p:stCondLst>
+                      <p:childTnLst>
+                        <p:par>
+                          <p:cTn id="16" fill="hold">
+                            <p:stCondLst>
+                              <p:cond delay="0"/>
+                            </p:stCondLst>
+                            <p:childTnLst>
+                              <p:par>
+                                <p:cTn id="17" presetID="10" presetClass="entr" presetSubtype="0" fill="hold" grpId="0" nodeType="clickEffect">
+                                  <p:stCondLst>
+                                    <p:cond delay="0"/>
+                                  </p:stCondLst>
+                                  <p:childTnLst>
+                                    <p:set>
+                                      <p:cBhvr>
+                                        <p:cTn id="18" dur="1" fill="hold">
+                                          <p:stCondLst>
+                                            <p:cond delay="0"/>
+                                          </p:stCondLst>
+                                        </p:cTn>
+                                        <p:tgtEl>
+                                          <p:spTgt spid="23"/>
+                                        </p:tgtEl>
+                                        <p:attrNameLst>
+                                          <p:attrName>style.visibility</p:attrName>
+                                        </p:attrNameLst>
+                                      </p:cBhvr>
+                                      <p:to>
+                                        <p:strVal val="visible"/>
+                                      </p:to>
+                                    </p:set>
+                                    <p:animEffect transition="in" filter="fade">
+                                      <p:cBhvr>
+                                        <p:cTn id="19" dur="500"/>
+                                        <p:tgtEl>
+                                          <p:spTgt spid="23"/>
+                                        </p:tgtEl>
+                                      </p:cBhvr>
+                                    </p:animEffect>
+                                  </p:childTnLst>
+                                </p:cTn>
+                              </p:par>
+                            </p:childTnLst>
+                          </p:cTn>
+                        </p:par>
+                      </p:childTnLst>
+                    </p:cTn>
+                  </p:par>
+                  <p:par>
+                    <p:cTn id="20" fill="hold">
+                      <p:stCondLst>
+                        <p:cond delay="indefinite"/>
+                      </p:stCondLst>
+                      <p:childTnLst>
+                        <p:par>
+                          <p:cTn id="21" fill="hold">
+                            <p:stCondLst>
+                              <p:cond delay="0"/>
+                            </p:stCondLst>
+                            <p:childTnLst>
+                              <p:par>
+                                <p:cTn id="22" presetID="10" presetClass="entr" presetSubtype="0" fill="hold" grpId="0" nodeType="clickEffect">
+                                  <p:stCondLst>
+                                    <p:cond delay="0"/>
+                                  </p:stCondLst>
+                                  <p:childTnLst>
+                                    <p:set>
+                                      <p:cBhvr>
+                                        <p:cTn id="23" dur="1" fill="hold">
+                                          <p:stCondLst>
+                                            <p:cond delay="0"/>
+                                          </p:stCondLst>
+                                        </p:cTn>
+                                        <p:tgtEl>
+                                          <p:spTgt spid="24"/>
+                                        </p:tgtEl>
+                                        <p:attrNameLst>
+                                          <p:attrName>style.visibility</p:attrName>
+                                        </p:attrNameLst>
+                                      </p:cBhvr>
+                                      <p:to>
+                                        <p:strVal val="visible"/>
+                                      </p:to>
+                                    </p:set>
+                                    <p:animEffect transition="in" filter="fade">
+                                      <p:cBhvr>
+                                        <p:cTn id="24" dur="500"/>
+                                        <p:tgtEl>
+                                          <p:spTgt spid="24"/>
+                                        </p:tgtEl>
+                                      </p:cBhvr>
+                                    </p:animEffect>
+                                  </p:childTnLst>
+                                </p:cTn>
+                              </p:par>
+                            </p:childTnLst>
+                          </p:cTn>
+                        </p:par>
+                      </p:childTnLst>
+                    </p:cTn>
+                  </p:par>
+                  <p:par>
+                    <p:cTn id="25" fill="hold">
+                      <p:stCondLst>
+                        <p:cond delay="indefinite"/>
+                      </p:stCondLst>
+                      <p:childTnLst>
+                        <p:par>
+                          <p:cTn id="26" fill="hold">
+                            <p:stCondLst>
+                              <p:cond delay="0"/>
+                            </p:stCondLst>
+                            <p:childTnLst>
+                              <p:par>
+                                <p:cTn id="27" presetID="10" presetClass="entr" presetSubtype="0" fill="hold" grpId="0" nodeType="clickEffect">
+                                  <p:stCondLst>
+                                    <p:cond delay="0"/>
+                                  </p:stCondLst>
+                                  <p:childTnLst>
+                                    <p:set>
+                                      <p:cBhvr>
+                                        <p:cTn id="28" dur="1" fill="hold">
+                                          <p:stCondLst>
+                                            <p:cond delay="0"/>
+                                          </p:stCondLst>
+                                        </p:cTn>
+                                        <p:tgtEl>
+                                          <p:spTgt spid="27"/>
+                                        </p:tgtEl>
+                                        <p:attrNameLst>
+                                          <p:attrName>style.visibility</p:attrName>
+                                        </p:attrNameLst>
+                                      </p:cBhvr>
+                                      <p:to>
+                                        <p:strVal val="visible"/>
+                                      </p:to>
+                                    </p:set>
+                                    <p:animEffect transition="in" filter="fade">
+                                      <p:cBhvr>
+                                        <p:cTn id="29" dur="500"/>
+                                        <p:tgtEl>
+                                          <p:spTgt spid="27"/>
+                                        </p:tgtEl>
+                                      </p:cBhvr>
+                                    </p:animEffect>
+                                  </p:childTnLst>
+                                </p:cTn>
+                              </p:par>
+                            </p:childTnLst>
+                          </p:cTn>
+                        </p:par>
+                      </p:childTnLst>
+                    </p:cTn>
+                  </p:par>
+                  <p:par>
+                    <p:cTn id="30" fill="hold">
+                      <p:stCondLst>
+                        <p:cond delay="indefinite"/>
+                      </p:stCondLst>
+                      <p:childTnLst>
+                        <p:par>
+                          <p:cTn id="31" fill="hold">
+                            <p:stCondLst>
+                              <p:cond delay="0"/>
+                            </p:stCondLst>
+                            <p:childTnLst>
+                              <p:par>
+                                <p:cTn id="32" presetID="10" presetClass="entr" presetSubtype="0" fill="hold" grpId="0" nodeType="clickEffect">
+                                  <p:stCondLst>
+                                    <p:cond delay="0"/>
+                                  </p:stCondLst>
+                                  <p:childTnLst>
+                                    <p:set>
+                                      <p:cBhvr>
+                                        <p:cTn id="33" dur="1" fill="hold">
+                                          <p:stCondLst>
+                                            <p:cond delay="0"/>
+                                          </p:stCondLst>
+                                        </p:cTn>
+                                        <p:tgtEl>
+                                          <p:spTgt spid="28"/>
+                                        </p:tgtEl>
+                                        <p:attrNameLst>
+                                          <p:attrName>style.visibility</p:attrName>
+                                        </p:attrNameLst>
+                                      </p:cBhvr>
+                                      <p:to>
+                                        <p:strVal val="visible"/>
+                                      </p:to>
+                                    </p:set>
+                                    <p:animEffect transition="in" filter="fade">
+                                      <p:cBhvr>
+                                        <p:cTn id="34" dur="500"/>
+                                        <p:tgtEl>
+                                          <p:spTgt spid="28"/>
+                                        </p:tgtEl>
+                                      </p:cBhvr>
+                                    </p:animEffect>
+                                  </p:childTnLst>
+                                </p:cTn>
+                              </p:par>
+                            </p:childTnLst>
+                          </p:cTn>
+                        </p:par>
+                      </p:childTnLst>
+                    </p:cTn>
+                  </p:par>
+                  <p:par>
+                    <p:cTn id="35" fill="hold">
+                      <p:stCondLst>
+                        <p:cond delay="indefinite"/>
+                      </p:stCondLst>
+                      <p:childTnLst>
+                        <p:par>
+                          <p:cTn id="36" fill="hold">
+                            <p:stCondLst>
+                              <p:cond delay="0"/>
+                            </p:stCondLst>
+                            <p:childTnLst>
+                              <p:par>
+                                <p:cTn id="37" presetID="10" presetClass="entr" presetSubtype="0" fill="hold" grpId="0" nodeType="clickEffect">
+                                  <p:stCondLst>
+                                    <p:cond delay="0"/>
+                                  </p:stCondLst>
+                                  <p:childTnLst>
+                                    <p:set>
+                                      <p:cBhvr>
+                                        <p:cTn id="38" dur="1" fill="hold">
+                                          <p:stCondLst>
+                                            <p:cond delay="0"/>
+                                          </p:stCondLst>
+                                        </p:cTn>
+                                        <p:tgtEl>
+                                          <p:spTgt spid="31"/>
+                                        </p:tgtEl>
+                                        <p:attrNameLst>
+                                          <p:attrName>style.visibility</p:attrName>
+                                        </p:attrNameLst>
+                                      </p:cBhvr>
+                                      <p:to>
+                                        <p:strVal val="visible"/>
+                                      </p:to>
+                                    </p:set>
+                                    <p:animEffect transition="in" filter="fade">
+                                      <p:cBhvr>
+                                        <p:cTn id="39" dur="500"/>
+                                        <p:tgtEl>
+                                          <p:spTgt spid="31"/>
+                                        </p:tgtEl>
+                                      </p:cBhvr>
+                                    </p:animEffect>
+                                  </p:childTnLst>
+                                </p:cTn>
+                              </p:par>
+                            </p:childTnLst>
+                          </p:cTn>
+                        </p:par>
+                      </p:childTnLst>
+                    </p:cTn>
+                  </p:par>
+                  <p:par>
+                    <p:cTn id="40" fill="hold">
+                      <p:stCondLst>
+                        <p:cond delay="indefinite"/>
+                      </p:stCondLst>
+                      <p:childTnLst>
+                        <p:par>
+                          <p:cTn id="41" fill="hold">
+                            <p:stCondLst>
+                              <p:cond delay="0"/>
+                            </p:stCondLst>
+                            <p:childTnLst>
+                              <p:par>
+                                <p:cTn id="42" presetID="10" presetClass="entr" presetSubtype="0" fill="hold" grpId="0" nodeType="clickEffect">
+                                  <p:stCondLst>
+                                    <p:cond delay="0"/>
+                                  </p:stCondLst>
+                                  <p:childTnLst>
+                                    <p:set>
+                                      <p:cBhvr>
+                                        <p:cTn id="43" dur="1" fill="hold">
+                                          <p:stCondLst>
+                                            <p:cond delay="0"/>
+                                          </p:stCondLst>
+                                        </p:cTn>
+                                        <p:tgtEl>
+                                          <p:spTgt spid="32"/>
+                                        </p:tgtEl>
+                                        <p:attrNameLst>
+                                          <p:attrName>style.visibility</p:attrName>
+                                        </p:attrNameLst>
+                                      </p:cBhvr>
+                                      <p:to>
+                                        <p:strVal val="visible"/>
+                                      </p:to>
+                                    </p:set>
+                                    <p:animEffect transition="in" filter="fade">
+                                      <p:cBhvr>
+                                        <p:cTn id="44" dur="500"/>
+                                        <p:tgtEl>
+                                          <p:spTgt spid="32"/>
+                                        </p:tgtEl>
+                                      </p:cBhvr>
+                                    </p:animEffect>
+                                  </p:childTnLst>
+                                </p:cTn>
+                              </p:par>
+                            </p:childTnLst>
+                          </p:cTn>
+                        </p:par>
+                      </p:childTnLst>
+                    </p:cTn>
+                  </p:par>
+                  <p:par>
+                    <p:cTn id="45" fill="hold">
+                      <p:stCondLst>
+                        <p:cond delay="indefinite"/>
+                      </p:stCondLst>
+                      <p:childTnLst>
+                        <p:par>
+                          <p:cTn id="46" fill="hold">
+                            <p:stCondLst>
+                              <p:cond delay="0"/>
+                            </p:stCondLst>
+                            <p:childTnLst>
+                              <p:par>
+                                <p:cTn id="47" presetID="10" presetClass="entr" presetSubtype="0" fill="hold" grpId="0" nodeType="clickEffect">
+                                  <p:stCondLst>
+                                    <p:cond delay="0"/>
+                                  </p:stCondLst>
+                                  <p:childTnLst>
+                                    <p:set>
+                                      <p:cBhvr>
+                                        <p:cTn id="48" dur="1" fill="hold">
+                                          <p:stCondLst>
+                                            <p:cond delay="0"/>
+                                          </p:stCondLst>
+                                        </p:cTn>
+                                        <p:tgtEl>
+                                          <p:spTgt spid="35"/>
+                                        </p:tgtEl>
+                                        <p:attrNameLst>
+                                          <p:attrName>style.visibility</p:attrName>
+                                        </p:attrNameLst>
+                                      </p:cBhvr>
+                                      <p:to>
+                                        <p:strVal val="visible"/>
+                                      </p:to>
+                                    </p:set>
+                                    <p:animEffect transition="in" filter="fade">
+                                      <p:cBhvr>
+                                        <p:cTn id="49" dur="500"/>
+                                        <p:tgtEl>
+                                          <p:spTgt spid="35"/>
+                                        </p:tgtEl>
+                                      </p:cBhvr>
+                                    </p:animEffect>
+                                  </p:childTnLst>
+                                </p:cTn>
+                              </p:par>
+                            </p:childTnLst>
+                          </p:cTn>
+                        </p:par>
+                      </p:childTnLst>
+                    </p:cTn>
+                  </p:par>
+                  <p:par>
+                    <p:cTn id="50" fill="hold">
+                      <p:stCondLst>
+                        <p:cond delay="indefinite"/>
+                      </p:stCondLst>
+                      <p:childTnLst>
+                        <p:par>
+                          <p:cTn id="51" fill="hold">
+                            <p:stCondLst>
+                              <p:cond delay="0"/>
+                            </p:stCondLst>
+                            <p:childTnLst>
+                              <p:par>
+                                <p:cTn id="52" presetID="10" presetClass="entr" presetSubtype="0" fill="hold" grpId="0" nodeType="clickEffect">
+                                  <p:stCondLst>
+                                    <p:cond delay="0"/>
+                                  </p:stCondLst>
+                                  <p:childTnLst>
+                                    <p:set>
+                                      <p:cBhvr>
+                                        <p:cTn id="53" dur="1" fill="hold">
+                                          <p:stCondLst>
+                                            <p:cond delay="0"/>
+                                          </p:stCondLst>
+                                        </p:cTn>
+                                        <p:tgtEl>
+                                          <p:spTgt spid="36"/>
+                                        </p:tgtEl>
+                                        <p:attrNameLst>
+                                          <p:attrName>style.visibility</p:attrName>
+                                        </p:attrNameLst>
+                                      </p:cBhvr>
+                                      <p:to>
+                                        <p:strVal val="visible"/>
+                                      </p:to>
+                                    </p:set>
+                                    <p:animEffect transition="in" filter="fade">
+                                      <p:cBhvr>
+                                        <p:cTn id="54" dur="500"/>
+                                        <p:tgtEl>
+                                          <p:spTgt spid="36"/>
+                                        </p:tgtEl>
+                                      </p:cBhvr>
+                                    </p:animEffect>
+                                  </p:childTnLst>
+                                </p:cTn>
+                              </p:par>
+                            </p:childTnLst>
+                          </p:cTn>
+                        </p:par>
+                      </p:childTnLst>
+                    </p:cTn>
+                  </p:par>
+                  <p:par>
+                    <p:cTn id="55" fill="hold">
+                      <p:stCondLst>
+                        <p:cond delay="indefinite"/>
+                      </p:stCondLst>
+                      <p:childTnLst>
+                        <p:par>
+                          <p:cTn id="56" fill="hold">
+                            <p:stCondLst>
+                              <p:cond delay="0"/>
+                            </p:stCondLst>
+                            <p:childTnLst>
+                              <p:par>
+                                <p:cTn id="57" presetID="10" presetClass="entr" presetSubtype="0" fill="hold" grpId="0" nodeType="clickEffect">
+                                  <p:stCondLst>
+                                    <p:cond delay="0"/>
+                                  </p:stCondLst>
+                                  <p:childTnLst>
+                                    <p:set>
+                                      <p:cBhvr>
+                                        <p:cTn id="58" dur="1" fill="hold">
+                                          <p:stCondLst>
+                                            <p:cond delay="0"/>
+                                          </p:stCondLst>
+                                        </p:cTn>
+                                        <p:tgtEl>
+                                          <p:spTgt spid="39"/>
+                                        </p:tgtEl>
+                                        <p:attrNameLst>
+                                          <p:attrName>style.visibility</p:attrName>
+                                        </p:attrNameLst>
+                                      </p:cBhvr>
+                                      <p:to>
+                                        <p:strVal val="visible"/>
+                                      </p:to>
+                                    </p:set>
+                                    <p:animEffect transition="in" filter="fade">
+                                      <p:cBhvr>
+                                        <p:cTn id="59" dur="500"/>
+                                        <p:tgtEl>
+                                          <p:spTgt spid="39"/>
+                                        </p:tgtEl>
+                                      </p:cBhvr>
+                                    </p:animEffect>
+                                  </p:childTnLst>
+                                </p:cTn>
+                              </p:par>
+                            </p:childTnLst>
+                          </p:cTn>
+                        </p:par>
+                      </p:childTnLst>
+                    </p:cTn>
+                  </p:par>
+                  <p:par>
+                    <p:cTn id="60" fill="hold">
+                      <p:stCondLst>
+                        <p:cond delay="indefinite"/>
+                      </p:stCondLst>
+                      <p:childTnLst>
+                        <p:par>
+                          <p:cTn id="61" fill="hold">
+                            <p:stCondLst>
+                              <p:cond delay="0"/>
+                            </p:stCondLst>
+                            <p:childTnLst>
+                              <p:par>
+                                <p:cTn id="62" presetID="10" presetClass="entr" presetSubtype="0" fill="hold" grpId="0" nodeType="clickEffect">
+                                  <p:stCondLst>
+                                    <p:cond delay="0"/>
+                                  </p:stCondLst>
+                                  <p:childTnLst>
+                                    <p:set>
+                                      <p:cBhvr>
+                                        <p:cTn id="63" dur="1" fill="hold">
+                                          <p:stCondLst>
+                                            <p:cond delay="0"/>
+                                          </p:stCondLst>
+                                        </p:cTn>
+                                        <p:tgtEl>
+                                          <p:spTgt spid="40"/>
+                                        </p:tgtEl>
+                                        <p:attrNameLst>
+                                          <p:attrName>style.visibility</p:attrName>
+                                        </p:attrNameLst>
+                                      </p:cBhvr>
+                                      <p:to>
+                                        <p:strVal val="visible"/>
+                                      </p:to>
+                                    </p:set>
+                                    <p:animEffect transition="in" filter="fade">
+                                      <p:cBhvr>
+                                        <p:cTn id="64" dur="500"/>
+                                        <p:tgtEl>
+                                          <p:spTgt spid="40"/>
+                                        </p:tgtEl>
+                                      </p:cBhvr>
+                                    </p:animEffect>
+                                  </p:childTnLst>
+                                </p:cTn>
+                              </p:par>
+                            </p:childTnLst>
+                          </p:cTn>
+                        </p:par>
+                      </p:childTnLst>
+                    </p:cTn>
+                  </p:par>
+                </p:childTnLst>
+              </p:cTn>
+              <p:prevCondLst>
+                <p:cond evt="onPrev" delay="0">
+                  <p:tgtEl>
+                    <p:sldTgt/>
+                  </p:tgtEl>
+                </p:cond>
+              </p:prevCondLst>
+              <p:nextCondLst>
+                <p:cond evt="onNext" delay="0">
+                  <p:tgtEl>
+                    <p:sldTgt/>
+                  </p:tgtEl>
+                </p:cond>
+              </p:nextCondLst>
+            </p:seq>
+          </p:childTnLst>
+        </p:cTn>
+      </p:par>
+    </p:tnLst>
+  </p:timing>
+</p:sld>
+</file>
+
 <file path=ppt/slides/slide3.xml><?xml version="1.0" encoding="utf-8"?>
 <p:sld xmlns:a="http://schemas.openxmlformats.org/drawingml/2006/main" xmlns:p="http://schemas.openxmlformats.org/presentationml/2006/main" xmlns:r="http://schemas.openxmlformats.org/officeDocument/2006/relationships">
   <p:cSld>
